--- a/assets/showcase/inkpod-light/InkPod.pptx
+++ b/assets/showcase/inkpod-light/InkPod.pptx
@@ -600,7 +600,7 @@
           <a:p>
             <a:r>
               <a:rPr lang="en-US" dirty="0"/>
-              <a:t/>
+              <a:t>* 2026.10.27 上午 9 点全渠道开售</a:t>
             </a:r>
             <a:endParaRPr lang="en-US" dirty="0"/>
           </a:p>
@@ -2963,7 +2963,7 @@
           <a:ln/>
         </p:spPr>
         <p:txBody>
-          <a:bodyPr wrap="square" rtlCol="0" anchor="ctr"/>
+          <a:bodyPr wrap="square" rtlCol="0" anchor="t"/>
           <a:lstStyle/>
           <a:p>
             <a:pPr indent="0" marL="0">
@@ -3044,7 +3044,7 @@
           <a:ln/>
         </p:spPr>
         <p:txBody>
-          <a:bodyPr wrap="square" rtlCol="0" anchor="ctr"/>
+          <a:bodyPr wrap="square" rtlCol="0" anchor="t"/>
           <a:lstStyle/>
           <a:p>
             <a:pPr indent="0" marL="0">
@@ -3125,7 +3125,7 @@
           <a:ln/>
         </p:spPr>
         <p:txBody>
-          <a:bodyPr wrap="square" rtlCol="0" anchor="ctr"/>
+          <a:bodyPr wrap="square" rtlCol="0" anchor="t"/>
           <a:lstStyle/>
           <a:p>
             <a:pPr indent="0" marL="0">
@@ -3585,7 +3585,7 @@
           <a:ln/>
         </p:spPr>
         <p:txBody>
-          <a:bodyPr wrap="square" rtlCol="0" anchor="ctr"/>
+          <a:bodyPr wrap="square" rtlCol="0" anchor="t"/>
           <a:lstStyle/>
           <a:p>
             <a:pPr indent="0" marL="0">
@@ -3667,7 +3667,7 @@
           <a:ln/>
         </p:spPr>
         <p:txBody>
-          <a:bodyPr wrap="square" rtlCol="0" anchor="ctr"/>
+          <a:bodyPr wrap="square" rtlCol="0" anchor="t"/>
           <a:lstStyle/>
           <a:p>
             <a:pPr indent="0" marL="0">

--- a/assets/showcase/inkpod-light/InkPod.pptx
+++ b/assets/showcase/inkpod-light/InkPod.pptx
@@ -1940,6 +1940,298 @@
   <p:clrMapOvr>
     <a:masterClrMapping/>
   </p:clrMapOvr>
+  <p:transition xmlns:p14="http://schemas.microsoft.com/office/powerpoint/2010/main" spd="slow" p14:dur="700">
+    <p:fade/>
+  </p:transition>
+  <p:timing xmlns:p="http://schemas.openxmlformats.org/presentationml/2006/main">
+    <p:tnLst>
+      <p:par>
+        <p:cTn id="1" dur="indefinite" restart="never" nodeType="tmRoot">
+          <p:childTnLst>
+            <p:seq concurrent="1" nextAc="seek">
+              <p:cTn id="2" dur="indefinite" nodeType="mainSeq">
+                <p:childTnLst>
+                  <p:par>
+                    <p:cTn id="3" fill="hold">
+                      <p:stCondLst>
+                        <p:cond delay="indefinite"/>
+                        <p:cond evt="onBegin" delay="0">
+                          <p:tn val="2"/>
+                        </p:cond>
+                      </p:stCondLst>
+                      <p:childTnLst>
+                        <p:par>
+                          <p:cTn id="4" fill="hold">
+                            <p:stCondLst>
+                              <p:cond delay="0"/>
+                            </p:stCondLst>
+                            <p:childTnLst>
+                              <p:par>
+                                <p:cTn id="5" presetID="10" presetClass="entr" presetSubtype="0" fill="hold" grpId="0" nodeType="withEffect">
+                                  <p:stCondLst>
+                                    <p:cond delay="0"/>
+                                  </p:stCondLst>
+                                  <p:childTnLst>
+                                    <p:set>
+                                      <p:cBhvr>
+                                        <p:cTn id="6" dur="1" fill="hold">
+                                          <p:stCondLst>
+                                            <p:cond delay="0"/>
+                                          </p:stCondLst>
+                                        </p:cTn>
+                                        <p:tgtEl>
+                                          <p:spTgt spid="2"/>
+                                        </p:tgtEl>
+                                        <p:attrNameLst>
+                                          <p:attrName>style.visibility</p:attrName>
+                                        </p:attrNameLst>
+                                      </p:cBhvr>
+                                      <p:to>
+                                        <p:strVal val="visible"/>
+                                      </p:to>
+                                    </p:set>
+                                    <p:animEffect transition="in" filter="fade">
+                                      <p:cBhvr>
+                                        <p:cTn id="7" dur="450"/>
+                                        <p:tgtEl>
+                                          <p:spTgt spid="2"/>
+                                        </p:tgtEl>
+                                      </p:cBhvr>
+                                    </p:animEffect>
+                                    <p:anim calcmode="lin" valueType="num">
+                                      <p:cBhvr additive="base">
+                                        <p:cTn id="8" dur="450" fill="hold"/>
+                                        <p:tgtEl>
+                                          <p:spTgt spid="2"/>
+                                        </p:tgtEl>
+                                        <p:attrNameLst>
+                                          <p:attrName>ppt_y</p:attrName>
+                                        </p:attrNameLst>
+                                      </p:cBhvr>
+                                      <p:tavLst>
+                                        <p:tav tm="0">
+                                          <p:val>
+                                            <p:strVal val="#ppt_y+0.025"/>
+                                          </p:val>
+                                        </p:tav>
+                                        <p:tav tm="100000">
+                                          <p:val>
+                                            <p:strVal val="#ppt_y"/>
+                                          </p:val>
+                                        </p:tav>
+                                      </p:tavLst>
+                                    </p:anim>
+                                  </p:childTnLst>
+                                </p:cTn>
+                              </p:par>
+                              <p:par>
+                                <p:cTn id="9" presetID="10" presetClass="entr" presetSubtype="0" fill="hold" grpId="0" nodeType="withEffect">
+                                  <p:stCondLst>
+                                    <p:cond delay="160"/>
+                                  </p:stCondLst>
+                                  <p:childTnLst>
+                                    <p:set>
+                                      <p:cBhvr>
+                                        <p:cTn id="10" dur="1" fill="hold">
+                                          <p:stCondLst>
+                                            <p:cond delay="0"/>
+                                          </p:stCondLst>
+                                        </p:cTn>
+                                        <p:tgtEl>
+                                          <p:spTgt spid="3"/>
+                                        </p:tgtEl>
+                                        <p:attrNameLst>
+                                          <p:attrName>style.visibility</p:attrName>
+                                        </p:attrNameLst>
+                                      </p:cBhvr>
+                                      <p:to>
+                                        <p:strVal val="visible"/>
+                                      </p:to>
+                                    </p:set>
+                                    <p:animEffect transition="in" filter="fade">
+                                      <p:cBhvr>
+                                        <p:cTn id="11" dur="450"/>
+                                        <p:tgtEl>
+                                          <p:spTgt spid="3"/>
+                                        </p:tgtEl>
+                                      </p:cBhvr>
+                                    </p:animEffect>
+                                    <p:anim calcmode="lin" valueType="num">
+                                      <p:cBhvr additive="base">
+                                        <p:cTn id="12" dur="450" fill="hold"/>
+                                        <p:tgtEl>
+                                          <p:spTgt spid="3"/>
+                                        </p:tgtEl>
+                                        <p:attrNameLst>
+                                          <p:attrName>ppt_y</p:attrName>
+                                        </p:attrNameLst>
+                                      </p:cBhvr>
+                                      <p:tavLst>
+                                        <p:tav tm="0">
+                                          <p:val>
+                                            <p:strVal val="#ppt_y+0.025"/>
+                                          </p:val>
+                                        </p:tav>
+                                        <p:tav tm="100000">
+                                          <p:val>
+                                            <p:strVal val="#ppt_y"/>
+                                          </p:val>
+                                        </p:tav>
+                                      </p:tavLst>
+                                    </p:anim>
+                                  </p:childTnLst>
+                                </p:cTn>
+                              </p:par>
+                              <p:par>
+                                <p:cTn id="13" presetID="10" presetClass="entr" presetSubtype="0" fill="hold" grpId="0" nodeType="withEffect">
+                                  <p:stCondLst>
+                                    <p:cond delay="320"/>
+                                  </p:stCondLst>
+                                  <p:childTnLst>
+                                    <p:set>
+                                      <p:cBhvr>
+                                        <p:cTn id="14" dur="1" fill="hold">
+                                          <p:stCondLst>
+                                            <p:cond delay="0"/>
+                                          </p:stCondLst>
+                                        </p:cTn>
+                                        <p:tgtEl>
+                                          <p:spTgt spid="4"/>
+                                        </p:tgtEl>
+                                        <p:attrNameLst>
+                                          <p:attrName>style.visibility</p:attrName>
+                                        </p:attrNameLst>
+                                      </p:cBhvr>
+                                      <p:to>
+                                        <p:strVal val="visible"/>
+                                      </p:to>
+                                    </p:set>
+                                    <p:animEffect transition="in" filter="fade">
+                                      <p:cBhvr>
+                                        <p:cTn id="15" dur="450"/>
+                                        <p:tgtEl>
+                                          <p:spTgt spid="4"/>
+                                        </p:tgtEl>
+                                      </p:cBhvr>
+                                    </p:animEffect>
+                                    <p:anim calcmode="lin" valueType="num">
+                                      <p:cBhvr additive="base">
+                                        <p:cTn id="16" dur="450" fill="hold"/>
+                                        <p:tgtEl>
+                                          <p:spTgt spid="4"/>
+                                        </p:tgtEl>
+                                        <p:attrNameLst>
+                                          <p:attrName>ppt_y</p:attrName>
+                                        </p:attrNameLst>
+                                      </p:cBhvr>
+                                      <p:tavLst>
+                                        <p:tav tm="0">
+                                          <p:val>
+                                            <p:strVal val="#ppt_y+0.025"/>
+                                          </p:val>
+                                        </p:tav>
+                                        <p:tav tm="100000">
+                                          <p:val>
+                                            <p:strVal val="#ppt_y"/>
+                                          </p:val>
+                                        </p:tav>
+                                      </p:tavLst>
+                                    </p:anim>
+                                  </p:childTnLst>
+                                </p:cTn>
+                              </p:par>
+                              <p:par>
+                                <p:cTn id="17" presetID="10" presetClass="entr" presetSubtype="0" fill="hold" grpId="0" nodeType="withEffect">
+                                  <p:stCondLst>
+                                    <p:cond delay="480"/>
+                                  </p:stCondLst>
+                                  <p:childTnLst>
+                                    <p:set>
+                                      <p:cBhvr>
+                                        <p:cTn id="18" dur="1" fill="hold">
+                                          <p:stCondLst>
+                                            <p:cond delay="0"/>
+                                          </p:stCondLst>
+                                        </p:cTn>
+                                        <p:tgtEl>
+                                          <p:spTgt spid="5"/>
+                                        </p:tgtEl>
+                                        <p:attrNameLst>
+                                          <p:attrName>style.visibility</p:attrName>
+                                        </p:attrNameLst>
+                                      </p:cBhvr>
+                                      <p:to>
+                                        <p:strVal val="visible"/>
+                                      </p:to>
+                                    </p:set>
+                                    <p:animEffect transition="in" filter="fade">
+                                      <p:cBhvr>
+                                        <p:cTn id="19" dur="450"/>
+                                        <p:tgtEl>
+                                          <p:spTgt spid="5"/>
+                                        </p:tgtEl>
+                                      </p:cBhvr>
+                                    </p:animEffect>
+                                    <p:anim calcmode="lin" valueType="num">
+                                      <p:cBhvr additive="base">
+                                        <p:cTn id="20" dur="450" fill="hold"/>
+                                        <p:tgtEl>
+                                          <p:spTgt spid="5"/>
+                                        </p:tgtEl>
+                                        <p:attrNameLst>
+                                          <p:attrName>ppt_y</p:attrName>
+                                        </p:attrNameLst>
+                                      </p:cBhvr>
+                                      <p:tavLst>
+                                        <p:tav tm="0">
+                                          <p:val>
+                                            <p:strVal val="#ppt_y+0.025"/>
+                                          </p:val>
+                                        </p:tav>
+                                        <p:tav tm="100000">
+                                          <p:val>
+                                            <p:strVal val="#ppt_y"/>
+                                          </p:val>
+                                        </p:tav>
+                                      </p:tavLst>
+                                    </p:anim>
+                                  </p:childTnLst>
+                                </p:cTn>
+                              </p:par>
+                            </p:childTnLst>
+                          </p:cTn>
+                        </p:par>
+                      </p:childTnLst>
+                    </p:cTn>
+                  </p:par>
+                </p:childTnLst>
+              </p:cTn>
+              <p:prevCondLst>
+                <p:cond evt="onPrev" delay="0">
+                  <p:tgtEl>
+                    <p:sldTgt/>
+                  </p:tgtEl>
+                </p:cond>
+              </p:prevCondLst>
+              <p:nextCondLst>
+                <p:cond evt="onNext" delay="0">
+                  <p:tgtEl>
+                    <p:sldTgt/>
+                  </p:tgtEl>
+                </p:cond>
+              </p:nextCondLst>
+            </p:seq>
+          </p:childTnLst>
+        </p:cTn>
+      </p:par>
+    </p:tnLst>
+    <p:bldLst>
+      <p:bldP spid="2" grpId="0"/>
+      <p:bldP spid="3" grpId="0"/>
+      <p:bldP spid="4" grpId="0"/>
+      <p:bldP spid="5" grpId="0"/>
+    </p:bldLst>
+  </p:timing>
 </p:sld>
 </file>
 
@@ -2142,6 +2434,298 @@
   <p:clrMapOvr>
     <a:masterClrMapping/>
   </p:clrMapOvr>
+  <p:transition xmlns:p14="http://schemas.microsoft.com/office/powerpoint/2010/main" spd="slow" p14:dur="700">
+    <p:fade/>
+  </p:transition>
+  <p:timing xmlns:p="http://schemas.openxmlformats.org/presentationml/2006/main">
+    <p:tnLst>
+      <p:par>
+        <p:cTn id="1" dur="indefinite" restart="never" nodeType="tmRoot">
+          <p:childTnLst>
+            <p:seq concurrent="1" nextAc="seek">
+              <p:cTn id="2" dur="indefinite" nodeType="mainSeq">
+                <p:childTnLst>
+                  <p:par>
+                    <p:cTn id="3" fill="hold">
+                      <p:stCondLst>
+                        <p:cond delay="indefinite"/>
+                        <p:cond evt="onBegin" delay="0">
+                          <p:tn val="2"/>
+                        </p:cond>
+                      </p:stCondLst>
+                      <p:childTnLst>
+                        <p:par>
+                          <p:cTn id="4" fill="hold">
+                            <p:stCondLst>
+                              <p:cond delay="0"/>
+                            </p:stCondLst>
+                            <p:childTnLst>
+                              <p:par>
+                                <p:cTn id="5" presetID="10" presetClass="entr" presetSubtype="0" fill="hold" grpId="0" nodeType="withEffect">
+                                  <p:stCondLst>
+                                    <p:cond delay="0"/>
+                                  </p:stCondLst>
+                                  <p:childTnLst>
+                                    <p:set>
+                                      <p:cBhvr>
+                                        <p:cTn id="6" dur="1" fill="hold">
+                                          <p:stCondLst>
+                                            <p:cond delay="0"/>
+                                          </p:stCondLst>
+                                        </p:cTn>
+                                        <p:tgtEl>
+                                          <p:spTgt spid="2"/>
+                                        </p:tgtEl>
+                                        <p:attrNameLst>
+                                          <p:attrName>style.visibility</p:attrName>
+                                        </p:attrNameLst>
+                                      </p:cBhvr>
+                                      <p:to>
+                                        <p:strVal val="visible"/>
+                                      </p:to>
+                                    </p:set>
+                                    <p:animEffect transition="in" filter="fade">
+                                      <p:cBhvr>
+                                        <p:cTn id="7" dur="450"/>
+                                        <p:tgtEl>
+                                          <p:spTgt spid="2"/>
+                                        </p:tgtEl>
+                                      </p:cBhvr>
+                                    </p:animEffect>
+                                    <p:anim calcmode="lin" valueType="num">
+                                      <p:cBhvr additive="base">
+                                        <p:cTn id="8" dur="450" fill="hold"/>
+                                        <p:tgtEl>
+                                          <p:spTgt spid="2"/>
+                                        </p:tgtEl>
+                                        <p:attrNameLst>
+                                          <p:attrName>ppt_y</p:attrName>
+                                        </p:attrNameLst>
+                                      </p:cBhvr>
+                                      <p:tavLst>
+                                        <p:tav tm="0">
+                                          <p:val>
+                                            <p:strVal val="#ppt_y+0.025"/>
+                                          </p:val>
+                                        </p:tav>
+                                        <p:tav tm="100000">
+                                          <p:val>
+                                            <p:strVal val="#ppt_y"/>
+                                          </p:val>
+                                        </p:tav>
+                                      </p:tavLst>
+                                    </p:anim>
+                                  </p:childTnLst>
+                                </p:cTn>
+                              </p:par>
+                              <p:par>
+                                <p:cTn id="9" presetID="10" presetClass="entr" presetSubtype="0" fill="hold" grpId="0" nodeType="withEffect">
+                                  <p:stCondLst>
+                                    <p:cond delay="160"/>
+                                  </p:stCondLst>
+                                  <p:childTnLst>
+                                    <p:set>
+                                      <p:cBhvr>
+                                        <p:cTn id="10" dur="1" fill="hold">
+                                          <p:stCondLst>
+                                            <p:cond delay="0"/>
+                                          </p:stCondLst>
+                                        </p:cTn>
+                                        <p:tgtEl>
+                                          <p:spTgt spid="3"/>
+                                        </p:tgtEl>
+                                        <p:attrNameLst>
+                                          <p:attrName>style.visibility</p:attrName>
+                                        </p:attrNameLst>
+                                      </p:cBhvr>
+                                      <p:to>
+                                        <p:strVal val="visible"/>
+                                      </p:to>
+                                    </p:set>
+                                    <p:animEffect transition="in" filter="fade">
+                                      <p:cBhvr>
+                                        <p:cTn id="11" dur="450"/>
+                                        <p:tgtEl>
+                                          <p:spTgt spid="3"/>
+                                        </p:tgtEl>
+                                      </p:cBhvr>
+                                    </p:animEffect>
+                                    <p:anim calcmode="lin" valueType="num">
+                                      <p:cBhvr additive="base">
+                                        <p:cTn id="12" dur="450" fill="hold"/>
+                                        <p:tgtEl>
+                                          <p:spTgt spid="3"/>
+                                        </p:tgtEl>
+                                        <p:attrNameLst>
+                                          <p:attrName>ppt_y</p:attrName>
+                                        </p:attrNameLst>
+                                      </p:cBhvr>
+                                      <p:tavLst>
+                                        <p:tav tm="0">
+                                          <p:val>
+                                            <p:strVal val="#ppt_y+0.025"/>
+                                          </p:val>
+                                        </p:tav>
+                                        <p:tav tm="100000">
+                                          <p:val>
+                                            <p:strVal val="#ppt_y"/>
+                                          </p:val>
+                                        </p:tav>
+                                      </p:tavLst>
+                                    </p:anim>
+                                  </p:childTnLst>
+                                </p:cTn>
+                              </p:par>
+                              <p:par>
+                                <p:cTn id="13" presetID="10" presetClass="entr" presetSubtype="0" fill="hold" grpId="0" nodeType="withEffect">
+                                  <p:stCondLst>
+                                    <p:cond delay="320"/>
+                                  </p:stCondLst>
+                                  <p:childTnLst>
+                                    <p:set>
+                                      <p:cBhvr>
+                                        <p:cTn id="14" dur="1" fill="hold">
+                                          <p:stCondLst>
+                                            <p:cond delay="0"/>
+                                          </p:stCondLst>
+                                        </p:cTn>
+                                        <p:tgtEl>
+                                          <p:spTgt spid="4"/>
+                                        </p:tgtEl>
+                                        <p:attrNameLst>
+                                          <p:attrName>style.visibility</p:attrName>
+                                        </p:attrNameLst>
+                                      </p:cBhvr>
+                                      <p:to>
+                                        <p:strVal val="visible"/>
+                                      </p:to>
+                                    </p:set>
+                                    <p:animEffect transition="in" filter="fade">
+                                      <p:cBhvr>
+                                        <p:cTn id="15" dur="450"/>
+                                        <p:tgtEl>
+                                          <p:spTgt spid="4"/>
+                                        </p:tgtEl>
+                                      </p:cBhvr>
+                                    </p:animEffect>
+                                    <p:anim calcmode="lin" valueType="num">
+                                      <p:cBhvr additive="base">
+                                        <p:cTn id="16" dur="450" fill="hold"/>
+                                        <p:tgtEl>
+                                          <p:spTgt spid="4"/>
+                                        </p:tgtEl>
+                                        <p:attrNameLst>
+                                          <p:attrName>ppt_y</p:attrName>
+                                        </p:attrNameLst>
+                                      </p:cBhvr>
+                                      <p:tavLst>
+                                        <p:tav tm="0">
+                                          <p:val>
+                                            <p:strVal val="#ppt_y+0.025"/>
+                                          </p:val>
+                                        </p:tav>
+                                        <p:tav tm="100000">
+                                          <p:val>
+                                            <p:strVal val="#ppt_y"/>
+                                          </p:val>
+                                        </p:tav>
+                                      </p:tavLst>
+                                    </p:anim>
+                                  </p:childTnLst>
+                                </p:cTn>
+                              </p:par>
+                              <p:par>
+                                <p:cTn id="17" presetID="10" presetClass="entr" presetSubtype="0" fill="hold" grpId="0" nodeType="withEffect">
+                                  <p:stCondLst>
+                                    <p:cond delay="480"/>
+                                  </p:stCondLst>
+                                  <p:childTnLst>
+                                    <p:set>
+                                      <p:cBhvr>
+                                        <p:cTn id="18" dur="1" fill="hold">
+                                          <p:stCondLst>
+                                            <p:cond delay="0"/>
+                                          </p:stCondLst>
+                                        </p:cTn>
+                                        <p:tgtEl>
+                                          <p:spTgt spid="5"/>
+                                        </p:tgtEl>
+                                        <p:attrNameLst>
+                                          <p:attrName>style.visibility</p:attrName>
+                                        </p:attrNameLst>
+                                      </p:cBhvr>
+                                      <p:to>
+                                        <p:strVal val="visible"/>
+                                      </p:to>
+                                    </p:set>
+                                    <p:animEffect transition="in" filter="fade">
+                                      <p:cBhvr>
+                                        <p:cTn id="19" dur="450"/>
+                                        <p:tgtEl>
+                                          <p:spTgt spid="5"/>
+                                        </p:tgtEl>
+                                      </p:cBhvr>
+                                    </p:animEffect>
+                                    <p:anim calcmode="lin" valueType="num">
+                                      <p:cBhvr additive="base">
+                                        <p:cTn id="20" dur="450" fill="hold"/>
+                                        <p:tgtEl>
+                                          <p:spTgt spid="5"/>
+                                        </p:tgtEl>
+                                        <p:attrNameLst>
+                                          <p:attrName>ppt_y</p:attrName>
+                                        </p:attrNameLst>
+                                      </p:cBhvr>
+                                      <p:tavLst>
+                                        <p:tav tm="0">
+                                          <p:val>
+                                            <p:strVal val="#ppt_y+0.025"/>
+                                          </p:val>
+                                        </p:tav>
+                                        <p:tav tm="100000">
+                                          <p:val>
+                                            <p:strVal val="#ppt_y"/>
+                                          </p:val>
+                                        </p:tav>
+                                      </p:tavLst>
+                                    </p:anim>
+                                  </p:childTnLst>
+                                </p:cTn>
+                              </p:par>
+                            </p:childTnLst>
+                          </p:cTn>
+                        </p:par>
+                      </p:childTnLst>
+                    </p:cTn>
+                  </p:par>
+                </p:childTnLst>
+              </p:cTn>
+              <p:prevCondLst>
+                <p:cond evt="onPrev" delay="0">
+                  <p:tgtEl>
+                    <p:sldTgt/>
+                  </p:tgtEl>
+                </p:cond>
+              </p:prevCondLst>
+              <p:nextCondLst>
+                <p:cond evt="onNext" delay="0">
+                  <p:tgtEl>
+                    <p:sldTgt/>
+                  </p:tgtEl>
+                </p:cond>
+              </p:nextCondLst>
+            </p:seq>
+          </p:childTnLst>
+        </p:cTn>
+      </p:par>
+    </p:tnLst>
+    <p:bldLst>
+      <p:bldP spid="2" grpId="0"/>
+      <p:bldP spid="3" grpId="0"/>
+      <p:bldP spid="4" grpId="0"/>
+      <p:bldP spid="5" grpId="0"/>
+    </p:bldLst>
+  </p:timing>
 </p:sld>
 </file>
 
@@ -2305,6 +2889,239 @@
   <p:clrMapOvr>
     <a:masterClrMapping/>
   </p:clrMapOvr>
+  <p:transition xmlns:p14="http://schemas.microsoft.com/office/powerpoint/2010/main" spd="slow" p14:dur="700">
+    <p:fade/>
+  </p:transition>
+  <p:timing xmlns:p="http://schemas.openxmlformats.org/presentationml/2006/main">
+    <p:tnLst>
+      <p:par>
+        <p:cTn id="1" dur="indefinite" restart="never" nodeType="tmRoot">
+          <p:childTnLst>
+            <p:seq concurrent="1" nextAc="seek">
+              <p:cTn id="2" dur="indefinite" nodeType="mainSeq">
+                <p:childTnLst>
+                  <p:par>
+                    <p:cTn id="3" fill="hold">
+                      <p:stCondLst>
+                        <p:cond delay="indefinite"/>
+                        <p:cond evt="onBegin" delay="0">
+                          <p:tn val="2"/>
+                        </p:cond>
+                      </p:stCondLst>
+                      <p:childTnLst>
+                        <p:par>
+                          <p:cTn id="4" fill="hold">
+                            <p:stCondLst>
+                              <p:cond delay="0"/>
+                            </p:stCondLst>
+                            <p:childTnLst>
+                              <p:par>
+                                <p:cTn id="5" presetID="10" presetClass="entr" presetSubtype="0" fill="hold" grpId="0" nodeType="withEffect">
+                                  <p:stCondLst>
+                                    <p:cond delay="0"/>
+                                  </p:stCondLst>
+                                  <p:childTnLst>
+                                    <p:set>
+                                      <p:cBhvr>
+                                        <p:cTn id="6" dur="1" fill="hold">
+                                          <p:stCondLst>
+                                            <p:cond delay="0"/>
+                                          </p:stCondLst>
+                                        </p:cTn>
+                                        <p:tgtEl>
+                                          <p:spTgt spid="2"/>
+                                        </p:tgtEl>
+                                        <p:attrNameLst>
+                                          <p:attrName>style.visibility</p:attrName>
+                                        </p:attrNameLst>
+                                      </p:cBhvr>
+                                      <p:to>
+                                        <p:strVal val="visible"/>
+                                      </p:to>
+                                    </p:set>
+                                    <p:animEffect transition="in" filter="fade">
+                                      <p:cBhvr>
+                                        <p:cTn id="7" dur="450"/>
+                                        <p:tgtEl>
+                                          <p:spTgt spid="2"/>
+                                        </p:tgtEl>
+                                      </p:cBhvr>
+                                    </p:animEffect>
+                                    <p:anim calcmode="lin" valueType="num">
+                                      <p:cBhvr additive="base">
+                                        <p:cTn id="8" dur="450" fill="hold"/>
+                                        <p:tgtEl>
+                                          <p:spTgt spid="2"/>
+                                        </p:tgtEl>
+                                        <p:attrNameLst>
+                                          <p:attrName>ppt_y</p:attrName>
+                                        </p:attrNameLst>
+                                      </p:cBhvr>
+                                      <p:tavLst>
+                                        <p:tav tm="0">
+                                          <p:val>
+                                            <p:strVal val="#ppt_y+0.025"/>
+                                          </p:val>
+                                        </p:tav>
+                                        <p:tav tm="100000">
+                                          <p:val>
+                                            <p:strVal val="#ppt_y"/>
+                                          </p:val>
+                                        </p:tav>
+                                      </p:tavLst>
+                                    </p:anim>
+                                  </p:childTnLst>
+                                </p:cTn>
+                              </p:par>
+                              <p:par>
+                                <p:cTn id="9" presetID="10" presetClass="entr" presetSubtype="0" fill="hold" grpId="0" nodeType="withEffect">
+                                  <p:stCondLst>
+                                    <p:cond delay="160"/>
+                                  </p:stCondLst>
+                                  <p:childTnLst>
+                                    <p:set>
+                                      <p:cBhvr>
+                                        <p:cTn id="10" dur="1" fill="hold">
+                                          <p:stCondLst>
+                                            <p:cond delay="0"/>
+                                          </p:stCondLst>
+                                        </p:cTn>
+                                        <p:tgtEl>
+                                          <p:spTgt spid="3"/>
+                                        </p:tgtEl>
+                                        <p:attrNameLst>
+                                          <p:attrName>style.visibility</p:attrName>
+                                        </p:attrNameLst>
+                                      </p:cBhvr>
+                                      <p:to>
+                                        <p:strVal val="visible"/>
+                                      </p:to>
+                                    </p:set>
+                                    <p:animEffect transition="in" filter="fade">
+                                      <p:cBhvr>
+                                        <p:cTn id="11" dur="450"/>
+                                        <p:tgtEl>
+                                          <p:spTgt spid="3"/>
+                                        </p:tgtEl>
+                                      </p:cBhvr>
+                                    </p:animEffect>
+                                    <p:anim calcmode="lin" valueType="num">
+                                      <p:cBhvr additive="base">
+                                        <p:cTn id="12" dur="450" fill="hold"/>
+                                        <p:tgtEl>
+                                          <p:spTgt spid="3"/>
+                                        </p:tgtEl>
+                                        <p:attrNameLst>
+                                          <p:attrName>ppt_y</p:attrName>
+                                        </p:attrNameLst>
+                                      </p:cBhvr>
+                                      <p:tavLst>
+                                        <p:tav tm="0">
+                                          <p:val>
+                                            <p:strVal val="#ppt_y+0.025"/>
+                                          </p:val>
+                                        </p:tav>
+                                        <p:tav tm="100000">
+                                          <p:val>
+                                            <p:strVal val="#ppt_y"/>
+                                          </p:val>
+                                        </p:tav>
+                                      </p:tavLst>
+                                    </p:anim>
+                                  </p:childTnLst>
+                                </p:cTn>
+                              </p:par>
+                              <p:par>
+                                <p:cTn id="13" presetID="10" presetClass="entr" presetSubtype="0" fill="hold" grpId="0" nodeType="withEffect">
+                                  <p:stCondLst>
+                                    <p:cond delay="320"/>
+                                  </p:stCondLst>
+                                  <p:childTnLst>
+                                    <p:set>
+                                      <p:cBhvr>
+                                        <p:cTn id="14" dur="1" fill="hold">
+                                          <p:stCondLst>
+                                            <p:cond delay="0"/>
+                                          </p:stCondLst>
+                                        </p:cTn>
+                                        <p:tgtEl>
+                                          <p:spTgt spid="4"/>
+                                        </p:tgtEl>
+                                        <p:attrNameLst>
+                                          <p:attrName>style.visibility</p:attrName>
+                                        </p:attrNameLst>
+                                      </p:cBhvr>
+                                      <p:to>
+                                        <p:strVal val="visible"/>
+                                      </p:to>
+                                    </p:set>
+                                    <p:animEffect transition="in" filter="fade">
+                                      <p:cBhvr>
+                                        <p:cTn id="15" dur="450"/>
+                                        <p:tgtEl>
+                                          <p:spTgt spid="4"/>
+                                        </p:tgtEl>
+                                      </p:cBhvr>
+                                    </p:animEffect>
+                                    <p:anim calcmode="lin" valueType="num">
+                                      <p:cBhvr additive="base">
+                                        <p:cTn id="16" dur="450" fill="hold"/>
+                                        <p:tgtEl>
+                                          <p:spTgt spid="4"/>
+                                        </p:tgtEl>
+                                        <p:attrNameLst>
+                                          <p:attrName>ppt_y</p:attrName>
+                                        </p:attrNameLst>
+                                      </p:cBhvr>
+                                      <p:tavLst>
+                                        <p:tav tm="0">
+                                          <p:val>
+                                            <p:strVal val="#ppt_y+0.025"/>
+                                          </p:val>
+                                        </p:tav>
+                                        <p:tav tm="100000">
+                                          <p:val>
+                                            <p:strVal val="#ppt_y"/>
+                                          </p:val>
+                                        </p:tav>
+                                      </p:tavLst>
+                                    </p:anim>
+                                  </p:childTnLst>
+                                </p:cTn>
+                              </p:par>
+                            </p:childTnLst>
+                          </p:cTn>
+                        </p:par>
+                      </p:childTnLst>
+                    </p:cTn>
+                  </p:par>
+                </p:childTnLst>
+              </p:cTn>
+              <p:prevCondLst>
+                <p:cond evt="onPrev" delay="0">
+                  <p:tgtEl>
+                    <p:sldTgt/>
+                  </p:tgtEl>
+                </p:cond>
+              </p:prevCondLst>
+              <p:nextCondLst>
+                <p:cond evt="onNext" delay="0">
+                  <p:tgtEl>
+                    <p:sldTgt/>
+                  </p:tgtEl>
+                </p:cond>
+              </p:nextCondLst>
+            </p:seq>
+          </p:childTnLst>
+        </p:cTn>
+      </p:par>
+    </p:tnLst>
+    <p:bldLst>
+      <p:bldP spid="2" grpId="0"/>
+      <p:bldP spid="3" grpId="0"/>
+      <p:bldP spid="4" grpId="0"/>
+    </p:bldLst>
+  </p:timing>
 </p:sld>
 </file>
 
@@ -2379,6 +3196,121 @@
   <p:clrMapOvr>
     <a:masterClrMapping/>
   </p:clrMapOvr>
+  <p:transition xmlns:p14="http://schemas.microsoft.com/office/powerpoint/2010/main" spd="slow" p14:dur="700">
+    <p:fade/>
+  </p:transition>
+  <p:timing xmlns:p="http://schemas.openxmlformats.org/presentationml/2006/main">
+    <p:tnLst>
+      <p:par>
+        <p:cTn id="1" dur="indefinite" restart="never" nodeType="tmRoot">
+          <p:childTnLst>
+            <p:seq concurrent="1" nextAc="seek">
+              <p:cTn id="2" dur="indefinite" nodeType="mainSeq">
+                <p:childTnLst>
+                  <p:par>
+                    <p:cTn id="3" fill="hold">
+                      <p:stCondLst>
+                        <p:cond delay="indefinite"/>
+                        <p:cond evt="onBegin" delay="0">
+                          <p:tn val="2"/>
+                        </p:cond>
+                      </p:stCondLst>
+                      <p:childTnLst>
+                        <p:par>
+                          <p:cTn id="4" fill="hold">
+                            <p:stCondLst>
+                              <p:cond delay="0"/>
+                            </p:stCondLst>
+                            <p:childTnLst>
+                              <p:par>
+                                <p:cTn id="5" presetID="10" presetClass="entr" presetSubtype="0" fill="hold" grpId="0" nodeType="withEffect">
+                                  <p:stCondLst>
+                                    <p:cond delay="0"/>
+                                  </p:stCondLst>
+                                  <p:childTnLst>
+                                    <p:set>
+                                      <p:cBhvr>
+                                        <p:cTn id="6" dur="1" fill="hold">
+                                          <p:stCondLst>
+                                            <p:cond delay="0"/>
+                                          </p:stCondLst>
+                                        </p:cTn>
+                                        <p:tgtEl>
+                                          <p:spTgt spid="2"/>
+                                        </p:tgtEl>
+                                        <p:attrNameLst>
+                                          <p:attrName>style.visibility</p:attrName>
+                                        </p:attrNameLst>
+                                      </p:cBhvr>
+                                      <p:to>
+                                        <p:strVal val="visible"/>
+                                      </p:to>
+                                    </p:set>
+                                    <p:animEffect transition="in" filter="fade">
+                                      <p:cBhvr>
+                                        <p:cTn id="7" dur="450"/>
+                                        <p:tgtEl>
+                                          <p:spTgt spid="2"/>
+                                        </p:tgtEl>
+                                      </p:cBhvr>
+                                    </p:animEffect>
+                                    <p:anim calcmode="lin" valueType="num">
+                                      <p:cBhvr additive="base">
+                                        <p:cTn id="8" dur="450" fill="hold"/>
+                                        <p:tgtEl>
+                                          <p:spTgt spid="2"/>
+                                        </p:tgtEl>
+                                        <p:attrNameLst>
+                                          <p:attrName>ppt_y</p:attrName>
+                                        </p:attrNameLst>
+                                      </p:cBhvr>
+                                      <p:tavLst>
+                                        <p:tav tm="0">
+                                          <p:val>
+                                            <p:strVal val="#ppt_y+0.025"/>
+                                          </p:val>
+                                        </p:tav>
+                                        <p:tav tm="100000">
+                                          <p:val>
+                                            <p:strVal val="#ppt_y"/>
+                                          </p:val>
+                                        </p:tav>
+                                      </p:tavLst>
+                                    </p:anim>
+                                  </p:childTnLst>
+                                </p:cTn>
+                              </p:par>
+                            </p:childTnLst>
+                          </p:cTn>
+                        </p:par>
+                      </p:childTnLst>
+                    </p:cTn>
+                  </p:par>
+                </p:childTnLst>
+              </p:cTn>
+              <p:prevCondLst>
+                <p:cond evt="onPrev" delay="0">
+                  <p:tgtEl>
+                    <p:sldTgt/>
+                  </p:tgtEl>
+                </p:cond>
+              </p:prevCondLst>
+              <p:nextCondLst>
+                <p:cond evt="onNext" delay="0">
+                  <p:tgtEl>
+                    <p:sldTgt/>
+                  </p:tgtEl>
+                </p:cond>
+              </p:nextCondLst>
+            </p:seq>
+          </p:childTnLst>
+        </p:cTn>
+      </p:par>
+    </p:tnLst>
+    <p:bldLst>
+      <p:bldP spid="2" grpId="0"/>
+    </p:bldLst>
+  </p:timing>
 </p:sld>
 </file>
 
@@ -2528,6 +3460,239 @@
   <p:clrMapOvr>
     <a:masterClrMapping/>
   </p:clrMapOvr>
+  <p:transition xmlns:p14="http://schemas.microsoft.com/office/powerpoint/2010/main" spd="slow" p14:dur="700">
+    <p:fade/>
+  </p:transition>
+  <p:timing xmlns:p="http://schemas.openxmlformats.org/presentationml/2006/main">
+    <p:tnLst>
+      <p:par>
+        <p:cTn id="1" dur="indefinite" restart="never" nodeType="tmRoot">
+          <p:childTnLst>
+            <p:seq concurrent="1" nextAc="seek">
+              <p:cTn id="2" dur="indefinite" nodeType="mainSeq">
+                <p:childTnLst>
+                  <p:par>
+                    <p:cTn id="3" fill="hold">
+                      <p:stCondLst>
+                        <p:cond delay="indefinite"/>
+                        <p:cond evt="onBegin" delay="0">
+                          <p:tn val="2"/>
+                        </p:cond>
+                      </p:stCondLst>
+                      <p:childTnLst>
+                        <p:par>
+                          <p:cTn id="4" fill="hold">
+                            <p:stCondLst>
+                              <p:cond delay="0"/>
+                            </p:stCondLst>
+                            <p:childTnLst>
+                              <p:par>
+                                <p:cTn id="5" presetID="10" presetClass="entr" presetSubtype="0" fill="hold" grpId="0" nodeType="withEffect">
+                                  <p:stCondLst>
+                                    <p:cond delay="0"/>
+                                  </p:stCondLst>
+                                  <p:childTnLst>
+                                    <p:set>
+                                      <p:cBhvr>
+                                        <p:cTn id="6" dur="1" fill="hold">
+                                          <p:stCondLst>
+                                            <p:cond delay="0"/>
+                                          </p:stCondLst>
+                                        </p:cTn>
+                                        <p:tgtEl>
+                                          <p:spTgt spid="2"/>
+                                        </p:tgtEl>
+                                        <p:attrNameLst>
+                                          <p:attrName>style.visibility</p:attrName>
+                                        </p:attrNameLst>
+                                      </p:cBhvr>
+                                      <p:to>
+                                        <p:strVal val="visible"/>
+                                      </p:to>
+                                    </p:set>
+                                    <p:animEffect transition="in" filter="fade">
+                                      <p:cBhvr>
+                                        <p:cTn id="7" dur="450"/>
+                                        <p:tgtEl>
+                                          <p:spTgt spid="2"/>
+                                        </p:tgtEl>
+                                      </p:cBhvr>
+                                    </p:animEffect>
+                                    <p:anim calcmode="lin" valueType="num">
+                                      <p:cBhvr additive="base">
+                                        <p:cTn id="8" dur="450" fill="hold"/>
+                                        <p:tgtEl>
+                                          <p:spTgt spid="2"/>
+                                        </p:tgtEl>
+                                        <p:attrNameLst>
+                                          <p:attrName>ppt_y</p:attrName>
+                                        </p:attrNameLst>
+                                      </p:cBhvr>
+                                      <p:tavLst>
+                                        <p:tav tm="0">
+                                          <p:val>
+                                            <p:strVal val="#ppt_y+0.025"/>
+                                          </p:val>
+                                        </p:tav>
+                                        <p:tav tm="100000">
+                                          <p:val>
+                                            <p:strVal val="#ppt_y"/>
+                                          </p:val>
+                                        </p:tav>
+                                      </p:tavLst>
+                                    </p:anim>
+                                  </p:childTnLst>
+                                </p:cTn>
+                              </p:par>
+                              <p:par>
+                                <p:cTn id="9" presetID="10" presetClass="entr" presetSubtype="0" fill="hold" grpId="0" nodeType="withEffect">
+                                  <p:stCondLst>
+                                    <p:cond delay="160"/>
+                                  </p:stCondLst>
+                                  <p:childTnLst>
+                                    <p:set>
+                                      <p:cBhvr>
+                                        <p:cTn id="10" dur="1" fill="hold">
+                                          <p:stCondLst>
+                                            <p:cond delay="0"/>
+                                          </p:stCondLst>
+                                        </p:cTn>
+                                        <p:tgtEl>
+                                          <p:spTgt spid="3"/>
+                                        </p:tgtEl>
+                                        <p:attrNameLst>
+                                          <p:attrName>style.visibility</p:attrName>
+                                        </p:attrNameLst>
+                                      </p:cBhvr>
+                                      <p:to>
+                                        <p:strVal val="visible"/>
+                                      </p:to>
+                                    </p:set>
+                                    <p:animEffect transition="in" filter="fade">
+                                      <p:cBhvr>
+                                        <p:cTn id="11" dur="450"/>
+                                        <p:tgtEl>
+                                          <p:spTgt spid="3"/>
+                                        </p:tgtEl>
+                                      </p:cBhvr>
+                                    </p:animEffect>
+                                    <p:anim calcmode="lin" valueType="num">
+                                      <p:cBhvr additive="base">
+                                        <p:cTn id="12" dur="450" fill="hold"/>
+                                        <p:tgtEl>
+                                          <p:spTgt spid="3"/>
+                                        </p:tgtEl>
+                                        <p:attrNameLst>
+                                          <p:attrName>ppt_y</p:attrName>
+                                        </p:attrNameLst>
+                                      </p:cBhvr>
+                                      <p:tavLst>
+                                        <p:tav tm="0">
+                                          <p:val>
+                                            <p:strVal val="#ppt_y+0.025"/>
+                                          </p:val>
+                                        </p:tav>
+                                        <p:tav tm="100000">
+                                          <p:val>
+                                            <p:strVal val="#ppt_y"/>
+                                          </p:val>
+                                        </p:tav>
+                                      </p:tavLst>
+                                    </p:anim>
+                                  </p:childTnLst>
+                                </p:cTn>
+                              </p:par>
+                              <p:par>
+                                <p:cTn id="13" presetID="10" presetClass="entr" presetSubtype="0" fill="hold" grpId="0" nodeType="withEffect">
+                                  <p:stCondLst>
+                                    <p:cond delay="320"/>
+                                  </p:stCondLst>
+                                  <p:childTnLst>
+                                    <p:set>
+                                      <p:cBhvr>
+                                        <p:cTn id="14" dur="1" fill="hold">
+                                          <p:stCondLst>
+                                            <p:cond delay="0"/>
+                                          </p:stCondLst>
+                                        </p:cTn>
+                                        <p:tgtEl>
+                                          <p:spTgt spid="4"/>
+                                        </p:tgtEl>
+                                        <p:attrNameLst>
+                                          <p:attrName>style.visibility</p:attrName>
+                                        </p:attrNameLst>
+                                      </p:cBhvr>
+                                      <p:to>
+                                        <p:strVal val="visible"/>
+                                      </p:to>
+                                    </p:set>
+                                    <p:animEffect transition="in" filter="fade">
+                                      <p:cBhvr>
+                                        <p:cTn id="15" dur="450"/>
+                                        <p:tgtEl>
+                                          <p:spTgt spid="4"/>
+                                        </p:tgtEl>
+                                      </p:cBhvr>
+                                    </p:animEffect>
+                                    <p:anim calcmode="lin" valueType="num">
+                                      <p:cBhvr additive="base">
+                                        <p:cTn id="16" dur="450" fill="hold"/>
+                                        <p:tgtEl>
+                                          <p:spTgt spid="4"/>
+                                        </p:tgtEl>
+                                        <p:attrNameLst>
+                                          <p:attrName>ppt_y</p:attrName>
+                                        </p:attrNameLst>
+                                      </p:cBhvr>
+                                      <p:tavLst>
+                                        <p:tav tm="0">
+                                          <p:val>
+                                            <p:strVal val="#ppt_y+0.025"/>
+                                          </p:val>
+                                        </p:tav>
+                                        <p:tav tm="100000">
+                                          <p:val>
+                                            <p:strVal val="#ppt_y"/>
+                                          </p:val>
+                                        </p:tav>
+                                      </p:tavLst>
+                                    </p:anim>
+                                  </p:childTnLst>
+                                </p:cTn>
+                              </p:par>
+                            </p:childTnLst>
+                          </p:cTn>
+                        </p:par>
+                      </p:childTnLst>
+                    </p:cTn>
+                  </p:par>
+                </p:childTnLst>
+              </p:cTn>
+              <p:prevCondLst>
+                <p:cond evt="onPrev" delay="0">
+                  <p:tgtEl>
+                    <p:sldTgt/>
+                  </p:tgtEl>
+                </p:cond>
+              </p:prevCondLst>
+              <p:nextCondLst>
+                <p:cond evt="onNext" delay="0">
+                  <p:tgtEl>
+                    <p:sldTgt/>
+                  </p:tgtEl>
+                </p:cond>
+              </p:nextCondLst>
+            </p:seq>
+          </p:childTnLst>
+        </p:cTn>
+      </p:par>
+    </p:tnLst>
+    <p:bldLst>
+      <p:bldP spid="2" grpId="0"/>
+      <p:bldP spid="3" grpId="0"/>
+      <p:bldP spid="4" grpId="0"/>
+    </p:bldLst>
+  </p:timing>
 </p:sld>
 </file>
 
@@ -2638,6 +3803,180 @@
   <p:clrMapOvr>
     <a:masterClrMapping/>
   </p:clrMapOvr>
+  <p:transition xmlns:p14="http://schemas.microsoft.com/office/powerpoint/2010/main" spd="slow" p14:dur="700">
+    <p:fade/>
+  </p:transition>
+  <p:timing xmlns:p="http://schemas.openxmlformats.org/presentationml/2006/main">
+    <p:tnLst>
+      <p:par>
+        <p:cTn id="1" dur="indefinite" restart="never" nodeType="tmRoot">
+          <p:childTnLst>
+            <p:seq concurrent="1" nextAc="seek">
+              <p:cTn id="2" dur="indefinite" nodeType="mainSeq">
+                <p:childTnLst>
+                  <p:par>
+                    <p:cTn id="3" fill="hold">
+                      <p:stCondLst>
+                        <p:cond delay="indefinite"/>
+                        <p:cond evt="onBegin" delay="0">
+                          <p:tn val="2"/>
+                        </p:cond>
+                      </p:stCondLst>
+                      <p:childTnLst>
+                        <p:par>
+                          <p:cTn id="4" fill="hold">
+                            <p:stCondLst>
+                              <p:cond delay="0"/>
+                            </p:stCondLst>
+                            <p:childTnLst>
+                              <p:par>
+                                <p:cTn id="5" presetID="10" presetClass="entr" presetSubtype="0" fill="hold" grpId="0" nodeType="withEffect">
+                                  <p:stCondLst>
+                                    <p:cond delay="0"/>
+                                  </p:stCondLst>
+                                  <p:childTnLst>
+                                    <p:set>
+                                      <p:cBhvr>
+                                        <p:cTn id="6" dur="1" fill="hold">
+                                          <p:stCondLst>
+                                            <p:cond delay="0"/>
+                                          </p:stCondLst>
+                                        </p:cTn>
+                                        <p:tgtEl>
+                                          <p:spTgt spid="2"/>
+                                        </p:tgtEl>
+                                        <p:attrNameLst>
+                                          <p:attrName>style.visibility</p:attrName>
+                                        </p:attrNameLst>
+                                      </p:cBhvr>
+                                      <p:to>
+                                        <p:strVal val="visible"/>
+                                      </p:to>
+                                    </p:set>
+                                    <p:animEffect transition="in" filter="fade">
+                                      <p:cBhvr>
+                                        <p:cTn id="7" dur="450"/>
+                                        <p:tgtEl>
+                                          <p:spTgt spid="2"/>
+                                        </p:tgtEl>
+                                      </p:cBhvr>
+                                    </p:animEffect>
+                                    <p:anim calcmode="lin" valueType="num">
+                                      <p:cBhvr additive="base">
+                                        <p:cTn id="8" dur="450" fill="hold"/>
+                                        <p:tgtEl>
+                                          <p:spTgt spid="2"/>
+                                        </p:tgtEl>
+                                        <p:attrNameLst>
+                                          <p:attrName>ppt_y</p:attrName>
+                                        </p:attrNameLst>
+                                      </p:cBhvr>
+                                      <p:tavLst>
+                                        <p:tav tm="0">
+                                          <p:val>
+                                            <p:strVal val="#ppt_y+0.025"/>
+                                          </p:val>
+                                        </p:tav>
+                                        <p:tav tm="100000">
+                                          <p:val>
+                                            <p:strVal val="#ppt_y"/>
+                                          </p:val>
+                                        </p:tav>
+                                      </p:tavLst>
+                                    </p:anim>
+                                  </p:childTnLst>
+                                </p:cTn>
+                              </p:par>
+                              <p:par>
+                                <p:cTn id="9" presetID="10" presetClass="entr" presetSubtype="0" fill="hold" grpId="0" nodeType="withEffect">
+                                  <p:stCondLst>
+                                    <p:cond delay="160"/>
+                                  </p:stCondLst>
+                                  <p:childTnLst>
+                                    <p:set>
+                                      <p:cBhvr>
+                                        <p:cTn id="10" dur="1" fill="hold">
+                                          <p:stCondLst>
+                                            <p:cond delay="0"/>
+                                          </p:stCondLst>
+                                        </p:cTn>
+                                        <p:tgtEl>
+                                          <p:spTgt spid="3"/>
+                                        </p:tgtEl>
+                                        <p:attrNameLst>
+                                          <p:attrName>style.visibility</p:attrName>
+                                        </p:attrNameLst>
+                                      </p:cBhvr>
+                                      <p:to>
+                                        <p:strVal val="visible"/>
+                                      </p:to>
+                                    </p:set>
+                                    <p:animEffect transition="in" filter="fade">
+                                      <p:cBhvr>
+                                        <p:cTn id="11" dur="450"/>
+                                        <p:tgtEl>
+                                          <p:spTgt spid="3"/>
+                                        </p:tgtEl>
+                                      </p:cBhvr>
+                                    </p:animEffect>
+                                    <p:anim calcmode="lin" valueType="num">
+                                      <p:cBhvr additive="base">
+                                        <p:cTn id="12" dur="450" fill="hold"/>
+                                        <p:tgtEl>
+                                          <p:spTgt spid="3"/>
+                                        </p:tgtEl>
+                                        <p:attrNameLst>
+                                          <p:attrName>ppt_y</p:attrName>
+                                        </p:attrNameLst>
+                                      </p:cBhvr>
+                                      <p:tavLst>
+                                        <p:tav tm="0">
+                                          <p:val>
+                                            <p:strVal val="#ppt_y+0.025"/>
+                                          </p:val>
+                                        </p:tav>
+                                        <p:tav tm="100000">
+                                          <p:val>
+                                            <p:strVal val="#ppt_y"/>
+                                          </p:val>
+                                        </p:tav>
+                                      </p:tavLst>
+                                    </p:anim>
+                                  </p:childTnLst>
+                                </p:cTn>
+                              </p:par>
+                            </p:childTnLst>
+                          </p:cTn>
+                        </p:par>
+                      </p:childTnLst>
+                    </p:cTn>
+                  </p:par>
+                </p:childTnLst>
+              </p:cTn>
+              <p:prevCondLst>
+                <p:cond evt="onPrev" delay="0">
+                  <p:tgtEl>
+                    <p:sldTgt/>
+                  </p:tgtEl>
+                </p:cond>
+              </p:prevCondLst>
+              <p:nextCondLst>
+                <p:cond evt="onNext" delay="0">
+                  <p:tgtEl>
+                    <p:sldTgt/>
+                  </p:tgtEl>
+                </p:cond>
+              </p:nextCondLst>
+            </p:seq>
+          </p:childTnLst>
+        </p:cTn>
+      </p:par>
+    </p:tnLst>
+    <p:bldLst>
+      <p:bldP spid="2" grpId="0"/>
+      <p:bldP spid="3" grpId="0"/>
+    </p:bldLst>
+  </p:timing>
 </p:sld>
 </file>
 
@@ -2840,6 +4179,298 @@
   <p:clrMapOvr>
     <a:masterClrMapping/>
   </p:clrMapOvr>
+  <p:transition xmlns:p14="http://schemas.microsoft.com/office/powerpoint/2010/main" spd="slow" p14:dur="700">
+    <p:fade/>
+  </p:transition>
+  <p:timing xmlns:p="http://schemas.openxmlformats.org/presentationml/2006/main">
+    <p:tnLst>
+      <p:par>
+        <p:cTn id="1" dur="indefinite" restart="never" nodeType="tmRoot">
+          <p:childTnLst>
+            <p:seq concurrent="1" nextAc="seek">
+              <p:cTn id="2" dur="indefinite" nodeType="mainSeq">
+                <p:childTnLst>
+                  <p:par>
+                    <p:cTn id="3" fill="hold">
+                      <p:stCondLst>
+                        <p:cond delay="indefinite"/>
+                        <p:cond evt="onBegin" delay="0">
+                          <p:tn val="2"/>
+                        </p:cond>
+                      </p:stCondLst>
+                      <p:childTnLst>
+                        <p:par>
+                          <p:cTn id="4" fill="hold">
+                            <p:stCondLst>
+                              <p:cond delay="0"/>
+                            </p:stCondLst>
+                            <p:childTnLst>
+                              <p:par>
+                                <p:cTn id="5" presetID="10" presetClass="entr" presetSubtype="0" fill="hold" grpId="0" nodeType="withEffect">
+                                  <p:stCondLst>
+                                    <p:cond delay="0"/>
+                                  </p:stCondLst>
+                                  <p:childTnLst>
+                                    <p:set>
+                                      <p:cBhvr>
+                                        <p:cTn id="6" dur="1" fill="hold">
+                                          <p:stCondLst>
+                                            <p:cond delay="0"/>
+                                          </p:stCondLst>
+                                        </p:cTn>
+                                        <p:tgtEl>
+                                          <p:spTgt spid="2"/>
+                                        </p:tgtEl>
+                                        <p:attrNameLst>
+                                          <p:attrName>style.visibility</p:attrName>
+                                        </p:attrNameLst>
+                                      </p:cBhvr>
+                                      <p:to>
+                                        <p:strVal val="visible"/>
+                                      </p:to>
+                                    </p:set>
+                                    <p:animEffect transition="in" filter="fade">
+                                      <p:cBhvr>
+                                        <p:cTn id="7" dur="450"/>
+                                        <p:tgtEl>
+                                          <p:spTgt spid="2"/>
+                                        </p:tgtEl>
+                                      </p:cBhvr>
+                                    </p:animEffect>
+                                    <p:anim calcmode="lin" valueType="num">
+                                      <p:cBhvr additive="base">
+                                        <p:cTn id="8" dur="450" fill="hold"/>
+                                        <p:tgtEl>
+                                          <p:spTgt spid="2"/>
+                                        </p:tgtEl>
+                                        <p:attrNameLst>
+                                          <p:attrName>ppt_y</p:attrName>
+                                        </p:attrNameLst>
+                                      </p:cBhvr>
+                                      <p:tavLst>
+                                        <p:tav tm="0">
+                                          <p:val>
+                                            <p:strVal val="#ppt_y+0.025"/>
+                                          </p:val>
+                                        </p:tav>
+                                        <p:tav tm="100000">
+                                          <p:val>
+                                            <p:strVal val="#ppt_y"/>
+                                          </p:val>
+                                        </p:tav>
+                                      </p:tavLst>
+                                    </p:anim>
+                                  </p:childTnLst>
+                                </p:cTn>
+                              </p:par>
+                              <p:par>
+                                <p:cTn id="9" presetID="10" presetClass="entr" presetSubtype="0" fill="hold" grpId="0" nodeType="withEffect">
+                                  <p:stCondLst>
+                                    <p:cond delay="160"/>
+                                  </p:stCondLst>
+                                  <p:childTnLst>
+                                    <p:set>
+                                      <p:cBhvr>
+                                        <p:cTn id="10" dur="1" fill="hold">
+                                          <p:stCondLst>
+                                            <p:cond delay="0"/>
+                                          </p:stCondLst>
+                                        </p:cTn>
+                                        <p:tgtEl>
+                                          <p:spTgt spid="3"/>
+                                        </p:tgtEl>
+                                        <p:attrNameLst>
+                                          <p:attrName>style.visibility</p:attrName>
+                                        </p:attrNameLst>
+                                      </p:cBhvr>
+                                      <p:to>
+                                        <p:strVal val="visible"/>
+                                      </p:to>
+                                    </p:set>
+                                    <p:animEffect transition="in" filter="fade">
+                                      <p:cBhvr>
+                                        <p:cTn id="11" dur="450"/>
+                                        <p:tgtEl>
+                                          <p:spTgt spid="3"/>
+                                        </p:tgtEl>
+                                      </p:cBhvr>
+                                    </p:animEffect>
+                                    <p:anim calcmode="lin" valueType="num">
+                                      <p:cBhvr additive="base">
+                                        <p:cTn id="12" dur="450" fill="hold"/>
+                                        <p:tgtEl>
+                                          <p:spTgt spid="3"/>
+                                        </p:tgtEl>
+                                        <p:attrNameLst>
+                                          <p:attrName>ppt_y</p:attrName>
+                                        </p:attrNameLst>
+                                      </p:cBhvr>
+                                      <p:tavLst>
+                                        <p:tav tm="0">
+                                          <p:val>
+                                            <p:strVal val="#ppt_y+0.025"/>
+                                          </p:val>
+                                        </p:tav>
+                                        <p:tav tm="100000">
+                                          <p:val>
+                                            <p:strVal val="#ppt_y"/>
+                                          </p:val>
+                                        </p:tav>
+                                      </p:tavLst>
+                                    </p:anim>
+                                  </p:childTnLst>
+                                </p:cTn>
+                              </p:par>
+                              <p:par>
+                                <p:cTn id="13" presetID="10" presetClass="entr" presetSubtype="0" fill="hold" grpId="0" nodeType="withEffect">
+                                  <p:stCondLst>
+                                    <p:cond delay="320"/>
+                                  </p:stCondLst>
+                                  <p:childTnLst>
+                                    <p:set>
+                                      <p:cBhvr>
+                                        <p:cTn id="14" dur="1" fill="hold">
+                                          <p:stCondLst>
+                                            <p:cond delay="0"/>
+                                          </p:stCondLst>
+                                        </p:cTn>
+                                        <p:tgtEl>
+                                          <p:spTgt spid="4"/>
+                                        </p:tgtEl>
+                                        <p:attrNameLst>
+                                          <p:attrName>style.visibility</p:attrName>
+                                        </p:attrNameLst>
+                                      </p:cBhvr>
+                                      <p:to>
+                                        <p:strVal val="visible"/>
+                                      </p:to>
+                                    </p:set>
+                                    <p:animEffect transition="in" filter="fade">
+                                      <p:cBhvr>
+                                        <p:cTn id="15" dur="450"/>
+                                        <p:tgtEl>
+                                          <p:spTgt spid="4"/>
+                                        </p:tgtEl>
+                                      </p:cBhvr>
+                                    </p:animEffect>
+                                    <p:anim calcmode="lin" valueType="num">
+                                      <p:cBhvr additive="base">
+                                        <p:cTn id="16" dur="450" fill="hold"/>
+                                        <p:tgtEl>
+                                          <p:spTgt spid="4"/>
+                                        </p:tgtEl>
+                                        <p:attrNameLst>
+                                          <p:attrName>ppt_y</p:attrName>
+                                        </p:attrNameLst>
+                                      </p:cBhvr>
+                                      <p:tavLst>
+                                        <p:tav tm="0">
+                                          <p:val>
+                                            <p:strVal val="#ppt_y+0.025"/>
+                                          </p:val>
+                                        </p:tav>
+                                        <p:tav tm="100000">
+                                          <p:val>
+                                            <p:strVal val="#ppt_y"/>
+                                          </p:val>
+                                        </p:tav>
+                                      </p:tavLst>
+                                    </p:anim>
+                                  </p:childTnLst>
+                                </p:cTn>
+                              </p:par>
+                              <p:par>
+                                <p:cTn id="17" presetID="10" presetClass="entr" presetSubtype="0" fill="hold" grpId="0" nodeType="withEffect">
+                                  <p:stCondLst>
+                                    <p:cond delay="480"/>
+                                  </p:stCondLst>
+                                  <p:childTnLst>
+                                    <p:set>
+                                      <p:cBhvr>
+                                        <p:cTn id="18" dur="1" fill="hold">
+                                          <p:stCondLst>
+                                            <p:cond delay="0"/>
+                                          </p:stCondLst>
+                                        </p:cTn>
+                                        <p:tgtEl>
+                                          <p:spTgt spid="5"/>
+                                        </p:tgtEl>
+                                        <p:attrNameLst>
+                                          <p:attrName>style.visibility</p:attrName>
+                                        </p:attrNameLst>
+                                      </p:cBhvr>
+                                      <p:to>
+                                        <p:strVal val="visible"/>
+                                      </p:to>
+                                    </p:set>
+                                    <p:animEffect transition="in" filter="fade">
+                                      <p:cBhvr>
+                                        <p:cTn id="19" dur="450"/>
+                                        <p:tgtEl>
+                                          <p:spTgt spid="5"/>
+                                        </p:tgtEl>
+                                      </p:cBhvr>
+                                    </p:animEffect>
+                                    <p:anim calcmode="lin" valueType="num">
+                                      <p:cBhvr additive="base">
+                                        <p:cTn id="20" dur="450" fill="hold"/>
+                                        <p:tgtEl>
+                                          <p:spTgt spid="5"/>
+                                        </p:tgtEl>
+                                        <p:attrNameLst>
+                                          <p:attrName>ppt_y</p:attrName>
+                                        </p:attrNameLst>
+                                      </p:cBhvr>
+                                      <p:tavLst>
+                                        <p:tav tm="0">
+                                          <p:val>
+                                            <p:strVal val="#ppt_y+0.025"/>
+                                          </p:val>
+                                        </p:tav>
+                                        <p:tav tm="100000">
+                                          <p:val>
+                                            <p:strVal val="#ppt_y"/>
+                                          </p:val>
+                                        </p:tav>
+                                      </p:tavLst>
+                                    </p:anim>
+                                  </p:childTnLst>
+                                </p:cTn>
+                              </p:par>
+                            </p:childTnLst>
+                          </p:cTn>
+                        </p:par>
+                      </p:childTnLst>
+                    </p:cTn>
+                  </p:par>
+                </p:childTnLst>
+              </p:cTn>
+              <p:prevCondLst>
+                <p:cond evt="onPrev" delay="0">
+                  <p:tgtEl>
+                    <p:sldTgt/>
+                  </p:tgtEl>
+                </p:cond>
+              </p:prevCondLst>
+              <p:nextCondLst>
+                <p:cond evt="onNext" delay="0">
+                  <p:tgtEl>
+                    <p:sldTgt/>
+                  </p:tgtEl>
+                </p:cond>
+              </p:nextCondLst>
+            </p:seq>
+          </p:childTnLst>
+        </p:cTn>
+      </p:par>
+    </p:tnLst>
+    <p:bldLst>
+      <p:bldP spid="2" grpId="0"/>
+      <p:bldP spid="3" grpId="0"/>
+      <p:bldP spid="4" grpId="0"/>
+      <p:bldP spid="5" grpId="0"/>
+    </p:bldLst>
+  </p:timing>
 </p:sld>
 </file>
 
@@ -3154,6 +4785,475 @@
   <p:clrMapOvr>
     <a:masterClrMapping/>
   </p:clrMapOvr>
+  <p:transition xmlns:p14="http://schemas.microsoft.com/office/powerpoint/2010/main" spd="slow" p14:dur="700">
+    <p:fade/>
+  </p:transition>
+  <p:timing xmlns:p="http://schemas.openxmlformats.org/presentationml/2006/main">
+    <p:tnLst>
+      <p:par>
+        <p:cTn id="1" dur="indefinite" restart="never" nodeType="tmRoot">
+          <p:childTnLst>
+            <p:seq concurrent="1" nextAc="seek">
+              <p:cTn id="2" dur="indefinite" nodeType="mainSeq">
+                <p:childTnLst>
+                  <p:par>
+                    <p:cTn id="3" fill="hold">
+                      <p:stCondLst>
+                        <p:cond delay="indefinite"/>
+                        <p:cond evt="onBegin" delay="0">
+                          <p:tn val="2"/>
+                        </p:cond>
+                      </p:stCondLst>
+                      <p:childTnLst>
+                        <p:par>
+                          <p:cTn id="4" fill="hold">
+                            <p:stCondLst>
+                              <p:cond delay="0"/>
+                            </p:stCondLst>
+                            <p:childTnLst>
+                              <p:par>
+                                <p:cTn id="5" presetID="10" presetClass="entr" presetSubtype="0" fill="hold" grpId="0" nodeType="withEffect">
+                                  <p:stCondLst>
+                                    <p:cond delay="0"/>
+                                  </p:stCondLst>
+                                  <p:childTnLst>
+                                    <p:set>
+                                      <p:cBhvr>
+                                        <p:cTn id="6" dur="1" fill="hold">
+                                          <p:stCondLst>
+                                            <p:cond delay="0"/>
+                                          </p:stCondLst>
+                                        </p:cTn>
+                                        <p:tgtEl>
+                                          <p:spTgt spid="2"/>
+                                        </p:tgtEl>
+                                        <p:attrNameLst>
+                                          <p:attrName>style.visibility</p:attrName>
+                                        </p:attrNameLst>
+                                      </p:cBhvr>
+                                      <p:to>
+                                        <p:strVal val="visible"/>
+                                      </p:to>
+                                    </p:set>
+                                    <p:animEffect transition="in" filter="fade">
+                                      <p:cBhvr>
+                                        <p:cTn id="7" dur="450"/>
+                                        <p:tgtEl>
+                                          <p:spTgt spid="2"/>
+                                        </p:tgtEl>
+                                      </p:cBhvr>
+                                    </p:animEffect>
+                                    <p:anim calcmode="lin" valueType="num">
+                                      <p:cBhvr additive="base">
+                                        <p:cTn id="8" dur="450" fill="hold"/>
+                                        <p:tgtEl>
+                                          <p:spTgt spid="2"/>
+                                        </p:tgtEl>
+                                        <p:attrNameLst>
+                                          <p:attrName>ppt_y</p:attrName>
+                                        </p:attrNameLst>
+                                      </p:cBhvr>
+                                      <p:tavLst>
+                                        <p:tav tm="0">
+                                          <p:val>
+                                            <p:strVal val="#ppt_y+0.025"/>
+                                          </p:val>
+                                        </p:tav>
+                                        <p:tav tm="100000">
+                                          <p:val>
+                                            <p:strVal val="#ppt_y"/>
+                                          </p:val>
+                                        </p:tav>
+                                      </p:tavLst>
+                                    </p:anim>
+                                  </p:childTnLst>
+                                </p:cTn>
+                              </p:par>
+                              <p:par>
+                                <p:cTn id="9" presetID="10" presetClass="entr" presetSubtype="0" fill="hold" grpId="0" nodeType="withEffect">
+                                  <p:stCondLst>
+                                    <p:cond delay="160"/>
+                                  </p:stCondLst>
+                                  <p:childTnLst>
+                                    <p:set>
+                                      <p:cBhvr>
+                                        <p:cTn id="10" dur="1" fill="hold">
+                                          <p:stCondLst>
+                                            <p:cond delay="0"/>
+                                          </p:stCondLst>
+                                        </p:cTn>
+                                        <p:tgtEl>
+                                          <p:spTgt spid="3"/>
+                                        </p:tgtEl>
+                                        <p:attrNameLst>
+                                          <p:attrName>style.visibility</p:attrName>
+                                        </p:attrNameLst>
+                                      </p:cBhvr>
+                                      <p:to>
+                                        <p:strVal val="visible"/>
+                                      </p:to>
+                                    </p:set>
+                                    <p:animEffect transition="in" filter="fade">
+                                      <p:cBhvr>
+                                        <p:cTn id="11" dur="450"/>
+                                        <p:tgtEl>
+                                          <p:spTgt spid="3"/>
+                                        </p:tgtEl>
+                                      </p:cBhvr>
+                                    </p:animEffect>
+                                    <p:anim calcmode="lin" valueType="num">
+                                      <p:cBhvr additive="base">
+                                        <p:cTn id="12" dur="450" fill="hold"/>
+                                        <p:tgtEl>
+                                          <p:spTgt spid="3"/>
+                                        </p:tgtEl>
+                                        <p:attrNameLst>
+                                          <p:attrName>ppt_y</p:attrName>
+                                        </p:attrNameLst>
+                                      </p:cBhvr>
+                                      <p:tavLst>
+                                        <p:tav tm="0">
+                                          <p:val>
+                                            <p:strVal val="#ppt_y+0.025"/>
+                                          </p:val>
+                                        </p:tav>
+                                        <p:tav tm="100000">
+                                          <p:val>
+                                            <p:strVal val="#ppt_y"/>
+                                          </p:val>
+                                        </p:tav>
+                                      </p:tavLst>
+                                    </p:anim>
+                                  </p:childTnLst>
+                                </p:cTn>
+                              </p:par>
+                              <p:par>
+                                <p:cTn id="13" presetID="10" presetClass="entr" presetSubtype="0" fill="hold" grpId="0" nodeType="withEffect">
+                                  <p:stCondLst>
+                                    <p:cond delay="320"/>
+                                  </p:stCondLst>
+                                  <p:childTnLst>
+                                    <p:set>
+                                      <p:cBhvr>
+                                        <p:cTn id="14" dur="1" fill="hold">
+                                          <p:stCondLst>
+                                            <p:cond delay="0"/>
+                                          </p:stCondLst>
+                                        </p:cTn>
+                                        <p:tgtEl>
+                                          <p:spTgt spid="5"/>
+                                        </p:tgtEl>
+                                        <p:attrNameLst>
+                                          <p:attrName>style.visibility</p:attrName>
+                                        </p:attrNameLst>
+                                      </p:cBhvr>
+                                      <p:to>
+                                        <p:strVal val="visible"/>
+                                      </p:to>
+                                    </p:set>
+                                    <p:animEffect transition="in" filter="fade">
+                                      <p:cBhvr>
+                                        <p:cTn id="15" dur="450"/>
+                                        <p:tgtEl>
+                                          <p:spTgt spid="5"/>
+                                        </p:tgtEl>
+                                      </p:cBhvr>
+                                    </p:animEffect>
+                                    <p:anim calcmode="lin" valueType="num">
+                                      <p:cBhvr additive="base">
+                                        <p:cTn id="16" dur="450" fill="hold"/>
+                                        <p:tgtEl>
+                                          <p:spTgt spid="5"/>
+                                        </p:tgtEl>
+                                        <p:attrNameLst>
+                                          <p:attrName>ppt_y</p:attrName>
+                                        </p:attrNameLst>
+                                      </p:cBhvr>
+                                      <p:tavLst>
+                                        <p:tav tm="0">
+                                          <p:val>
+                                            <p:strVal val="#ppt_y+0.025"/>
+                                          </p:val>
+                                        </p:tav>
+                                        <p:tav tm="100000">
+                                          <p:val>
+                                            <p:strVal val="#ppt_y"/>
+                                          </p:val>
+                                        </p:tav>
+                                      </p:tavLst>
+                                    </p:anim>
+                                  </p:childTnLst>
+                                </p:cTn>
+                              </p:par>
+                              <p:par>
+                                <p:cTn id="17" presetID="10" presetClass="entr" presetSubtype="0" fill="hold" grpId="0" nodeType="withEffect">
+                                  <p:stCondLst>
+                                    <p:cond delay="480"/>
+                                  </p:stCondLst>
+                                  <p:childTnLst>
+                                    <p:set>
+                                      <p:cBhvr>
+                                        <p:cTn id="18" dur="1" fill="hold">
+                                          <p:stCondLst>
+                                            <p:cond delay="0"/>
+                                          </p:stCondLst>
+                                        </p:cTn>
+                                        <p:tgtEl>
+                                          <p:spTgt spid="7"/>
+                                        </p:tgtEl>
+                                        <p:attrNameLst>
+                                          <p:attrName>style.visibility</p:attrName>
+                                        </p:attrNameLst>
+                                      </p:cBhvr>
+                                      <p:to>
+                                        <p:strVal val="visible"/>
+                                      </p:to>
+                                    </p:set>
+                                    <p:animEffect transition="in" filter="fade">
+                                      <p:cBhvr>
+                                        <p:cTn id="19" dur="450"/>
+                                        <p:tgtEl>
+                                          <p:spTgt spid="7"/>
+                                        </p:tgtEl>
+                                      </p:cBhvr>
+                                    </p:animEffect>
+                                    <p:anim calcmode="lin" valueType="num">
+                                      <p:cBhvr additive="base">
+                                        <p:cTn id="20" dur="450" fill="hold"/>
+                                        <p:tgtEl>
+                                          <p:spTgt spid="7"/>
+                                        </p:tgtEl>
+                                        <p:attrNameLst>
+                                          <p:attrName>ppt_y</p:attrName>
+                                        </p:attrNameLst>
+                                      </p:cBhvr>
+                                      <p:tavLst>
+                                        <p:tav tm="0">
+                                          <p:val>
+                                            <p:strVal val="#ppt_y+0.025"/>
+                                          </p:val>
+                                        </p:tav>
+                                        <p:tav tm="100000">
+                                          <p:val>
+                                            <p:strVal val="#ppt_y"/>
+                                          </p:val>
+                                        </p:tav>
+                                      </p:tavLst>
+                                    </p:anim>
+                                  </p:childTnLst>
+                                </p:cTn>
+                              </p:par>
+                              <p:par>
+                                <p:cTn id="21" presetID="10" presetClass="entr" presetSubtype="0" fill="hold" grpId="0" nodeType="withEffect">
+                                  <p:stCondLst>
+                                    <p:cond delay="640"/>
+                                  </p:stCondLst>
+                                  <p:childTnLst>
+                                    <p:set>
+                                      <p:cBhvr>
+                                        <p:cTn id="22" dur="1" fill="hold">
+                                          <p:stCondLst>
+                                            <p:cond delay="0"/>
+                                          </p:stCondLst>
+                                        </p:cTn>
+                                        <p:tgtEl>
+                                          <p:spTgt spid="4"/>
+                                        </p:tgtEl>
+                                        <p:attrNameLst>
+                                          <p:attrName>style.visibility</p:attrName>
+                                        </p:attrNameLst>
+                                      </p:cBhvr>
+                                      <p:to>
+                                        <p:strVal val="visible"/>
+                                      </p:to>
+                                    </p:set>
+                                    <p:animEffect transition="in" filter="fade">
+                                      <p:cBhvr>
+                                        <p:cTn id="23" dur="450"/>
+                                        <p:tgtEl>
+                                          <p:spTgt spid="4"/>
+                                        </p:tgtEl>
+                                      </p:cBhvr>
+                                    </p:animEffect>
+                                    <p:anim calcmode="lin" valueType="num">
+                                      <p:cBhvr additive="base">
+                                        <p:cTn id="24" dur="450" fill="hold"/>
+                                        <p:tgtEl>
+                                          <p:spTgt spid="4"/>
+                                        </p:tgtEl>
+                                        <p:attrNameLst>
+                                          <p:attrName>ppt_y</p:attrName>
+                                        </p:attrNameLst>
+                                      </p:cBhvr>
+                                      <p:tavLst>
+                                        <p:tav tm="0">
+                                          <p:val>
+                                            <p:strVal val="#ppt_y+0.025"/>
+                                          </p:val>
+                                        </p:tav>
+                                        <p:tav tm="100000">
+                                          <p:val>
+                                            <p:strVal val="#ppt_y"/>
+                                          </p:val>
+                                        </p:tav>
+                                      </p:tavLst>
+                                    </p:anim>
+                                  </p:childTnLst>
+                                </p:cTn>
+                              </p:par>
+                              <p:par>
+                                <p:cTn id="25" presetID="10" presetClass="entr" presetSubtype="0" fill="hold" grpId="0" nodeType="withEffect">
+                                  <p:stCondLst>
+                                    <p:cond delay="800"/>
+                                  </p:stCondLst>
+                                  <p:childTnLst>
+                                    <p:set>
+                                      <p:cBhvr>
+                                        <p:cTn id="26" dur="1" fill="hold">
+                                          <p:stCondLst>
+                                            <p:cond delay="0"/>
+                                          </p:stCondLst>
+                                        </p:cTn>
+                                        <p:tgtEl>
+                                          <p:spTgt spid="6"/>
+                                        </p:tgtEl>
+                                        <p:attrNameLst>
+                                          <p:attrName>style.visibility</p:attrName>
+                                        </p:attrNameLst>
+                                      </p:cBhvr>
+                                      <p:to>
+                                        <p:strVal val="visible"/>
+                                      </p:to>
+                                    </p:set>
+                                    <p:animEffect transition="in" filter="fade">
+                                      <p:cBhvr>
+                                        <p:cTn id="27" dur="450"/>
+                                        <p:tgtEl>
+                                          <p:spTgt spid="6"/>
+                                        </p:tgtEl>
+                                      </p:cBhvr>
+                                    </p:animEffect>
+                                    <p:anim calcmode="lin" valueType="num">
+                                      <p:cBhvr additive="base">
+                                        <p:cTn id="28" dur="450" fill="hold"/>
+                                        <p:tgtEl>
+                                          <p:spTgt spid="6"/>
+                                        </p:tgtEl>
+                                        <p:attrNameLst>
+                                          <p:attrName>ppt_y</p:attrName>
+                                        </p:attrNameLst>
+                                      </p:cBhvr>
+                                      <p:tavLst>
+                                        <p:tav tm="0">
+                                          <p:val>
+                                            <p:strVal val="#ppt_y+0.025"/>
+                                          </p:val>
+                                        </p:tav>
+                                        <p:tav tm="100000">
+                                          <p:val>
+                                            <p:strVal val="#ppt_y"/>
+                                          </p:val>
+                                        </p:tav>
+                                      </p:tavLst>
+                                    </p:anim>
+                                  </p:childTnLst>
+                                </p:cTn>
+                              </p:par>
+                              <p:par>
+                                <p:cTn id="29" presetID="10" presetClass="entr" presetSubtype="0" fill="hold" grpId="0" nodeType="withEffect">
+                                  <p:stCondLst>
+                                    <p:cond delay="960"/>
+                                  </p:stCondLst>
+                                  <p:childTnLst>
+                                    <p:set>
+                                      <p:cBhvr>
+                                        <p:cTn id="30" dur="1" fill="hold">
+                                          <p:stCondLst>
+                                            <p:cond delay="0"/>
+                                          </p:stCondLst>
+                                        </p:cTn>
+                                        <p:tgtEl>
+                                          <p:spTgt spid="8"/>
+                                        </p:tgtEl>
+                                        <p:attrNameLst>
+                                          <p:attrName>style.visibility</p:attrName>
+                                        </p:attrNameLst>
+                                      </p:cBhvr>
+                                      <p:to>
+                                        <p:strVal val="visible"/>
+                                      </p:to>
+                                    </p:set>
+                                    <p:animEffect transition="in" filter="fade">
+                                      <p:cBhvr>
+                                        <p:cTn id="31" dur="450"/>
+                                        <p:tgtEl>
+                                          <p:spTgt spid="8"/>
+                                        </p:tgtEl>
+                                      </p:cBhvr>
+                                    </p:animEffect>
+                                    <p:anim calcmode="lin" valueType="num">
+                                      <p:cBhvr additive="base">
+                                        <p:cTn id="32" dur="450" fill="hold"/>
+                                        <p:tgtEl>
+                                          <p:spTgt spid="8"/>
+                                        </p:tgtEl>
+                                        <p:attrNameLst>
+                                          <p:attrName>ppt_y</p:attrName>
+                                        </p:attrNameLst>
+                                      </p:cBhvr>
+                                      <p:tavLst>
+                                        <p:tav tm="0">
+                                          <p:val>
+                                            <p:strVal val="#ppt_y+0.025"/>
+                                          </p:val>
+                                        </p:tav>
+                                        <p:tav tm="100000">
+                                          <p:val>
+                                            <p:strVal val="#ppt_y"/>
+                                          </p:val>
+                                        </p:tav>
+                                      </p:tavLst>
+                                    </p:anim>
+                                  </p:childTnLst>
+                                </p:cTn>
+                              </p:par>
+                            </p:childTnLst>
+                          </p:cTn>
+                        </p:par>
+                      </p:childTnLst>
+                    </p:cTn>
+                  </p:par>
+                </p:childTnLst>
+              </p:cTn>
+              <p:prevCondLst>
+                <p:cond evt="onPrev" delay="0">
+                  <p:tgtEl>
+                    <p:sldTgt/>
+                  </p:tgtEl>
+                </p:cond>
+              </p:prevCondLst>
+              <p:nextCondLst>
+                <p:cond evt="onNext" delay="0">
+                  <p:tgtEl>
+                    <p:sldTgt/>
+                  </p:tgtEl>
+                </p:cond>
+              </p:nextCondLst>
+            </p:seq>
+          </p:childTnLst>
+        </p:cTn>
+      </p:par>
+    </p:tnLst>
+    <p:bldLst>
+      <p:bldP spid="2" grpId="0"/>
+      <p:bldP spid="3" grpId="0"/>
+      <p:bldP spid="5" grpId="0"/>
+      <p:bldP spid="7" grpId="0"/>
+      <p:bldP spid="4" grpId="0"/>
+      <p:bldP spid="6" grpId="0"/>
+      <p:bldP spid="8" grpId="0"/>
+    </p:bldLst>
+  </p:timing>
 </p:sld>
 </file>
 
@@ -3384,6 +5484,298 @@
   <p:clrMapOvr>
     <a:masterClrMapping/>
   </p:clrMapOvr>
+  <p:transition xmlns:p14="http://schemas.microsoft.com/office/powerpoint/2010/main" spd="slow" p14:dur="700">
+    <p:fade/>
+  </p:transition>
+  <p:timing xmlns:p="http://schemas.openxmlformats.org/presentationml/2006/main">
+    <p:tnLst>
+      <p:par>
+        <p:cTn id="1" dur="indefinite" restart="never" nodeType="tmRoot">
+          <p:childTnLst>
+            <p:seq concurrent="1" nextAc="seek">
+              <p:cTn id="2" dur="indefinite" nodeType="mainSeq">
+                <p:childTnLst>
+                  <p:par>
+                    <p:cTn id="3" fill="hold">
+                      <p:stCondLst>
+                        <p:cond delay="indefinite"/>
+                        <p:cond evt="onBegin" delay="0">
+                          <p:tn val="2"/>
+                        </p:cond>
+                      </p:stCondLst>
+                      <p:childTnLst>
+                        <p:par>
+                          <p:cTn id="4" fill="hold">
+                            <p:stCondLst>
+                              <p:cond delay="0"/>
+                            </p:stCondLst>
+                            <p:childTnLst>
+                              <p:par>
+                                <p:cTn id="5" presetID="10" presetClass="entr" presetSubtype="0" fill="hold" grpId="0" nodeType="withEffect">
+                                  <p:stCondLst>
+                                    <p:cond delay="0"/>
+                                  </p:stCondLst>
+                                  <p:childTnLst>
+                                    <p:set>
+                                      <p:cBhvr>
+                                        <p:cTn id="6" dur="1" fill="hold">
+                                          <p:stCondLst>
+                                            <p:cond delay="0"/>
+                                          </p:stCondLst>
+                                        </p:cTn>
+                                        <p:tgtEl>
+                                          <p:spTgt spid="2"/>
+                                        </p:tgtEl>
+                                        <p:attrNameLst>
+                                          <p:attrName>style.visibility</p:attrName>
+                                        </p:attrNameLst>
+                                      </p:cBhvr>
+                                      <p:to>
+                                        <p:strVal val="visible"/>
+                                      </p:to>
+                                    </p:set>
+                                    <p:animEffect transition="in" filter="fade">
+                                      <p:cBhvr>
+                                        <p:cTn id="7" dur="450"/>
+                                        <p:tgtEl>
+                                          <p:spTgt spid="2"/>
+                                        </p:tgtEl>
+                                      </p:cBhvr>
+                                    </p:animEffect>
+                                    <p:anim calcmode="lin" valueType="num">
+                                      <p:cBhvr additive="base">
+                                        <p:cTn id="8" dur="450" fill="hold"/>
+                                        <p:tgtEl>
+                                          <p:spTgt spid="2"/>
+                                        </p:tgtEl>
+                                        <p:attrNameLst>
+                                          <p:attrName>ppt_y</p:attrName>
+                                        </p:attrNameLst>
+                                      </p:cBhvr>
+                                      <p:tavLst>
+                                        <p:tav tm="0">
+                                          <p:val>
+                                            <p:strVal val="#ppt_y+0.025"/>
+                                          </p:val>
+                                        </p:tav>
+                                        <p:tav tm="100000">
+                                          <p:val>
+                                            <p:strVal val="#ppt_y"/>
+                                          </p:val>
+                                        </p:tav>
+                                      </p:tavLst>
+                                    </p:anim>
+                                  </p:childTnLst>
+                                </p:cTn>
+                              </p:par>
+                              <p:par>
+                                <p:cTn id="9" presetID="10" presetClass="entr" presetSubtype="0" fill="hold" grpId="0" nodeType="withEffect">
+                                  <p:stCondLst>
+                                    <p:cond delay="160"/>
+                                  </p:stCondLst>
+                                  <p:childTnLst>
+                                    <p:set>
+                                      <p:cBhvr>
+                                        <p:cTn id="10" dur="1" fill="hold">
+                                          <p:stCondLst>
+                                            <p:cond delay="0"/>
+                                          </p:stCondLst>
+                                        </p:cTn>
+                                        <p:tgtEl>
+                                          <p:spTgt spid="3"/>
+                                        </p:tgtEl>
+                                        <p:attrNameLst>
+                                          <p:attrName>style.visibility</p:attrName>
+                                        </p:attrNameLst>
+                                      </p:cBhvr>
+                                      <p:to>
+                                        <p:strVal val="visible"/>
+                                      </p:to>
+                                    </p:set>
+                                    <p:animEffect transition="in" filter="fade">
+                                      <p:cBhvr>
+                                        <p:cTn id="11" dur="450"/>
+                                        <p:tgtEl>
+                                          <p:spTgt spid="3"/>
+                                        </p:tgtEl>
+                                      </p:cBhvr>
+                                    </p:animEffect>
+                                    <p:anim calcmode="lin" valueType="num">
+                                      <p:cBhvr additive="base">
+                                        <p:cTn id="12" dur="450" fill="hold"/>
+                                        <p:tgtEl>
+                                          <p:spTgt spid="3"/>
+                                        </p:tgtEl>
+                                        <p:attrNameLst>
+                                          <p:attrName>ppt_y</p:attrName>
+                                        </p:attrNameLst>
+                                      </p:cBhvr>
+                                      <p:tavLst>
+                                        <p:tav tm="0">
+                                          <p:val>
+                                            <p:strVal val="#ppt_y+0.025"/>
+                                          </p:val>
+                                        </p:tav>
+                                        <p:tav tm="100000">
+                                          <p:val>
+                                            <p:strVal val="#ppt_y"/>
+                                          </p:val>
+                                        </p:tav>
+                                      </p:tavLst>
+                                    </p:anim>
+                                  </p:childTnLst>
+                                </p:cTn>
+                              </p:par>
+                              <p:par>
+                                <p:cTn id="13" presetID="10" presetClass="entr" presetSubtype="0" fill="hold" grpId="0" nodeType="withEffect">
+                                  <p:stCondLst>
+                                    <p:cond delay="320"/>
+                                  </p:stCondLst>
+                                  <p:childTnLst>
+                                    <p:set>
+                                      <p:cBhvr>
+                                        <p:cTn id="14" dur="1" fill="hold">
+                                          <p:stCondLst>
+                                            <p:cond delay="0"/>
+                                          </p:stCondLst>
+                                        </p:cTn>
+                                        <p:tgtEl>
+                                          <p:spTgt spid="4"/>
+                                        </p:tgtEl>
+                                        <p:attrNameLst>
+                                          <p:attrName>style.visibility</p:attrName>
+                                        </p:attrNameLst>
+                                      </p:cBhvr>
+                                      <p:to>
+                                        <p:strVal val="visible"/>
+                                      </p:to>
+                                    </p:set>
+                                    <p:animEffect transition="in" filter="fade">
+                                      <p:cBhvr>
+                                        <p:cTn id="15" dur="450"/>
+                                        <p:tgtEl>
+                                          <p:spTgt spid="4"/>
+                                        </p:tgtEl>
+                                      </p:cBhvr>
+                                    </p:animEffect>
+                                    <p:anim calcmode="lin" valueType="num">
+                                      <p:cBhvr additive="base">
+                                        <p:cTn id="16" dur="450" fill="hold"/>
+                                        <p:tgtEl>
+                                          <p:spTgt spid="4"/>
+                                        </p:tgtEl>
+                                        <p:attrNameLst>
+                                          <p:attrName>ppt_y</p:attrName>
+                                        </p:attrNameLst>
+                                      </p:cBhvr>
+                                      <p:tavLst>
+                                        <p:tav tm="0">
+                                          <p:val>
+                                            <p:strVal val="#ppt_y+0.025"/>
+                                          </p:val>
+                                        </p:tav>
+                                        <p:tav tm="100000">
+                                          <p:val>
+                                            <p:strVal val="#ppt_y"/>
+                                          </p:val>
+                                        </p:tav>
+                                      </p:tavLst>
+                                    </p:anim>
+                                  </p:childTnLst>
+                                </p:cTn>
+                              </p:par>
+                              <p:par>
+                                <p:cTn id="17" presetID="10" presetClass="entr" presetSubtype="0" fill="hold" grpId="0" nodeType="withEffect">
+                                  <p:stCondLst>
+                                    <p:cond delay="480"/>
+                                  </p:stCondLst>
+                                  <p:childTnLst>
+                                    <p:set>
+                                      <p:cBhvr>
+                                        <p:cTn id="18" dur="1" fill="hold">
+                                          <p:stCondLst>
+                                            <p:cond delay="0"/>
+                                          </p:stCondLst>
+                                        </p:cTn>
+                                        <p:tgtEl>
+                                          <p:spTgt spid="5"/>
+                                        </p:tgtEl>
+                                        <p:attrNameLst>
+                                          <p:attrName>style.visibility</p:attrName>
+                                        </p:attrNameLst>
+                                      </p:cBhvr>
+                                      <p:to>
+                                        <p:strVal val="visible"/>
+                                      </p:to>
+                                    </p:set>
+                                    <p:animEffect transition="in" filter="fade">
+                                      <p:cBhvr>
+                                        <p:cTn id="19" dur="450"/>
+                                        <p:tgtEl>
+                                          <p:spTgt spid="5"/>
+                                        </p:tgtEl>
+                                      </p:cBhvr>
+                                    </p:animEffect>
+                                    <p:anim calcmode="lin" valueType="num">
+                                      <p:cBhvr additive="base">
+                                        <p:cTn id="20" dur="450" fill="hold"/>
+                                        <p:tgtEl>
+                                          <p:spTgt spid="5"/>
+                                        </p:tgtEl>
+                                        <p:attrNameLst>
+                                          <p:attrName>ppt_y</p:attrName>
+                                        </p:attrNameLst>
+                                      </p:cBhvr>
+                                      <p:tavLst>
+                                        <p:tav tm="0">
+                                          <p:val>
+                                            <p:strVal val="#ppt_y+0.025"/>
+                                          </p:val>
+                                        </p:tav>
+                                        <p:tav tm="100000">
+                                          <p:val>
+                                            <p:strVal val="#ppt_y"/>
+                                          </p:val>
+                                        </p:tav>
+                                      </p:tavLst>
+                                    </p:anim>
+                                  </p:childTnLst>
+                                </p:cTn>
+                              </p:par>
+                            </p:childTnLst>
+                          </p:cTn>
+                        </p:par>
+                      </p:childTnLst>
+                    </p:cTn>
+                  </p:par>
+                </p:childTnLst>
+              </p:cTn>
+              <p:prevCondLst>
+                <p:cond evt="onPrev" delay="0">
+                  <p:tgtEl>
+                    <p:sldTgt/>
+                  </p:tgtEl>
+                </p:cond>
+              </p:prevCondLst>
+              <p:nextCondLst>
+                <p:cond evt="onNext" delay="0">
+                  <p:tgtEl>
+                    <p:sldTgt/>
+                  </p:tgtEl>
+                </p:cond>
+              </p:nextCondLst>
+            </p:seq>
+          </p:childTnLst>
+        </p:cTn>
+      </p:par>
+    </p:tnLst>
+    <p:bldLst>
+      <p:bldP spid="2" grpId="0"/>
+      <p:bldP spid="3" grpId="0"/>
+      <p:bldP spid="4" grpId="0"/>
+      <p:bldP spid="5" grpId="0"/>
+    </p:bldLst>
+  </p:timing>
 </p:sld>
 </file>
 
@@ -3756,6 +6148,474 @@
   <p:clrMapOvr>
     <a:masterClrMapping/>
   </p:clrMapOvr>
+  <p:transition xmlns:p14="http://schemas.microsoft.com/office/powerpoint/2010/main" spd="slow" p14:dur="700">
+    <p:fade/>
+  </p:transition>
+  <p:timing xmlns:p="http://schemas.openxmlformats.org/presentationml/2006/main">
+    <p:tnLst>
+      <p:par>
+        <p:cTn id="1" dur="indefinite" restart="never" nodeType="tmRoot">
+          <p:childTnLst>
+            <p:seq concurrent="1" nextAc="seek">
+              <p:cTn id="2" dur="indefinite" nodeType="mainSeq">
+                <p:childTnLst>
+                  <p:par>
+                    <p:cTn id="3" fill="hold">
+                      <p:stCondLst>
+                        <p:cond delay="indefinite"/>
+                        <p:cond evt="onBegin" delay="0">
+                          <p:tn val="2"/>
+                        </p:cond>
+                      </p:stCondLst>
+                      <p:childTnLst>
+                        <p:par>
+                          <p:cTn id="4" fill="hold">
+                            <p:stCondLst>
+                              <p:cond delay="0"/>
+                            </p:stCondLst>
+                            <p:childTnLst>
+                              <p:par>
+                                <p:cTn id="5" presetID="10" presetClass="entr" presetSubtype="0" fill="hold" grpId="0" nodeType="withEffect">
+                                  <p:stCondLst>
+                                    <p:cond delay="0"/>
+                                  </p:stCondLst>
+                                  <p:childTnLst>
+                                    <p:set>
+                                      <p:cBhvr>
+                                        <p:cTn id="6" dur="1" fill="hold">
+                                          <p:stCondLst>
+                                            <p:cond delay="0"/>
+                                          </p:stCondLst>
+                                        </p:cTn>
+                                        <p:tgtEl>
+                                          <p:spTgt spid="2"/>
+                                        </p:tgtEl>
+                                        <p:attrNameLst>
+                                          <p:attrName>style.visibility</p:attrName>
+                                        </p:attrNameLst>
+                                      </p:cBhvr>
+                                      <p:to>
+                                        <p:strVal val="visible"/>
+                                      </p:to>
+                                    </p:set>
+                                    <p:animEffect transition="in" filter="fade">
+                                      <p:cBhvr>
+                                        <p:cTn id="7" dur="450"/>
+                                        <p:tgtEl>
+                                          <p:spTgt spid="2"/>
+                                        </p:tgtEl>
+                                      </p:cBhvr>
+                                    </p:animEffect>
+                                    <p:anim calcmode="lin" valueType="num">
+                                      <p:cBhvr additive="base">
+                                        <p:cTn id="8" dur="450" fill="hold"/>
+                                        <p:tgtEl>
+                                          <p:spTgt spid="2"/>
+                                        </p:tgtEl>
+                                        <p:attrNameLst>
+                                          <p:attrName>ppt_y</p:attrName>
+                                        </p:attrNameLst>
+                                      </p:cBhvr>
+                                      <p:tavLst>
+                                        <p:tav tm="0">
+                                          <p:val>
+                                            <p:strVal val="#ppt_y+0.025"/>
+                                          </p:val>
+                                        </p:tav>
+                                        <p:tav tm="100000">
+                                          <p:val>
+                                            <p:strVal val="#ppt_y"/>
+                                          </p:val>
+                                        </p:tav>
+                                      </p:tavLst>
+                                    </p:anim>
+                                  </p:childTnLst>
+                                </p:cTn>
+                              </p:par>
+                              <p:par>
+                                <p:cTn id="9" presetID="10" presetClass="entr" presetSubtype="0" fill="hold" grpId="0" nodeType="withEffect">
+                                  <p:stCondLst>
+                                    <p:cond delay="160"/>
+                                  </p:stCondLst>
+                                  <p:childTnLst>
+                                    <p:set>
+                                      <p:cBhvr>
+                                        <p:cTn id="10" dur="1" fill="hold">
+                                          <p:stCondLst>
+                                            <p:cond delay="0"/>
+                                          </p:stCondLst>
+                                        </p:cTn>
+                                        <p:tgtEl>
+                                          <p:spTgt spid="3"/>
+                                        </p:tgtEl>
+                                        <p:attrNameLst>
+                                          <p:attrName>style.visibility</p:attrName>
+                                        </p:attrNameLst>
+                                      </p:cBhvr>
+                                      <p:to>
+                                        <p:strVal val="visible"/>
+                                      </p:to>
+                                    </p:set>
+                                    <p:animEffect transition="in" filter="fade">
+                                      <p:cBhvr>
+                                        <p:cTn id="11" dur="450"/>
+                                        <p:tgtEl>
+                                          <p:spTgt spid="3"/>
+                                        </p:tgtEl>
+                                      </p:cBhvr>
+                                    </p:animEffect>
+                                    <p:anim calcmode="lin" valueType="num">
+                                      <p:cBhvr additive="base">
+                                        <p:cTn id="12" dur="450" fill="hold"/>
+                                        <p:tgtEl>
+                                          <p:spTgt spid="3"/>
+                                        </p:tgtEl>
+                                        <p:attrNameLst>
+                                          <p:attrName>ppt_y</p:attrName>
+                                        </p:attrNameLst>
+                                      </p:cBhvr>
+                                      <p:tavLst>
+                                        <p:tav tm="0">
+                                          <p:val>
+                                            <p:strVal val="#ppt_y+0.025"/>
+                                          </p:val>
+                                        </p:tav>
+                                        <p:tav tm="100000">
+                                          <p:val>
+                                            <p:strVal val="#ppt_y"/>
+                                          </p:val>
+                                        </p:tav>
+                                      </p:tavLst>
+                                    </p:anim>
+                                  </p:childTnLst>
+                                </p:cTn>
+                              </p:par>
+                              <p:par>
+                                <p:cTn id="13" presetID="10" presetClass="entr" presetSubtype="0" fill="hold" grpId="0" nodeType="withEffect">
+                                  <p:stCondLst>
+                                    <p:cond delay="320"/>
+                                  </p:stCondLst>
+                                  <p:childTnLst>
+                                    <p:set>
+                                      <p:cBhvr>
+                                        <p:cTn id="14" dur="1" fill="hold">
+                                          <p:stCondLst>
+                                            <p:cond delay="0"/>
+                                          </p:stCondLst>
+                                        </p:cTn>
+                                        <p:tgtEl>
+                                          <p:spTgt spid="8"/>
+                                        </p:tgtEl>
+                                        <p:attrNameLst>
+                                          <p:attrName>style.visibility</p:attrName>
+                                        </p:attrNameLst>
+                                      </p:cBhvr>
+                                      <p:to>
+                                        <p:strVal val="visible"/>
+                                      </p:to>
+                                    </p:set>
+                                    <p:animEffect transition="in" filter="fade">
+                                      <p:cBhvr>
+                                        <p:cTn id="15" dur="450"/>
+                                        <p:tgtEl>
+                                          <p:spTgt spid="8"/>
+                                        </p:tgtEl>
+                                      </p:cBhvr>
+                                    </p:animEffect>
+                                    <p:anim calcmode="lin" valueType="num">
+                                      <p:cBhvr additive="base">
+                                        <p:cTn id="16" dur="450" fill="hold"/>
+                                        <p:tgtEl>
+                                          <p:spTgt spid="8"/>
+                                        </p:tgtEl>
+                                        <p:attrNameLst>
+                                          <p:attrName>ppt_y</p:attrName>
+                                        </p:attrNameLst>
+                                      </p:cBhvr>
+                                      <p:tavLst>
+                                        <p:tav tm="0">
+                                          <p:val>
+                                            <p:strVal val="#ppt_y+0.025"/>
+                                          </p:val>
+                                        </p:tav>
+                                        <p:tav tm="100000">
+                                          <p:val>
+                                            <p:strVal val="#ppt_y"/>
+                                          </p:val>
+                                        </p:tav>
+                                      </p:tavLst>
+                                    </p:anim>
+                                  </p:childTnLst>
+                                </p:cTn>
+                              </p:par>
+                              <p:par>
+                                <p:cTn id="17" presetID="10" presetClass="entr" presetSubtype="0" fill="hold" grpId="0" nodeType="withEffect">
+                                  <p:stCondLst>
+                                    <p:cond delay="480"/>
+                                  </p:stCondLst>
+                                  <p:childTnLst>
+                                    <p:set>
+                                      <p:cBhvr>
+                                        <p:cTn id="18" dur="1" fill="hold">
+                                          <p:stCondLst>
+                                            <p:cond delay="0"/>
+                                          </p:stCondLst>
+                                        </p:cTn>
+                                        <p:tgtEl>
+                                          <p:spTgt spid="4"/>
+                                        </p:tgtEl>
+                                        <p:attrNameLst>
+                                          <p:attrName>style.visibility</p:attrName>
+                                        </p:attrNameLst>
+                                      </p:cBhvr>
+                                      <p:to>
+                                        <p:strVal val="visible"/>
+                                      </p:to>
+                                    </p:set>
+                                    <p:animEffect transition="in" filter="fade">
+                                      <p:cBhvr>
+                                        <p:cTn id="19" dur="450"/>
+                                        <p:tgtEl>
+                                          <p:spTgt spid="4"/>
+                                        </p:tgtEl>
+                                      </p:cBhvr>
+                                    </p:animEffect>
+                                    <p:anim calcmode="lin" valueType="num">
+                                      <p:cBhvr additive="base">
+                                        <p:cTn id="20" dur="450" fill="hold"/>
+                                        <p:tgtEl>
+                                          <p:spTgt spid="4"/>
+                                        </p:tgtEl>
+                                        <p:attrNameLst>
+                                          <p:attrName>ppt_y</p:attrName>
+                                        </p:attrNameLst>
+                                      </p:cBhvr>
+                                      <p:tavLst>
+                                        <p:tav tm="0">
+                                          <p:val>
+                                            <p:strVal val="#ppt_y+0.025"/>
+                                          </p:val>
+                                        </p:tav>
+                                        <p:tav tm="100000">
+                                          <p:val>
+                                            <p:strVal val="#ppt_y"/>
+                                          </p:val>
+                                        </p:tav>
+                                      </p:tavLst>
+                                    </p:anim>
+                                  </p:childTnLst>
+                                </p:cTn>
+                              </p:par>
+                              <p:par>
+                                <p:cTn id="21" presetID="10" presetClass="entr" presetSubtype="0" fill="hold" grpId="0" nodeType="withEffect">
+                                  <p:stCondLst>
+                                    <p:cond delay="640"/>
+                                  </p:stCondLst>
+                                  <p:childTnLst>
+                                    <p:set>
+                                      <p:cBhvr>
+                                        <p:cTn id="22" dur="1" fill="hold">
+                                          <p:stCondLst>
+                                            <p:cond delay="0"/>
+                                          </p:stCondLst>
+                                        </p:cTn>
+                                        <p:tgtEl>
+                                          <p:spTgt spid="5"/>
+                                        </p:tgtEl>
+                                        <p:attrNameLst>
+                                          <p:attrName>style.visibility</p:attrName>
+                                        </p:attrNameLst>
+                                      </p:cBhvr>
+                                      <p:to>
+                                        <p:strVal val="visible"/>
+                                      </p:to>
+                                    </p:set>
+                                    <p:animEffect transition="in" filter="fade">
+                                      <p:cBhvr>
+                                        <p:cTn id="23" dur="450"/>
+                                        <p:tgtEl>
+                                          <p:spTgt spid="5"/>
+                                        </p:tgtEl>
+                                      </p:cBhvr>
+                                    </p:animEffect>
+                                    <p:anim calcmode="lin" valueType="num">
+                                      <p:cBhvr additive="base">
+                                        <p:cTn id="24" dur="450" fill="hold"/>
+                                        <p:tgtEl>
+                                          <p:spTgt spid="5"/>
+                                        </p:tgtEl>
+                                        <p:attrNameLst>
+                                          <p:attrName>ppt_y</p:attrName>
+                                        </p:attrNameLst>
+                                      </p:cBhvr>
+                                      <p:tavLst>
+                                        <p:tav tm="0">
+                                          <p:val>
+                                            <p:strVal val="#ppt_y+0.025"/>
+                                          </p:val>
+                                        </p:tav>
+                                        <p:tav tm="100000">
+                                          <p:val>
+                                            <p:strVal val="#ppt_y"/>
+                                          </p:val>
+                                        </p:tav>
+                                      </p:tavLst>
+                                    </p:anim>
+                                  </p:childTnLst>
+                                </p:cTn>
+                              </p:par>
+                              <p:par>
+                                <p:cTn id="25" presetID="10" presetClass="entr" presetSubtype="0" fill="hold" grpId="0" nodeType="withEffect">
+                                  <p:stCondLst>
+                                    <p:cond delay="800"/>
+                                  </p:stCondLst>
+                                  <p:childTnLst>
+                                    <p:set>
+                                      <p:cBhvr>
+                                        <p:cTn id="26" dur="1" fill="hold">
+                                          <p:stCondLst>
+                                            <p:cond delay="0"/>
+                                          </p:stCondLst>
+                                        </p:cTn>
+                                        <p:tgtEl>
+                                          <p:spTgt spid="6"/>
+                                        </p:tgtEl>
+                                        <p:attrNameLst>
+                                          <p:attrName>style.visibility</p:attrName>
+                                        </p:attrNameLst>
+                                      </p:cBhvr>
+                                      <p:to>
+                                        <p:strVal val="visible"/>
+                                      </p:to>
+                                    </p:set>
+                                    <p:animEffect transition="in" filter="fade">
+                                      <p:cBhvr>
+                                        <p:cTn id="27" dur="450"/>
+                                        <p:tgtEl>
+                                          <p:spTgt spid="6"/>
+                                        </p:tgtEl>
+                                      </p:cBhvr>
+                                    </p:animEffect>
+                                    <p:anim calcmode="lin" valueType="num">
+                                      <p:cBhvr additive="base">
+                                        <p:cTn id="28" dur="450" fill="hold"/>
+                                        <p:tgtEl>
+                                          <p:spTgt spid="6"/>
+                                        </p:tgtEl>
+                                        <p:attrNameLst>
+                                          <p:attrName>ppt_y</p:attrName>
+                                        </p:attrNameLst>
+                                      </p:cBhvr>
+                                      <p:tavLst>
+                                        <p:tav tm="0">
+                                          <p:val>
+                                            <p:strVal val="#ppt_y+0.025"/>
+                                          </p:val>
+                                        </p:tav>
+                                        <p:tav tm="100000">
+                                          <p:val>
+                                            <p:strVal val="#ppt_y"/>
+                                          </p:val>
+                                        </p:tav>
+                                      </p:tavLst>
+                                    </p:anim>
+                                  </p:childTnLst>
+                                </p:cTn>
+                              </p:par>
+                              <p:par>
+                                <p:cTn id="29" presetID="10" presetClass="entr" presetSubtype="0" fill="hold" grpId="0" nodeType="withEffect">
+                                  <p:stCondLst>
+                                    <p:cond delay="960"/>
+                                  </p:stCondLst>
+                                  <p:childTnLst>
+                                    <p:set>
+                                      <p:cBhvr>
+                                        <p:cTn id="30" dur="1" fill="hold">
+                                          <p:stCondLst>
+                                            <p:cond delay="0"/>
+                                          </p:stCondLst>
+                                        </p:cTn>
+                                        <p:tgtEl>
+                                          <p:spTgt spid="7"/>
+                                        </p:tgtEl>
+                                        <p:attrNameLst>
+                                          <p:attrName>style.visibility</p:attrName>
+                                        </p:attrNameLst>
+                                      </p:cBhvr>
+                                      <p:to>
+                                        <p:strVal val="visible"/>
+                                      </p:to>
+                                    </p:set>
+                                    <p:animEffect transition="in" filter="fade">
+                                      <p:cBhvr>
+                                        <p:cTn id="31" dur="450"/>
+                                        <p:tgtEl>
+                                          <p:spTgt spid="7"/>
+                                        </p:tgtEl>
+                                      </p:cBhvr>
+                                    </p:animEffect>
+                                    <p:anim calcmode="lin" valueType="num">
+                                      <p:cBhvr additive="base">
+                                        <p:cTn id="32" dur="450" fill="hold"/>
+                                        <p:tgtEl>
+                                          <p:spTgt spid="7"/>
+                                        </p:tgtEl>
+                                        <p:attrNameLst>
+                                          <p:attrName>ppt_y</p:attrName>
+                                        </p:attrNameLst>
+                                      </p:cBhvr>
+                                      <p:tavLst>
+                                        <p:tav tm="0">
+                                          <p:val>
+                                            <p:strVal val="#ppt_y+0.025"/>
+                                          </p:val>
+                                        </p:tav>
+                                        <p:tav tm="100000">
+                                          <p:val>
+                                            <p:strVal val="#ppt_y"/>
+                                          </p:val>
+                                        </p:tav>
+                                      </p:tavLst>
+                                    </p:anim>
+                                  </p:childTnLst>
+                                </p:cTn>
+                              </p:par>
+                            </p:childTnLst>
+                          </p:cTn>
+                        </p:par>
+                      </p:childTnLst>
+                    </p:cTn>
+                  </p:par>
+                </p:childTnLst>
+              </p:cTn>
+              <p:prevCondLst>
+                <p:cond evt="onPrev" delay="0">
+                  <p:tgtEl>
+                    <p:sldTgt/>
+                  </p:tgtEl>
+                </p:cond>
+              </p:prevCondLst>
+              <p:nextCondLst>
+                <p:cond evt="onNext" delay="0">
+                  <p:tgtEl>
+                    <p:sldTgt/>
+                  </p:tgtEl>
+                </p:cond>
+              </p:nextCondLst>
+            </p:seq>
+          </p:childTnLst>
+        </p:cTn>
+      </p:par>
+    </p:tnLst>
+    <p:bldLst>
+      <p:bldP spid="2" grpId="0"/>
+      <p:bldP spid="3" grpId="0"/>
+      <p:bldP spid="4" grpId="0"/>
+      <p:bldP spid="5" grpId="0"/>
+      <p:bldP spid="6" grpId="0"/>
+      <p:bldP spid="7" grpId="0"/>
+    </p:bldLst>
+  </p:timing>
 </p:sld>
 </file>
 
@@ -4227,6 +7087,825 @@
   <p:clrMapOvr>
     <a:masterClrMapping/>
   </p:clrMapOvr>
+  <p:transition xmlns:p14="http://schemas.microsoft.com/office/powerpoint/2010/main" spd="slow" p14:dur="700">
+    <p:fade/>
+  </p:transition>
+  <p:timing xmlns:p="http://schemas.openxmlformats.org/presentationml/2006/main">
+    <p:tnLst>
+      <p:par>
+        <p:cTn id="1" dur="indefinite" restart="never" nodeType="tmRoot">
+          <p:childTnLst>
+            <p:seq concurrent="1" nextAc="seek">
+              <p:cTn id="2" dur="indefinite" nodeType="mainSeq">
+                <p:childTnLst>
+                  <p:par>
+                    <p:cTn id="3" fill="hold">
+                      <p:stCondLst>
+                        <p:cond delay="indefinite"/>
+                        <p:cond evt="onBegin" delay="0">
+                          <p:tn val="2"/>
+                        </p:cond>
+                      </p:stCondLst>
+                      <p:childTnLst>
+                        <p:par>
+                          <p:cTn id="4" fill="hold">
+                            <p:stCondLst>
+                              <p:cond delay="0"/>
+                            </p:stCondLst>
+                            <p:childTnLst>
+                              <p:par>
+                                <p:cTn id="5" presetID="10" presetClass="entr" presetSubtype="0" fill="hold" grpId="0" nodeType="withEffect">
+                                  <p:stCondLst>
+                                    <p:cond delay="0"/>
+                                  </p:stCondLst>
+                                  <p:childTnLst>
+                                    <p:set>
+                                      <p:cBhvr>
+                                        <p:cTn id="6" dur="1" fill="hold">
+                                          <p:stCondLst>
+                                            <p:cond delay="0"/>
+                                          </p:stCondLst>
+                                        </p:cTn>
+                                        <p:tgtEl>
+                                          <p:spTgt spid="2"/>
+                                        </p:tgtEl>
+                                        <p:attrNameLst>
+                                          <p:attrName>style.visibility</p:attrName>
+                                        </p:attrNameLst>
+                                      </p:cBhvr>
+                                      <p:to>
+                                        <p:strVal val="visible"/>
+                                      </p:to>
+                                    </p:set>
+                                    <p:animEffect transition="in" filter="fade">
+                                      <p:cBhvr>
+                                        <p:cTn id="7" dur="450"/>
+                                        <p:tgtEl>
+                                          <p:spTgt spid="2"/>
+                                        </p:tgtEl>
+                                      </p:cBhvr>
+                                    </p:animEffect>
+                                    <p:anim calcmode="lin" valueType="num">
+                                      <p:cBhvr additive="base">
+                                        <p:cTn id="8" dur="450" fill="hold"/>
+                                        <p:tgtEl>
+                                          <p:spTgt spid="2"/>
+                                        </p:tgtEl>
+                                        <p:attrNameLst>
+                                          <p:attrName>ppt_y</p:attrName>
+                                        </p:attrNameLst>
+                                      </p:cBhvr>
+                                      <p:tavLst>
+                                        <p:tav tm="0">
+                                          <p:val>
+                                            <p:strVal val="#ppt_y+0.025"/>
+                                          </p:val>
+                                        </p:tav>
+                                        <p:tav tm="100000">
+                                          <p:val>
+                                            <p:strVal val="#ppt_y"/>
+                                          </p:val>
+                                        </p:tav>
+                                      </p:tavLst>
+                                    </p:anim>
+                                  </p:childTnLst>
+                                </p:cTn>
+                              </p:par>
+                              <p:par>
+                                <p:cTn id="9" presetID="10" presetClass="entr" presetSubtype="0" fill="hold" grpId="0" nodeType="withEffect">
+                                  <p:stCondLst>
+                                    <p:cond delay="91"/>
+                                  </p:stCondLst>
+                                  <p:childTnLst>
+                                    <p:set>
+                                      <p:cBhvr>
+                                        <p:cTn id="10" dur="1" fill="hold">
+                                          <p:stCondLst>
+                                            <p:cond delay="0"/>
+                                          </p:stCondLst>
+                                        </p:cTn>
+                                        <p:tgtEl>
+                                          <p:spTgt spid="3"/>
+                                        </p:tgtEl>
+                                        <p:attrNameLst>
+                                          <p:attrName>style.visibility</p:attrName>
+                                        </p:attrNameLst>
+                                      </p:cBhvr>
+                                      <p:to>
+                                        <p:strVal val="visible"/>
+                                      </p:to>
+                                    </p:set>
+                                    <p:animEffect transition="in" filter="fade">
+                                      <p:cBhvr>
+                                        <p:cTn id="11" dur="450"/>
+                                        <p:tgtEl>
+                                          <p:spTgt spid="3"/>
+                                        </p:tgtEl>
+                                      </p:cBhvr>
+                                    </p:animEffect>
+                                    <p:anim calcmode="lin" valueType="num">
+                                      <p:cBhvr additive="base">
+                                        <p:cTn id="12" dur="450" fill="hold"/>
+                                        <p:tgtEl>
+                                          <p:spTgt spid="3"/>
+                                        </p:tgtEl>
+                                        <p:attrNameLst>
+                                          <p:attrName>ppt_y</p:attrName>
+                                        </p:attrNameLst>
+                                      </p:cBhvr>
+                                      <p:tavLst>
+                                        <p:tav tm="0">
+                                          <p:val>
+                                            <p:strVal val="#ppt_y+0.025"/>
+                                          </p:val>
+                                        </p:tav>
+                                        <p:tav tm="100000">
+                                          <p:val>
+                                            <p:strVal val="#ppt_y"/>
+                                          </p:val>
+                                        </p:tav>
+                                      </p:tavLst>
+                                    </p:anim>
+                                  </p:childTnLst>
+                                </p:cTn>
+                              </p:par>
+                              <p:par>
+                                <p:cTn id="13" presetID="10" presetClass="entr" presetSubtype="0" fill="hold" grpId="0" nodeType="withEffect">
+                                  <p:stCondLst>
+                                    <p:cond delay="182"/>
+                                  </p:stCondLst>
+                                  <p:childTnLst>
+                                    <p:set>
+                                      <p:cBhvr>
+                                        <p:cTn id="14" dur="1" fill="hold">
+                                          <p:stCondLst>
+                                            <p:cond delay="0"/>
+                                          </p:stCondLst>
+                                        </p:cTn>
+                                        <p:tgtEl>
+                                          <p:spTgt spid="6"/>
+                                        </p:tgtEl>
+                                        <p:attrNameLst>
+                                          <p:attrName>style.visibility</p:attrName>
+                                        </p:attrNameLst>
+                                      </p:cBhvr>
+                                      <p:to>
+                                        <p:strVal val="visible"/>
+                                      </p:to>
+                                    </p:set>
+                                    <p:animEffect transition="in" filter="fade">
+                                      <p:cBhvr>
+                                        <p:cTn id="15" dur="450"/>
+                                        <p:tgtEl>
+                                          <p:spTgt spid="6"/>
+                                        </p:tgtEl>
+                                      </p:cBhvr>
+                                    </p:animEffect>
+                                    <p:anim calcmode="lin" valueType="num">
+                                      <p:cBhvr additive="base">
+                                        <p:cTn id="16" dur="450" fill="hold"/>
+                                        <p:tgtEl>
+                                          <p:spTgt spid="6"/>
+                                        </p:tgtEl>
+                                        <p:attrNameLst>
+                                          <p:attrName>ppt_y</p:attrName>
+                                        </p:attrNameLst>
+                                      </p:cBhvr>
+                                      <p:tavLst>
+                                        <p:tav tm="0">
+                                          <p:val>
+                                            <p:strVal val="#ppt_y+0.025"/>
+                                          </p:val>
+                                        </p:tav>
+                                        <p:tav tm="100000">
+                                          <p:val>
+                                            <p:strVal val="#ppt_y"/>
+                                          </p:val>
+                                        </p:tav>
+                                      </p:tavLst>
+                                    </p:anim>
+                                  </p:childTnLst>
+                                </p:cTn>
+                              </p:par>
+                              <p:par>
+                                <p:cTn id="17" presetID="10" presetClass="entr" presetSubtype="0" fill="hold" grpId="0" nodeType="withEffect">
+                                  <p:stCondLst>
+                                    <p:cond delay="273"/>
+                                  </p:stCondLst>
+                                  <p:childTnLst>
+                                    <p:set>
+                                      <p:cBhvr>
+                                        <p:cTn id="18" dur="1" fill="hold">
+                                          <p:stCondLst>
+                                            <p:cond delay="0"/>
+                                          </p:stCondLst>
+                                        </p:cTn>
+                                        <p:tgtEl>
+                                          <p:spTgt spid="9"/>
+                                        </p:tgtEl>
+                                        <p:attrNameLst>
+                                          <p:attrName>style.visibility</p:attrName>
+                                        </p:attrNameLst>
+                                      </p:cBhvr>
+                                      <p:to>
+                                        <p:strVal val="visible"/>
+                                      </p:to>
+                                    </p:set>
+                                    <p:animEffect transition="in" filter="fade">
+                                      <p:cBhvr>
+                                        <p:cTn id="19" dur="450"/>
+                                        <p:tgtEl>
+                                          <p:spTgt spid="9"/>
+                                        </p:tgtEl>
+                                      </p:cBhvr>
+                                    </p:animEffect>
+                                    <p:anim calcmode="lin" valueType="num">
+                                      <p:cBhvr additive="base">
+                                        <p:cTn id="20" dur="450" fill="hold"/>
+                                        <p:tgtEl>
+                                          <p:spTgt spid="9"/>
+                                        </p:tgtEl>
+                                        <p:attrNameLst>
+                                          <p:attrName>ppt_y</p:attrName>
+                                        </p:attrNameLst>
+                                      </p:cBhvr>
+                                      <p:tavLst>
+                                        <p:tav tm="0">
+                                          <p:val>
+                                            <p:strVal val="#ppt_y+0.025"/>
+                                          </p:val>
+                                        </p:tav>
+                                        <p:tav tm="100000">
+                                          <p:val>
+                                            <p:strVal val="#ppt_y"/>
+                                          </p:val>
+                                        </p:tav>
+                                      </p:tavLst>
+                                    </p:anim>
+                                  </p:childTnLst>
+                                </p:cTn>
+                              </p:par>
+                              <p:par>
+                                <p:cTn id="21" presetID="10" presetClass="entr" presetSubtype="0" fill="hold" grpId="0" nodeType="withEffect">
+                                  <p:stCondLst>
+                                    <p:cond delay="364"/>
+                                  </p:stCondLst>
+                                  <p:childTnLst>
+                                    <p:set>
+                                      <p:cBhvr>
+                                        <p:cTn id="22" dur="1" fill="hold">
+                                          <p:stCondLst>
+                                            <p:cond delay="0"/>
+                                          </p:stCondLst>
+                                        </p:cTn>
+                                        <p:tgtEl>
+                                          <p:spTgt spid="12"/>
+                                        </p:tgtEl>
+                                        <p:attrNameLst>
+                                          <p:attrName>style.visibility</p:attrName>
+                                        </p:attrNameLst>
+                                      </p:cBhvr>
+                                      <p:to>
+                                        <p:strVal val="visible"/>
+                                      </p:to>
+                                    </p:set>
+                                    <p:animEffect transition="in" filter="fade">
+                                      <p:cBhvr>
+                                        <p:cTn id="23" dur="450"/>
+                                        <p:tgtEl>
+                                          <p:spTgt spid="12"/>
+                                        </p:tgtEl>
+                                      </p:cBhvr>
+                                    </p:animEffect>
+                                    <p:anim calcmode="lin" valueType="num">
+                                      <p:cBhvr additive="base">
+                                        <p:cTn id="24" dur="450" fill="hold"/>
+                                        <p:tgtEl>
+                                          <p:spTgt spid="12"/>
+                                        </p:tgtEl>
+                                        <p:attrNameLst>
+                                          <p:attrName>ppt_y</p:attrName>
+                                        </p:attrNameLst>
+                                      </p:cBhvr>
+                                      <p:tavLst>
+                                        <p:tav tm="0">
+                                          <p:val>
+                                            <p:strVal val="#ppt_y+0.025"/>
+                                          </p:val>
+                                        </p:tav>
+                                        <p:tav tm="100000">
+                                          <p:val>
+                                            <p:strVal val="#ppt_y"/>
+                                          </p:val>
+                                        </p:tav>
+                                      </p:tavLst>
+                                    </p:anim>
+                                  </p:childTnLst>
+                                </p:cTn>
+                              </p:par>
+                              <p:par>
+                                <p:cTn id="25" presetID="10" presetClass="entr" presetSubtype="0" fill="hold" grpId="0" nodeType="withEffect">
+                                  <p:stCondLst>
+                                    <p:cond delay="455"/>
+                                  </p:stCondLst>
+                                  <p:childTnLst>
+                                    <p:set>
+                                      <p:cBhvr>
+                                        <p:cTn id="26" dur="1" fill="hold">
+                                          <p:stCondLst>
+                                            <p:cond delay="0"/>
+                                          </p:stCondLst>
+                                        </p:cTn>
+                                        <p:tgtEl>
+                                          <p:spTgt spid="4"/>
+                                        </p:tgtEl>
+                                        <p:attrNameLst>
+                                          <p:attrName>style.visibility</p:attrName>
+                                        </p:attrNameLst>
+                                      </p:cBhvr>
+                                      <p:to>
+                                        <p:strVal val="visible"/>
+                                      </p:to>
+                                    </p:set>
+                                    <p:animEffect transition="in" filter="fade">
+                                      <p:cBhvr>
+                                        <p:cTn id="27" dur="450"/>
+                                        <p:tgtEl>
+                                          <p:spTgt spid="4"/>
+                                        </p:tgtEl>
+                                      </p:cBhvr>
+                                    </p:animEffect>
+                                    <p:anim calcmode="lin" valueType="num">
+                                      <p:cBhvr additive="base">
+                                        <p:cTn id="28" dur="450" fill="hold"/>
+                                        <p:tgtEl>
+                                          <p:spTgt spid="4"/>
+                                        </p:tgtEl>
+                                        <p:attrNameLst>
+                                          <p:attrName>ppt_y</p:attrName>
+                                        </p:attrNameLst>
+                                      </p:cBhvr>
+                                      <p:tavLst>
+                                        <p:tav tm="0">
+                                          <p:val>
+                                            <p:strVal val="#ppt_y+0.025"/>
+                                          </p:val>
+                                        </p:tav>
+                                        <p:tav tm="100000">
+                                          <p:val>
+                                            <p:strVal val="#ppt_y"/>
+                                          </p:val>
+                                        </p:tav>
+                                      </p:tavLst>
+                                    </p:anim>
+                                  </p:childTnLst>
+                                </p:cTn>
+                              </p:par>
+                              <p:par>
+                                <p:cTn id="29" presetID="10" presetClass="entr" presetSubtype="0" fill="hold" grpId="0" nodeType="withEffect">
+                                  <p:stCondLst>
+                                    <p:cond delay="546"/>
+                                  </p:stCondLst>
+                                  <p:childTnLst>
+                                    <p:set>
+                                      <p:cBhvr>
+                                        <p:cTn id="30" dur="1" fill="hold">
+                                          <p:stCondLst>
+                                            <p:cond delay="0"/>
+                                          </p:stCondLst>
+                                        </p:cTn>
+                                        <p:tgtEl>
+                                          <p:spTgt spid="7"/>
+                                        </p:tgtEl>
+                                        <p:attrNameLst>
+                                          <p:attrName>style.visibility</p:attrName>
+                                        </p:attrNameLst>
+                                      </p:cBhvr>
+                                      <p:to>
+                                        <p:strVal val="visible"/>
+                                      </p:to>
+                                    </p:set>
+                                    <p:animEffect transition="in" filter="fade">
+                                      <p:cBhvr>
+                                        <p:cTn id="31" dur="450"/>
+                                        <p:tgtEl>
+                                          <p:spTgt spid="7"/>
+                                        </p:tgtEl>
+                                      </p:cBhvr>
+                                    </p:animEffect>
+                                    <p:anim calcmode="lin" valueType="num">
+                                      <p:cBhvr additive="base">
+                                        <p:cTn id="32" dur="450" fill="hold"/>
+                                        <p:tgtEl>
+                                          <p:spTgt spid="7"/>
+                                        </p:tgtEl>
+                                        <p:attrNameLst>
+                                          <p:attrName>ppt_y</p:attrName>
+                                        </p:attrNameLst>
+                                      </p:cBhvr>
+                                      <p:tavLst>
+                                        <p:tav tm="0">
+                                          <p:val>
+                                            <p:strVal val="#ppt_y+0.025"/>
+                                          </p:val>
+                                        </p:tav>
+                                        <p:tav tm="100000">
+                                          <p:val>
+                                            <p:strVal val="#ppt_y"/>
+                                          </p:val>
+                                        </p:tav>
+                                      </p:tavLst>
+                                    </p:anim>
+                                  </p:childTnLst>
+                                </p:cTn>
+                              </p:par>
+                              <p:par>
+                                <p:cTn id="33" presetID="10" presetClass="entr" presetSubtype="0" fill="hold" grpId="0" nodeType="withEffect">
+                                  <p:stCondLst>
+                                    <p:cond delay="637"/>
+                                  </p:stCondLst>
+                                  <p:childTnLst>
+                                    <p:set>
+                                      <p:cBhvr>
+                                        <p:cTn id="34" dur="1" fill="hold">
+                                          <p:stCondLst>
+                                            <p:cond delay="0"/>
+                                          </p:stCondLst>
+                                        </p:cTn>
+                                        <p:tgtEl>
+                                          <p:spTgt spid="10"/>
+                                        </p:tgtEl>
+                                        <p:attrNameLst>
+                                          <p:attrName>style.visibility</p:attrName>
+                                        </p:attrNameLst>
+                                      </p:cBhvr>
+                                      <p:to>
+                                        <p:strVal val="visible"/>
+                                      </p:to>
+                                    </p:set>
+                                    <p:animEffect transition="in" filter="fade">
+                                      <p:cBhvr>
+                                        <p:cTn id="35" dur="450"/>
+                                        <p:tgtEl>
+                                          <p:spTgt spid="10"/>
+                                        </p:tgtEl>
+                                      </p:cBhvr>
+                                    </p:animEffect>
+                                    <p:anim calcmode="lin" valueType="num">
+                                      <p:cBhvr additive="base">
+                                        <p:cTn id="36" dur="450" fill="hold"/>
+                                        <p:tgtEl>
+                                          <p:spTgt spid="10"/>
+                                        </p:tgtEl>
+                                        <p:attrNameLst>
+                                          <p:attrName>ppt_y</p:attrName>
+                                        </p:attrNameLst>
+                                      </p:cBhvr>
+                                      <p:tavLst>
+                                        <p:tav tm="0">
+                                          <p:val>
+                                            <p:strVal val="#ppt_y+0.025"/>
+                                          </p:val>
+                                        </p:tav>
+                                        <p:tav tm="100000">
+                                          <p:val>
+                                            <p:strVal val="#ppt_y"/>
+                                          </p:val>
+                                        </p:tav>
+                                      </p:tavLst>
+                                    </p:anim>
+                                  </p:childTnLst>
+                                </p:cTn>
+                              </p:par>
+                              <p:par>
+                                <p:cTn id="37" presetID="10" presetClass="entr" presetSubtype="0" fill="hold" grpId="0" nodeType="withEffect">
+                                  <p:stCondLst>
+                                    <p:cond delay="728"/>
+                                  </p:stCondLst>
+                                  <p:childTnLst>
+                                    <p:set>
+                                      <p:cBhvr>
+                                        <p:cTn id="38" dur="1" fill="hold">
+                                          <p:stCondLst>
+                                            <p:cond delay="0"/>
+                                          </p:stCondLst>
+                                        </p:cTn>
+                                        <p:tgtEl>
+                                          <p:spTgt spid="13"/>
+                                        </p:tgtEl>
+                                        <p:attrNameLst>
+                                          <p:attrName>style.visibility</p:attrName>
+                                        </p:attrNameLst>
+                                      </p:cBhvr>
+                                      <p:to>
+                                        <p:strVal val="visible"/>
+                                      </p:to>
+                                    </p:set>
+                                    <p:animEffect transition="in" filter="fade">
+                                      <p:cBhvr>
+                                        <p:cTn id="39" dur="450"/>
+                                        <p:tgtEl>
+                                          <p:spTgt spid="13"/>
+                                        </p:tgtEl>
+                                      </p:cBhvr>
+                                    </p:animEffect>
+                                    <p:anim calcmode="lin" valueType="num">
+                                      <p:cBhvr additive="base">
+                                        <p:cTn id="40" dur="450" fill="hold"/>
+                                        <p:tgtEl>
+                                          <p:spTgt spid="13"/>
+                                        </p:tgtEl>
+                                        <p:attrNameLst>
+                                          <p:attrName>ppt_y</p:attrName>
+                                        </p:attrNameLst>
+                                      </p:cBhvr>
+                                      <p:tavLst>
+                                        <p:tav tm="0">
+                                          <p:val>
+                                            <p:strVal val="#ppt_y+0.025"/>
+                                          </p:val>
+                                        </p:tav>
+                                        <p:tav tm="100000">
+                                          <p:val>
+                                            <p:strVal val="#ppt_y"/>
+                                          </p:val>
+                                        </p:tav>
+                                      </p:tavLst>
+                                    </p:anim>
+                                  </p:childTnLst>
+                                </p:cTn>
+                              </p:par>
+                              <p:par>
+                                <p:cTn id="41" presetID="10" presetClass="entr" presetSubtype="0" fill="hold" grpId="0" nodeType="withEffect">
+                                  <p:stCondLst>
+                                    <p:cond delay="819"/>
+                                  </p:stCondLst>
+                                  <p:childTnLst>
+                                    <p:set>
+                                      <p:cBhvr>
+                                        <p:cTn id="42" dur="1" fill="hold">
+                                          <p:stCondLst>
+                                            <p:cond delay="0"/>
+                                          </p:stCondLst>
+                                        </p:cTn>
+                                        <p:tgtEl>
+                                          <p:spTgt spid="5"/>
+                                        </p:tgtEl>
+                                        <p:attrNameLst>
+                                          <p:attrName>style.visibility</p:attrName>
+                                        </p:attrNameLst>
+                                      </p:cBhvr>
+                                      <p:to>
+                                        <p:strVal val="visible"/>
+                                      </p:to>
+                                    </p:set>
+                                    <p:animEffect transition="in" filter="fade">
+                                      <p:cBhvr>
+                                        <p:cTn id="43" dur="450"/>
+                                        <p:tgtEl>
+                                          <p:spTgt spid="5"/>
+                                        </p:tgtEl>
+                                      </p:cBhvr>
+                                    </p:animEffect>
+                                    <p:anim calcmode="lin" valueType="num">
+                                      <p:cBhvr additive="base">
+                                        <p:cTn id="44" dur="450" fill="hold"/>
+                                        <p:tgtEl>
+                                          <p:spTgt spid="5"/>
+                                        </p:tgtEl>
+                                        <p:attrNameLst>
+                                          <p:attrName>ppt_y</p:attrName>
+                                        </p:attrNameLst>
+                                      </p:cBhvr>
+                                      <p:tavLst>
+                                        <p:tav tm="0">
+                                          <p:val>
+                                            <p:strVal val="#ppt_y+0.025"/>
+                                          </p:val>
+                                        </p:tav>
+                                        <p:tav tm="100000">
+                                          <p:val>
+                                            <p:strVal val="#ppt_y"/>
+                                          </p:val>
+                                        </p:tav>
+                                      </p:tavLst>
+                                    </p:anim>
+                                  </p:childTnLst>
+                                </p:cTn>
+                              </p:par>
+                              <p:par>
+                                <p:cTn id="45" presetID="10" presetClass="entr" presetSubtype="0" fill="hold" grpId="0" nodeType="withEffect">
+                                  <p:stCondLst>
+                                    <p:cond delay="910"/>
+                                  </p:stCondLst>
+                                  <p:childTnLst>
+                                    <p:set>
+                                      <p:cBhvr>
+                                        <p:cTn id="46" dur="1" fill="hold">
+                                          <p:stCondLst>
+                                            <p:cond delay="0"/>
+                                          </p:stCondLst>
+                                        </p:cTn>
+                                        <p:tgtEl>
+                                          <p:spTgt spid="8"/>
+                                        </p:tgtEl>
+                                        <p:attrNameLst>
+                                          <p:attrName>style.visibility</p:attrName>
+                                        </p:attrNameLst>
+                                      </p:cBhvr>
+                                      <p:to>
+                                        <p:strVal val="visible"/>
+                                      </p:to>
+                                    </p:set>
+                                    <p:animEffect transition="in" filter="fade">
+                                      <p:cBhvr>
+                                        <p:cTn id="47" dur="450"/>
+                                        <p:tgtEl>
+                                          <p:spTgt spid="8"/>
+                                        </p:tgtEl>
+                                      </p:cBhvr>
+                                    </p:animEffect>
+                                    <p:anim calcmode="lin" valueType="num">
+                                      <p:cBhvr additive="base">
+                                        <p:cTn id="48" dur="450" fill="hold"/>
+                                        <p:tgtEl>
+                                          <p:spTgt spid="8"/>
+                                        </p:tgtEl>
+                                        <p:attrNameLst>
+                                          <p:attrName>ppt_y</p:attrName>
+                                        </p:attrNameLst>
+                                      </p:cBhvr>
+                                      <p:tavLst>
+                                        <p:tav tm="0">
+                                          <p:val>
+                                            <p:strVal val="#ppt_y+0.025"/>
+                                          </p:val>
+                                        </p:tav>
+                                        <p:tav tm="100000">
+                                          <p:val>
+                                            <p:strVal val="#ppt_y"/>
+                                          </p:val>
+                                        </p:tav>
+                                      </p:tavLst>
+                                    </p:anim>
+                                  </p:childTnLst>
+                                </p:cTn>
+                              </p:par>
+                              <p:par>
+                                <p:cTn id="49" presetID="10" presetClass="entr" presetSubtype="0" fill="hold" grpId="0" nodeType="withEffect">
+                                  <p:stCondLst>
+                                    <p:cond delay="1001"/>
+                                  </p:stCondLst>
+                                  <p:childTnLst>
+                                    <p:set>
+                                      <p:cBhvr>
+                                        <p:cTn id="50" dur="1" fill="hold">
+                                          <p:stCondLst>
+                                            <p:cond delay="0"/>
+                                          </p:stCondLst>
+                                        </p:cTn>
+                                        <p:tgtEl>
+                                          <p:spTgt spid="11"/>
+                                        </p:tgtEl>
+                                        <p:attrNameLst>
+                                          <p:attrName>style.visibility</p:attrName>
+                                        </p:attrNameLst>
+                                      </p:cBhvr>
+                                      <p:to>
+                                        <p:strVal val="visible"/>
+                                      </p:to>
+                                    </p:set>
+                                    <p:animEffect transition="in" filter="fade">
+                                      <p:cBhvr>
+                                        <p:cTn id="51" dur="450"/>
+                                        <p:tgtEl>
+                                          <p:spTgt spid="11"/>
+                                        </p:tgtEl>
+                                      </p:cBhvr>
+                                    </p:animEffect>
+                                    <p:anim calcmode="lin" valueType="num">
+                                      <p:cBhvr additive="base">
+                                        <p:cTn id="52" dur="450" fill="hold"/>
+                                        <p:tgtEl>
+                                          <p:spTgt spid="11"/>
+                                        </p:tgtEl>
+                                        <p:attrNameLst>
+                                          <p:attrName>ppt_y</p:attrName>
+                                        </p:attrNameLst>
+                                      </p:cBhvr>
+                                      <p:tavLst>
+                                        <p:tav tm="0">
+                                          <p:val>
+                                            <p:strVal val="#ppt_y+0.025"/>
+                                          </p:val>
+                                        </p:tav>
+                                        <p:tav tm="100000">
+                                          <p:val>
+                                            <p:strVal val="#ppt_y"/>
+                                          </p:val>
+                                        </p:tav>
+                                      </p:tavLst>
+                                    </p:anim>
+                                  </p:childTnLst>
+                                </p:cTn>
+                              </p:par>
+                              <p:par>
+                                <p:cTn id="53" presetID="10" presetClass="entr" presetSubtype="0" fill="hold" grpId="0" nodeType="withEffect">
+                                  <p:stCondLst>
+                                    <p:cond delay="1092"/>
+                                  </p:stCondLst>
+                                  <p:childTnLst>
+                                    <p:set>
+                                      <p:cBhvr>
+                                        <p:cTn id="54" dur="1" fill="hold">
+                                          <p:stCondLst>
+                                            <p:cond delay="0"/>
+                                          </p:stCondLst>
+                                        </p:cTn>
+                                        <p:tgtEl>
+                                          <p:spTgt spid="14"/>
+                                        </p:tgtEl>
+                                        <p:attrNameLst>
+                                          <p:attrName>style.visibility</p:attrName>
+                                        </p:attrNameLst>
+                                      </p:cBhvr>
+                                      <p:to>
+                                        <p:strVal val="visible"/>
+                                      </p:to>
+                                    </p:set>
+                                    <p:animEffect transition="in" filter="fade">
+                                      <p:cBhvr>
+                                        <p:cTn id="55" dur="450"/>
+                                        <p:tgtEl>
+                                          <p:spTgt spid="14"/>
+                                        </p:tgtEl>
+                                      </p:cBhvr>
+                                    </p:animEffect>
+                                    <p:anim calcmode="lin" valueType="num">
+                                      <p:cBhvr additive="base">
+                                        <p:cTn id="56" dur="450" fill="hold"/>
+                                        <p:tgtEl>
+                                          <p:spTgt spid="14"/>
+                                        </p:tgtEl>
+                                        <p:attrNameLst>
+                                          <p:attrName>ppt_y</p:attrName>
+                                        </p:attrNameLst>
+                                      </p:cBhvr>
+                                      <p:tavLst>
+                                        <p:tav tm="0">
+                                          <p:val>
+                                            <p:strVal val="#ppt_y+0.025"/>
+                                          </p:val>
+                                        </p:tav>
+                                        <p:tav tm="100000">
+                                          <p:val>
+                                            <p:strVal val="#ppt_y"/>
+                                          </p:val>
+                                        </p:tav>
+                                      </p:tavLst>
+                                    </p:anim>
+                                  </p:childTnLst>
+                                </p:cTn>
+                              </p:par>
+                            </p:childTnLst>
+                          </p:cTn>
+                        </p:par>
+                      </p:childTnLst>
+                    </p:cTn>
+                  </p:par>
+                </p:childTnLst>
+              </p:cTn>
+              <p:prevCondLst>
+                <p:cond evt="onPrev" delay="0">
+                  <p:tgtEl>
+                    <p:sldTgt/>
+                  </p:tgtEl>
+                </p:cond>
+              </p:prevCondLst>
+              <p:nextCondLst>
+                <p:cond evt="onNext" delay="0">
+                  <p:tgtEl>
+                    <p:sldTgt/>
+                  </p:tgtEl>
+                </p:cond>
+              </p:nextCondLst>
+            </p:seq>
+          </p:childTnLst>
+        </p:cTn>
+      </p:par>
+    </p:tnLst>
+    <p:bldLst>
+      <p:bldP spid="2" grpId="0"/>
+      <p:bldP spid="4" grpId="0"/>
+      <p:bldP spid="7" grpId="0"/>
+      <p:bldP spid="10" grpId="0"/>
+      <p:bldP spid="13" grpId="0"/>
+      <p:bldP spid="5" grpId="0"/>
+      <p:bldP spid="8" grpId="0"/>
+      <p:bldP spid="11" grpId="0"/>
+      <p:bldP spid="14" grpId="0"/>
+    </p:bldLst>
+  </p:timing>
 </p:sld>
 </file>
 

--- a/assets/showcase/inkpod-light/InkPod.pptx
+++ b/assets/showcase/inkpod-light/InkPod.pptx
@@ -1940,7 +1940,7 @@
   <p:clrMapOvr>
     <a:masterClrMapping/>
   </p:clrMapOvr>
-  <p:transition xmlns:p14="http://schemas.microsoft.com/office/powerpoint/2010/main" spd="slow" p14:dur="700">
+  <p:transition xmlns:p14="http://schemas.microsoft.com/office/powerpoint/2010/main" spd="slow" p14:dur="720">
     <p:fade/>
   </p:transition>
   <p:timing xmlns:p="http://schemas.openxmlformats.org/presentationml/2006/main">
@@ -1992,7 +1992,7 @@
                                     </p:set>
                                     <p:animEffect transition="in" filter="fade">
                                       <p:cBhvr>
-                                        <p:cTn id="7" dur="450"/>
+                                        <p:cTn id="7" dur="650"/>
                                         <p:tgtEl>
                                           <p:spTgt spid="2"/>
                                         </p:tgtEl>
@@ -2000,7 +2000,7 @@
                                     </p:animEffect>
                                     <p:anim calcmode="lin" valueType="num">
                                       <p:cBhvr additive="base">
-                                        <p:cTn id="8" dur="450" fill="hold"/>
+                                        <p:cTn id="8" dur="650" fill="hold"/>
                                         <p:tgtEl>
                                           <p:spTgt spid="2"/>
                                         </p:tgtEl>
@@ -2011,7 +2011,7 @@
                                       <p:tavLst>
                                         <p:tav tm="0">
                                           <p:val>
-                                            <p:strVal val="#ppt_y+0.025"/>
+                                            <p:strVal val="#ppt_y+0.02"/>
                                           </p:val>
                                         </p:tav>
                                         <p:tav tm="100000">
@@ -2027,7 +2027,7 @@
                               <p:par>
                                 <p:cTn id="9" presetID="10" presetClass="entr" presetSubtype="0" fill="hold" grpId="0" nodeType="withEffect">
                                   <p:stCondLst>
-                                    <p:cond delay="160"/>
+                                    <p:cond delay="190"/>
                                   </p:stCondLst>
                                   <p:childTnLst>
                                     <p:set>
@@ -2050,42 +2050,29 @@
                                     </p:set>
                                     <p:animEffect transition="in" filter="fade">
                                       <p:cBhvr>
-                                        <p:cTn id="11" dur="450"/>
+                                        <p:cTn id="11" dur="650"/>
                                         <p:tgtEl>
                                           <p:spTgt spid="3"/>
                                         </p:tgtEl>
                                       </p:cBhvr>
                                     </p:animEffect>
-                                    <p:anim calcmode="lin" valueType="num">
-                                      <p:cBhvr additive="base">
-                                        <p:cTn id="12" dur="450" fill="hold"/>
+                                    <p:animScale>
+                                      <p:cBhvr>
+                                        <p:cTn id="12" dur="650" fill="hold"/>
                                         <p:tgtEl>
                                           <p:spTgt spid="3"/>
                                         </p:tgtEl>
-                                        <p:attrNameLst>
-                                          <p:attrName>ppt_y</p:attrName>
-                                        </p:attrNameLst>
-                                      </p:cBhvr>
-                                      <p:tavLst>
-                                        <p:tav tm="0">
-                                          <p:val>
-                                            <p:strVal val="#ppt_y+0.025"/>
-                                          </p:val>
-                                        </p:tav>
-                                        <p:tav tm="100000">
-                                          <p:val>
-                                            <p:strVal val="#ppt_y"/>
-                                          </p:val>
-                                        </p:tav>
-                                      </p:tavLst>
-                                    </p:anim>
+                                      </p:cBhvr>
+                                      <p:from x="104000" y="104000"/>
+                                      <p:to x="100000" y="100000"/>
+                                    </p:animScale>
                                   </p:childTnLst>
                                 </p:cTn>
                               </p:par>
                               <p:par>
                                 <p:cTn id="13" presetID="10" presetClass="entr" presetSubtype="0" fill="hold" grpId="0" nodeType="withEffect">
                                   <p:stCondLst>
-                                    <p:cond delay="320"/>
+                                    <p:cond delay="380"/>
                                   </p:stCondLst>
                                   <p:childTnLst>
                                     <p:set>
@@ -2108,7 +2095,7 @@
                                     </p:set>
                                     <p:animEffect transition="in" filter="fade">
                                       <p:cBhvr>
-                                        <p:cTn id="15" dur="450"/>
+                                        <p:cTn id="15" dur="650"/>
                                         <p:tgtEl>
                                           <p:spTgt spid="4"/>
                                         </p:tgtEl>
@@ -2116,7 +2103,7 @@
                                     </p:animEffect>
                                     <p:anim calcmode="lin" valueType="num">
                                       <p:cBhvr additive="base">
-                                        <p:cTn id="16" dur="450" fill="hold"/>
+                                        <p:cTn id="16" dur="650" fill="hold"/>
                                         <p:tgtEl>
                                           <p:spTgt spid="4"/>
                                         </p:tgtEl>
@@ -2127,7 +2114,7 @@
                                       <p:tavLst>
                                         <p:tav tm="0">
                                           <p:val>
-                                            <p:strVal val="#ppt_y+0.025"/>
+                                            <p:strVal val="#ppt_y+0.02"/>
                                           </p:val>
                                         </p:tav>
                                         <p:tav tm="100000">
@@ -2143,7 +2130,7 @@
                               <p:par>
                                 <p:cTn id="17" presetID="10" presetClass="entr" presetSubtype="0" fill="hold" grpId="0" nodeType="withEffect">
                                   <p:stCondLst>
-                                    <p:cond delay="480"/>
+                                    <p:cond delay="570"/>
                                   </p:stCondLst>
                                   <p:childTnLst>
                                     <p:set>
@@ -2166,7 +2153,7 @@
                                     </p:set>
                                     <p:animEffect transition="in" filter="fade">
                                       <p:cBhvr>
-                                        <p:cTn id="19" dur="450"/>
+                                        <p:cTn id="19" dur="650"/>
                                         <p:tgtEl>
                                           <p:spTgt spid="5"/>
                                         </p:tgtEl>
@@ -2174,7 +2161,7 @@
                                     </p:animEffect>
                                     <p:anim calcmode="lin" valueType="num">
                                       <p:cBhvr additive="base">
-                                        <p:cTn id="20" dur="450" fill="hold"/>
+                                        <p:cTn id="20" dur="650" fill="hold"/>
                                         <p:tgtEl>
                                           <p:spTgt spid="5"/>
                                         </p:tgtEl>
@@ -2185,7 +2172,7 @@
                                       <p:tavLst>
                                         <p:tav tm="0">
                                           <p:val>
-                                            <p:strVal val="#ppt_y+0.025"/>
+                                            <p:strVal val="#ppt_y+0.02"/>
                                           </p:val>
                                         </p:tav>
                                         <p:tav tm="100000">
@@ -2434,7 +2421,7 @@
   <p:clrMapOvr>
     <a:masterClrMapping/>
   </p:clrMapOvr>
-  <p:transition xmlns:p14="http://schemas.microsoft.com/office/powerpoint/2010/main" spd="slow" p14:dur="700">
+  <p:transition xmlns:p14="http://schemas.microsoft.com/office/powerpoint/2010/main" spd="slow" p14:dur="720">
     <p:fade/>
   </p:transition>
   <p:timing xmlns:p="http://schemas.openxmlformats.org/presentationml/2006/main">
@@ -2486,42 +2473,29 @@
                                     </p:set>
                                     <p:animEffect transition="in" filter="fade">
                                       <p:cBhvr>
-                                        <p:cTn id="7" dur="450"/>
+                                        <p:cTn id="7" dur="650"/>
                                         <p:tgtEl>
                                           <p:spTgt spid="2"/>
                                         </p:tgtEl>
                                       </p:cBhvr>
                                     </p:animEffect>
-                                    <p:anim calcmode="lin" valueType="num">
-                                      <p:cBhvr additive="base">
-                                        <p:cTn id="8" dur="450" fill="hold"/>
+                                    <p:animScale>
+                                      <p:cBhvr>
+                                        <p:cTn id="8" dur="650" fill="hold"/>
                                         <p:tgtEl>
                                           <p:spTgt spid="2"/>
                                         </p:tgtEl>
-                                        <p:attrNameLst>
-                                          <p:attrName>ppt_y</p:attrName>
-                                        </p:attrNameLst>
-                                      </p:cBhvr>
-                                      <p:tavLst>
-                                        <p:tav tm="0">
-                                          <p:val>
-                                            <p:strVal val="#ppt_y+0.025"/>
-                                          </p:val>
-                                        </p:tav>
-                                        <p:tav tm="100000">
-                                          <p:val>
-                                            <p:strVal val="#ppt_y"/>
-                                          </p:val>
-                                        </p:tav>
-                                      </p:tavLst>
-                                    </p:anim>
+                                      </p:cBhvr>
+                                      <p:from x="104000" y="104000"/>
+                                      <p:to x="100000" y="100000"/>
+                                    </p:animScale>
                                   </p:childTnLst>
                                 </p:cTn>
                               </p:par>
                               <p:par>
                                 <p:cTn id="9" presetID="10" presetClass="entr" presetSubtype="0" fill="hold" grpId="0" nodeType="withEffect">
                                   <p:stCondLst>
-                                    <p:cond delay="160"/>
+                                    <p:cond delay="190"/>
                                   </p:stCondLst>
                                   <p:childTnLst>
                                     <p:set>
@@ -2544,7 +2518,7 @@
                                     </p:set>
                                     <p:animEffect transition="in" filter="fade">
                                       <p:cBhvr>
-                                        <p:cTn id="11" dur="450"/>
+                                        <p:cTn id="11" dur="650"/>
                                         <p:tgtEl>
                                           <p:spTgt spid="3"/>
                                         </p:tgtEl>
@@ -2552,7 +2526,7 @@
                                     </p:animEffect>
                                     <p:anim calcmode="lin" valueType="num">
                                       <p:cBhvr additive="base">
-                                        <p:cTn id="12" dur="450" fill="hold"/>
+                                        <p:cTn id="12" dur="650" fill="hold"/>
                                         <p:tgtEl>
                                           <p:spTgt spid="3"/>
                                         </p:tgtEl>
@@ -2563,7 +2537,7 @@
                                       <p:tavLst>
                                         <p:tav tm="0">
                                           <p:val>
-                                            <p:strVal val="#ppt_y+0.025"/>
+                                            <p:strVal val="#ppt_y+0.02"/>
                                           </p:val>
                                         </p:tav>
                                         <p:tav tm="100000">
@@ -2579,7 +2553,7 @@
                               <p:par>
                                 <p:cTn id="13" presetID="10" presetClass="entr" presetSubtype="0" fill="hold" grpId="0" nodeType="withEffect">
                                   <p:stCondLst>
-                                    <p:cond delay="320"/>
+                                    <p:cond delay="380"/>
                                   </p:stCondLst>
                                   <p:childTnLst>
                                     <p:set>
@@ -2602,7 +2576,7 @@
                                     </p:set>
                                     <p:animEffect transition="in" filter="fade">
                                       <p:cBhvr>
-                                        <p:cTn id="15" dur="450"/>
+                                        <p:cTn id="15" dur="650"/>
                                         <p:tgtEl>
                                           <p:spTgt spid="4"/>
                                         </p:tgtEl>
@@ -2610,7 +2584,7 @@
                                     </p:animEffect>
                                     <p:anim calcmode="lin" valueType="num">
                                       <p:cBhvr additive="base">
-                                        <p:cTn id="16" dur="450" fill="hold"/>
+                                        <p:cTn id="16" dur="650" fill="hold"/>
                                         <p:tgtEl>
                                           <p:spTgt spid="4"/>
                                         </p:tgtEl>
@@ -2621,7 +2595,7 @@
                                       <p:tavLst>
                                         <p:tav tm="0">
                                           <p:val>
-                                            <p:strVal val="#ppt_y+0.025"/>
+                                            <p:strVal val="#ppt_y+0.02"/>
                                           </p:val>
                                         </p:tav>
                                         <p:tav tm="100000">
@@ -2637,7 +2611,7 @@
                               <p:par>
                                 <p:cTn id="17" presetID="10" presetClass="entr" presetSubtype="0" fill="hold" grpId="0" nodeType="withEffect">
                                   <p:stCondLst>
-                                    <p:cond delay="480"/>
+                                    <p:cond delay="570"/>
                                   </p:stCondLst>
                                   <p:childTnLst>
                                     <p:set>
@@ -2660,7 +2634,7 @@
                                     </p:set>
                                     <p:animEffect transition="in" filter="fade">
                                       <p:cBhvr>
-                                        <p:cTn id="19" dur="450"/>
+                                        <p:cTn id="19" dur="650"/>
                                         <p:tgtEl>
                                           <p:spTgt spid="5"/>
                                         </p:tgtEl>
@@ -2668,7 +2642,7 @@
                                     </p:animEffect>
                                     <p:anim calcmode="lin" valueType="num">
                                       <p:cBhvr additive="base">
-                                        <p:cTn id="20" dur="450" fill="hold"/>
+                                        <p:cTn id="20" dur="650" fill="hold"/>
                                         <p:tgtEl>
                                           <p:spTgt spid="5"/>
                                         </p:tgtEl>
@@ -2679,7 +2653,7 @@
                                       <p:tavLst>
                                         <p:tav tm="0">
                                           <p:val>
-                                            <p:strVal val="#ppt_y+0.025"/>
+                                            <p:strVal val="#ppt_y+0.02"/>
                                           </p:val>
                                         </p:tav>
                                         <p:tav tm="100000">
@@ -2889,7 +2863,7 @@
   <p:clrMapOvr>
     <a:masterClrMapping/>
   </p:clrMapOvr>
-  <p:transition xmlns:p14="http://schemas.microsoft.com/office/powerpoint/2010/main" spd="slow" p14:dur="700">
+  <p:transition xmlns:p14="http://schemas.microsoft.com/office/powerpoint/2010/main" spd="slow" p14:dur="720">
     <p:fade/>
   </p:transition>
   <p:timing xmlns:p="http://schemas.openxmlformats.org/presentationml/2006/main">
@@ -2941,7 +2915,7 @@
                                     </p:set>
                                     <p:animEffect transition="in" filter="fade">
                                       <p:cBhvr>
-                                        <p:cTn id="7" dur="450"/>
+                                        <p:cTn id="7" dur="650"/>
                                         <p:tgtEl>
                                           <p:spTgt spid="2"/>
                                         </p:tgtEl>
@@ -2949,7 +2923,7 @@
                                     </p:animEffect>
                                     <p:anim calcmode="lin" valueType="num">
                                       <p:cBhvr additive="base">
-                                        <p:cTn id="8" dur="450" fill="hold"/>
+                                        <p:cTn id="8" dur="650" fill="hold"/>
                                         <p:tgtEl>
                                           <p:spTgt spid="2"/>
                                         </p:tgtEl>
@@ -2960,7 +2934,7 @@
                                       <p:tavLst>
                                         <p:tav tm="0">
                                           <p:val>
-                                            <p:strVal val="#ppt_y+0.025"/>
+                                            <p:strVal val="#ppt_y+0.02"/>
                                           </p:val>
                                         </p:tav>
                                         <p:tav tm="100000">
@@ -2976,7 +2950,7 @@
                               <p:par>
                                 <p:cTn id="9" presetID="10" presetClass="entr" presetSubtype="0" fill="hold" grpId="0" nodeType="withEffect">
                                   <p:stCondLst>
-                                    <p:cond delay="160"/>
+                                    <p:cond delay="190"/>
                                   </p:stCondLst>
                                   <p:childTnLst>
                                     <p:set>
@@ -2999,7 +2973,7 @@
                                     </p:set>
                                     <p:animEffect transition="in" filter="fade">
                                       <p:cBhvr>
-                                        <p:cTn id="11" dur="450"/>
+                                        <p:cTn id="11" dur="650"/>
                                         <p:tgtEl>
                                           <p:spTgt spid="3"/>
                                         </p:tgtEl>
@@ -3007,7 +2981,7 @@
                                     </p:animEffect>
                                     <p:anim calcmode="lin" valueType="num">
                                       <p:cBhvr additive="base">
-                                        <p:cTn id="12" dur="450" fill="hold"/>
+                                        <p:cTn id="12" dur="650" fill="hold"/>
                                         <p:tgtEl>
                                           <p:spTgt spid="3"/>
                                         </p:tgtEl>
@@ -3018,7 +2992,7 @@
                                       <p:tavLst>
                                         <p:tav tm="0">
                                           <p:val>
-                                            <p:strVal val="#ppt_y+0.025"/>
+                                            <p:strVal val="#ppt_y+0.02"/>
                                           </p:val>
                                         </p:tav>
                                         <p:tav tm="100000">
@@ -3034,7 +3008,7 @@
                               <p:par>
                                 <p:cTn id="13" presetID="10" presetClass="entr" presetSubtype="0" fill="hold" grpId="0" nodeType="withEffect">
                                   <p:stCondLst>
-                                    <p:cond delay="320"/>
+                                    <p:cond delay="380"/>
                                   </p:stCondLst>
                                   <p:childTnLst>
                                     <p:set>
@@ -3057,7 +3031,7 @@
                                     </p:set>
                                     <p:animEffect transition="in" filter="fade">
                                       <p:cBhvr>
-                                        <p:cTn id="15" dur="450"/>
+                                        <p:cTn id="15" dur="650"/>
                                         <p:tgtEl>
                                           <p:spTgt spid="4"/>
                                         </p:tgtEl>
@@ -3065,7 +3039,7 @@
                                     </p:animEffect>
                                     <p:anim calcmode="lin" valueType="num">
                                       <p:cBhvr additive="base">
-                                        <p:cTn id="16" dur="450" fill="hold"/>
+                                        <p:cTn id="16" dur="650" fill="hold"/>
                                         <p:tgtEl>
                                           <p:spTgt spid="4"/>
                                         </p:tgtEl>
@@ -3076,7 +3050,7 @@
                                       <p:tavLst>
                                         <p:tav tm="0">
                                           <p:val>
-                                            <p:strVal val="#ppt_y+0.025"/>
+                                            <p:strVal val="#ppt_y+0.02"/>
                                           </p:val>
                                         </p:tav>
                                         <p:tav tm="100000">
@@ -3196,7 +3170,7 @@
   <p:clrMapOvr>
     <a:masterClrMapping/>
   </p:clrMapOvr>
-  <p:transition xmlns:p14="http://schemas.microsoft.com/office/powerpoint/2010/main" spd="slow" p14:dur="700">
+  <p:transition xmlns:p14="http://schemas.microsoft.com/office/powerpoint/2010/main" spd="slow" p14:dur="720">
     <p:fade/>
   </p:transition>
   <p:timing xmlns:p="http://schemas.openxmlformats.org/presentationml/2006/main">
@@ -3248,7 +3222,7 @@
                                     </p:set>
                                     <p:animEffect transition="in" filter="fade">
                                       <p:cBhvr>
-                                        <p:cTn id="7" dur="450"/>
+                                        <p:cTn id="7" dur="650"/>
                                         <p:tgtEl>
                                           <p:spTgt spid="2"/>
                                         </p:tgtEl>
@@ -3256,7 +3230,7 @@
                                     </p:animEffect>
                                     <p:anim calcmode="lin" valueType="num">
                                       <p:cBhvr additive="base">
-                                        <p:cTn id="8" dur="450" fill="hold"/>
+                                        <p:cTn id="8" dur="650" fill="hold"/>
                                         <p:tgtEl>
                                           <p:spTgt spid="2"/>
                                         </p:tgtEl>
@@ -3267,7 +3241,7 @@
                                       <p:tavLst>
                                         <p:tav tm="0">
                                           <p:val>
-                                            <p:strVal val="#ppt_y+0.025"/>
+                                            <p:strVal val="#ppt_y+0.02"/>
                                           </p:val>
                                         </p:tav>
                                         <p:tav tm="100000">
@@ -3460,7 +3434,7 @@
   <p:clrMapOvr>
     <a:masterClrMapping/>
   </p:clrMapOvr>
-  <p:transition xmlns:p14="http://schemas.microsoft.com/office/powerpoint/2010/main" spd="slow" p14:dur="700">
+  <p:transition xmlns:p14="http://schemas.microsoft.com/office/powerpoint/2010/main" spd="slow" p14:dur="720">
     <p:fade/>
   </p:transition>
   <p:timing xmlns:p="http://schemas.openxmlformats.org/presentationml/2006/main">
@@ -3512,42 +3486,29 @@
                                     </p:set>
                                     <p:animEffect transition="in" filter="fade">
                                       <p:cBhvr>
-                                        <p:cTn id="7" dur="450"/>
+                                        <p:cTn id="7" dur="650"/>
                                         <p:tgtEl>
                                           <p:spTgt spid="2"/>
                                         </p:tgtEl>
                                       </p:cBhvr>
                                     </p:animEffect>
-                                    <p:anim calcmode="lin" valueType="num">
-                                      <p:cBhvr additive="base">
-                                        <p:cTn id="8" dur="450" fill="hold"/>
+                                    <p:animScale>
+                                      <p:cBhvr>
+                                        <p:cTn id="8" dur="650" fill="hold"/>
                                         <p:tgtEl>
                                           <p:spTgt spid="2"/>
                                         </p:tgtEl>
-                                        <p:attrNameLst>
-                                          <p:attrName>ppt_y</p:attrName>
-                                        </p:attrNameLst>
-                                      </p:cBhvr>
-                                      <p:tavLst>
-                                        <p:tav tm="0">
-                                          <p:val>
-                                            <p:strVal val="#ppt_y+0.025"/>
-                                          </p:val>
-                                        </p:tav>
-                                        <p:tav tm="100000">
-                                          <p:val>
-                                            <p:strVal val="#ppt_y"/>
-                                          </p:val>
-                                        </p:tav>
-                                      </p:tavLst>
-                                    </p:anim>
+                                      </p:cBhvr>
+                                      <p:from x="104000" y="104000"/>
+                                      <p:to x="100000" y="100000"/>
+                                    </p:animScale>
                                   </p:childTnLst>
                                 </p:cTn>
                               </p:par>
                               <p:par>
                                 <p:cTn id="9" presetID="10" presetClass="entr" presetSubtype="0" fill="hold" grpId="0" nodeType="withEffect">
                                   <p:stCondLst>
-                                    <p:cond delay="160"/>
+                                    <p:cond delay="190"/>
                                   </p:stCondLst>
                                   <p:childTnLst>
                                     <p:set>
@@ -3570,7 +3531,7 @@
                                     </p:set>
                                     <p:animEffect transition="in" filter="fade">
                                       <p:cBhvr>
-                                        <p:cTn id="11" dur="450"/>
+                                        <p:cTn id="11" dur="650"/>
                                         <p:tgtEl>
                                           <p:spTgt spid="3"/>
                                         </p:tgtEl>
@@ -3578,7 +3539,7 @@
                                     </p:animEffect>
                                     <p:anim calcmode="lin" valueType="num">
                                       <p:cBhvr additive="base">
-                                        <p:cTn id="12" dur="450" fill="hold"/>
+                                        <p:cTn id="12" dur="650" fill="hold"/>
                                         <p:tgtEl>
                                           <p:spTgt spid="3"/>
                                         </p:tgtEl>
@@ -3589,7 +3550,7 @@
                                       <p:tavLst>
                                         <p:tav tm="0">
                                           <p:val>
-                                            <p:strVal val="#ppt_y+0.025"/>
+                                            <p:strVal val="#ppt_y+0.02"/>
                                           </p:val>
                                         </p:tav>
                                         <p:tav tm="100000">
@@ -3605,7 +3566,7 @@
                               <p:par>
                                 <p:cTn id="13" presetID="10" presetClass="entr" presetSubtype="0" fill="hold" grpId="0" nodeType="withEffect">
                                   <p:stCondLst>
-                                    <p:cond delay="320"/>
+                                    <p:cond delay="380"/>
                                   </p:stCondLst>
                                   <p:childTnLst>
                                     <p:set>
@@ -3628,7 +3589,7 @@
                                     </p:set>
                                     <p:animEffect transition="in" filter="fade">
                                       <p:cBhvr>
-                                        <p:cTn id="15" dur="450"/>
+                                        <p:cTn id="15" dur="650"/>
                                         <p:tgtEl>
                                           <p:spTgt spid="4"/>
                                         </p:tgtEl>
@@ -3636,7 +3597,7 @@
                                     </p:animEffect>
                                     <p:anim calcmode="lin" valueType="num">
                                       <p:cBhvr additive="base">
-                                        <p:cTn id="16" dur="450" fill="hold"/>
+                                        <p:cTn id="16" dur="650" fill="hold"/>
                                         <p:tgtEl>
                                           <p:spTgt spid="4"/>
                                         </p:tgtEl>
@@ -3647,7 +3608,7 @@
                                       <p:tavLst>
                                         <p:tav tm="0">
                                           <p:val>
-                                            <p:strVal val="#ppt_y+0.025"/>
+                                            <p:strVal val="#ppt_y+0.02"/>
                                           </p:val>
                                         </p:tav>
                                         <p:tav tm="100000">
@@ -3803,7 +3764,7 @@
   <p:clrMapOvr>
     <a:masterClrMapping/>
   </p:clrMapOvr>
-  <p:transition xmlns:p14="http://schemas.microsoft.com/office/powerpoint/2010/main" spd="slow" p14:dur="700">
+  <p:transition xmlns:p14="http://schemas.microsoft.com/office/powerpoint/2010/main" spd="slow" p14:dur="720">
     <p:fade/>
   </p:transition>
   <p:timing xmlns:p="http://schemas.openxmlformats.org/presentationml/2006/main">
@@ -3855,7 +3816,7 @@
                                     </p:set>
                                     <p:animEffect transition="in" filter="fade">
                                       <p:cBhvr>
-                                        <p:cTn id="7" dur="450"/>
+                                        <p:cTn id="7" dur="650"/>
                                         <p:tgtEl>
                                           <p:spTgt spid="2"/>
                                         </p:tgtEl>
@@ -3863,7 +3824,7 @@
                                     </p:animEffect>
                                     <p:anim calcmode="lin" valueType="num">
                                       <p:cBhvr additive="base">
-                                        <p:cTn id="8" dur="450" fill="hold"/>
+                                        <p:cTn id="8" dur="650" fill="hold"/>
                                         <p:tgtEl>
                                           <p:spTgt spid="2"/>
                                         </p:tgtEl>
@@ -3874,7 +3835,7 @@
                                       <p:tavLst>
                                         <p:tav tm="0">
                                           <p:val>
-                                            <p:strVal val="#ppt_y+0.025"/>
+                                            <p:strVal val="#ppt_y+0.02"/>
                                           </p:val>
                                         </p:tav>
                                         <p:tav tm="100000">
@@ -3890,7 +3851,7 @@
                               <p:par>
                                 <p:cTn id="9" presetID="10" presetClass="entr" presetSubtype="0" fill="hold" grpId="0" nodeType="withEffect">
                                   <p:stCondLst>
-                                    <p:cond delay="160"/>
+                                    <p:cond delay="190"/>
                                   </p:stCondLst>
                                   <p:childTnLst>
                                     <p:set>
@@ -3913,7 +3874,7 @@
                                     </p:set>
                                     <p:animEffect transition="in" filter="fade">
                                       <p:cBhvr>
-                                        <p:cTn id="11" dur="450"/>
+                                        <p:cTn id="11" dur="650"/>
                                         <p:tgtEl>
                                           <p:spTgt spid="3"/>
                                         </p:tgtEl>
@@ -3921,7 +3882,7 @@
                                     </p:animEffect>
                                     <p:anim calcmode="lin" valueType="num">
                                       <p:cBhvr additive="base">
-                                        <p:cTn id="12" dur="450" fill="hold"/>
+                                        <p:cTn id="12" dur="650" fill="hold"/>
                                         <p:tgtEl>
                                           <p:spTgt spid="3"/>
                                         </p:tgtEl>
@@ -3932,7 +3893,7 @@
                                       <p:tavLst>
                                         <p:tav tm="0">
                                           <p:val>
-                                            <p:strVal val="#ppt_y+0.025"/>
+                                            <p:strVal val="#ppt_y+0.02"/>
                                           </p:val>
                                         </p:tav>
                                         <p:tav tm="100000">
@@ -4179,7 +4140,7 @@
   <p:clrMapOvr>
     <a:masterClrMapping/>
   </p:clrMapOvr>
-  <p:transition xmlns:p14="http://schemas.microsoft.com/office/powerpoint/2010/main" spd="slow" p14:dur="700">
+  <p:transition xmlns:p14="http://schemas.microsoft.com/office/powerpoint/2010/main" spd="slow" p14:dur="720">
     <p:fade/>
   </p:transition>
   <p:timing xmlns:p="http://schemas.openxmlformats.org/presentationml/2006/main">
@@ -4231,7 +4192,7 @@
                                     </p:set>
                                     <p:animEffect transition="in" filter="fade">
                                       <p:cBhvr>
-                                        <p:cTn id="7" dur="450"/>
+                                        <p:cTn id="7" dur="650"/>
                                         <p:tgtEl>
                                           <p:spTgt spid="2"/>
                                         </p:tgtEl>
@@ -4239,7 +4200,7 @@
                                     </p:animEffect>
                                     <p:anim calcmode="lin" valueType="num">
                                       <p:cBhvr additive="base">
-                                        <p:cTn id="8" dur="450" fill="hold"/>
+                                        <p:cTn id="8" dur="650" fill="hold"/>
                                         <p:tgtEl>
                                           <p:spTgt spid="2"/>
                                         </p:tgtEl>
@@ -4250,7 +4211,7 @@
                                       <p:tavLst>
                                         <p:tav tm="0">
                                           <p:val>
-                                            <p:strVal val="#ppt_y+0.025"/>
+                                            <p:strVal val="#ppt_y+0.02"/>
                                           </p:val>
                                         </p:tav>
                                         <p:tav tm="100000">
@@ -4266,7 +4227,7 @@
                               <p:par>
                                 <p:cTn id="9" presetID="10" presetClass="entr" presetSubtype="0" fill="hold" grpId="0" nodeType="withEffect">
                                   <p:stCondLst>
-                                    <p:cond delay="160"/>
+                                    <p:cond delay="190"/>
                                   </p:stCondLst>
                                   <p:childTnLst>
                                     <p:set>
@@ -4289,42 +4250,29 @@
                                     </p:set>
                                     <p:animEffect transition="in" filter="fade">
                                       <p:cBhvr>
-                                        <p:cTn id="11" dur="450"/>
+                                        <p:cTn id="11" dur="650"/>
                                         <p:tgtEl>
                                           <p:spTgt spid="3"/>
                                         </p:tgtEl>
                                       </p:cBhvr>
                                     </p:animEffect>
-                                    <p:anim calcmode="lin" valueType="num">
-                                      <p:cBhvr additive="base">
-                                        <p:cTn id="12" dur="450" fill="hold"/>
+                                    <p:animScale>
+                                      <p:cBhvr>
+                                        <p:cTn id="12" dur="650" fill="hold"/>
                                         <p:tgtEl>
                                           <p:spTgt spid="3"/>
                                         </p:tgtEl>
-                                        <p:attrNameLst>
-                                          <p:attrName>ppt_y</p:attrName>
-                                        </p:attrNameLst>
-                                      </p:cBhvr>
-                                      <p:tavLst>
-                                        <p:tav tm="0">
-                                          <p:val>
-                                            <p:strVal val="#ppt_y+0.025"/>
-                                          </p:val>
-                                        </p:tav>
-                                        <p:tav tm="100000">
-                                          <p:val>
-                                            <p:strVal val="#ppt_y"/>
-                                          </p:val>
-                                        </p:tav>
-                                      </p:tavLst>
-                                    </p:anim>
+                                      </p:cBhvr>
+                                      <p:from x="104000" y="104000"/>
+                                      <p:to x="100000" y="100000"/>
+                                    </p:animScale>
                                   </p:childTnLst>
                                 </p:cTn>
                               </p:par>
                               <p:par>
                                 <p:cTn id="13" presetID="10" presetClass="entr" presetSubtype="0" fill="hold" grpId="0" nodeType="withEffect">
                                   <p:stCondLst>
-                                    <p:cond delay="320"/>
+                                    <p:cond delay="380"/>
                                   </p:stCondLst>
                                   <p:childTnLst>
                                     <p:set>
@@ -4347,7 +4295,7 @@
                                     </p:set>
                                     <p:animEffect transition="in" filter="fade">
                                       <p:cBhvr>
-                                        <p:cTn id="15" dur="450"/>
+                                        <p:cTn id="15" dur="650"/>
                                         <p:tgtEl>
                                           <p:spTgt spid="4"/>
                                         </p:tgtEl>
@@ -4355,7 +4303,7 @@
                                     </p:animEffect>
                                     <p:anim calcmode="lin" valueType="num">
                                       <p:cBhvr additive="base">
-                                        <p:cTn id="16" dur="450" fill="hold"/>
+                                        <p:cTn id="16" dur="650" fill="hold"/>
                                         <p:tgtEl>
                                           <p:spTgt spid="4"/>
                                         </p:tgtEl>
@@ -4366,7 +4314,7 @@
                                       <p:tavLst>
                                         <p:tav tm="0">
                                           <p:val>
-                                            <p:strVal val="#ppt_y+0.025"/>
+                                            <p:strVal val="#ppt_y+0.02"/>
                                           </p:val>
                                         </p:tav>
                                         <p:tav tm="100000">
@@ -4382,7 +4330,7 @@
                               <p:par>
                                 <p:cTn id="17" presetID="10" presetClass="entr" presetSubtype="0" fill="hold" grpId="0" nodeType="withEffect">
                                   <p:stCondLst>
-                                    <p:cond delay="480"/>
+                                    <p:cond delay="570"/>
                                   </p:stCondLst>
                                   <p:childTnLst>
                                     <p:set>
@@ -4405,7 +4353,7 @@
                                     </p:set>
                                     <p:animEffect transition="in" filter="fade">
                                       <p:cBhvr>
-                                        <p:cTn id="19" dur="450"/>
+                                        <p:cTn id="19" dur="650"/>
                                         <p:tgtEl>
                                           <p:spTgt spid="5"/>
                                         </p:tgtEl>
@@ -4413,7 +4361,7 @@
                                     </p:animEffect>
                                     <p:anim calcmode="lin" valueType="num">
                                       <p:cBhvr additive="base">
-                                        <p:cTn id="20" dur="450" fill="hold"/>
+                                        <p:cTn id="20" dur="650" fill="hold"/>
                                         <p:tgtEl>
                                           <p:spTgt spid="5"/>
                                         </p:tgtEl>
@@ -4424,7 +4372,7 @@
                                       <p:tavLst>
                                         <p:tav tm="0">
                                           <p:val>
-                                            <p:strVal val="#ppt_y+0.025"/>
+                                            <p:strVal val="#ppt_y+0.02"/>
                                           </p:val>
                                         </p:tav>
                                         <p:tav tm="100000">
@@ -4785,7 +4733,7 @@
   <p:clrMapOvr>
     <a:masterClrMapping/>
   </p:clrMapOvr>
-  <p:transition xmlns:p14="http://schemas.microsoft.com/office/powerpoint/2010/main" spd="slow" p14:dur="700">
+  <p:transition xmlns:p14="http://schemas.microsoft.com/office/powerpoint/2010/main" spd="slow" p14:dur="720">
     <p:fade/>
   </p:transition>
   <p:timing xmlns:p="http://schemas.openxmlformats.org/presentationml/2006/main">
@@ -4837,7 +4785,7 @@
                                     </p:set>
                                     <p:animEffect transition="in" filter="fade">
                                       <p:cBhvr>
-                                        <p:cTn id="7" dur="450"/>
+                                        <p:cTn id="7" dur="650"/>
                                         <p:tgtEl>
                                           <p:spTgt spid="2"/>
                                         </p:tgtEl>
@@ -4845,7 +4793,7 @@
                                     </p:animEffect>
                                     <p:anim calcmode="lin" valueType="num">
                                       <p:cBhvr additive="base">
-                                        <p:cTn id="8" dur="450" fill="hold"/>
+                                        <p:cTn id="8" dur="650" fill="hold"/>
                                         <p:tgtEl>
                                           <p:spTgt spid="2"/>
                                         </p:tgtEl>
@@ -4856,7 +4804,7 @@
                                       <p:tavLst>
                                         <p:tav tm="0">
                                           <p:val>
-                                            <p:strVal val="#ppt_y+0.025"/>
+                                            <p:strVal val="#ppt_y+0.02"/>
                                           </p:val>
                                         </p:tav>
                                         <p:tav tm="100000">
@@ -4872,7 +4820,7 @@
                               <p:par>
                                 <p:cTn id="9" presetID="10" presetClass="entr" presetSubtype="0" fill="hold" grpId="0" nodeType="withEffect">
                                   <p:stCondLst>
-                                    <p:cond delay="160"/>
+                                    <p:cond delay="190"/>
                                   </p:stCondLst>
                                   <p:childTnLst>
                                     <p:set>
@@ -4895,7 +4843,7 @@
                                     </p:set>
                                     <p:animEffect transition="in" filter="fade">
                                       <p:cBhvr>
-                                        <p:cTn id="11" dur="450"/>
+                                        <p:cTn id="11" dur="650"/>
                                         <p:tgtEl>
                                           <p:spTgt spid="3"/>
                                         </p:tgtEl>
@@ -4903,7 +4851,7 @@
                                     </p:animEffect>
                                     <p:anim calcmode="lin" valueType="num">
                                       <p:cBhvr additive="base">
-                                        <p:cTn id="12" dur="450" fill="hold"/>
+                                        <p:cTn id="12" dur="650" fill="hold"/>
                                         <p:tgtEl>
                                           <p:spTgt spid="3"/>
                                         </p:tgtEl>
@@ -4914,7 +4862,7 @@
                                       <p:tavLst>
                                         <p:tav tm="0">
                                           <p:val>
-                                            <p:strVal val="#ppt_y+0.025"/>
+                                            <p:strVal val="#ppt_y+0.02"/>
                                           </p:val>
                                         </p:tav>
                                         <p:tav tm="100000">
@@ -4930,7 +4878,7 @@
                               <p:par>
                                 <p:cTn id="13" presetID="10" presetClass="entr" presetSubtype="0" fill="hold" grpId="0" nodeType="withEffect">
                                   <p:stCondLst>
-                                    <p:cond delay="320"/>
+                                    <p:cond delay="380"/>
                                   </p:stCondLst>
                                   <p:childTnLst>
                                     <p:set>
@@ -4953,7 +4901,7 @@
                                     </p:set>
                                     <p:animEffect transition="in" filter="fade">
                                       <p:cBhvr>
-                                        <p:cTn id="15" dur="450"/>
+                                        <p:cTn id="15" dur="650"/>
                                         <p:tgtEl>
                                           <p:spTgt spid="5"/>
                                         </p:tgtEl>
@@ -4961,7 +4909,7 @@
                                     </p:animEffect>
                                     <p:anim calcmode="lin" valueType="num">
                                       <p:cBhvr additive="base">
-                                        <p:cTn id="16" dur="450" fill="hold"/>
+                                        <p:cTn id="16" dur="650" fill="hold"/>
                                         <p:tgtEl>
                                           <p:spTgt spid="5"/>
                                         </p:tgtEl>
@@ -4972,7 +4920,7 @@
                                       <p:tavLst>
                                         <p:tav tm="0">
                                           <p:val>
-                                            <p:strVal val="#ppt_y+0.025"/>
+                                            <p:strVal val="#ppt_y+0.02"/>
                                           </p:val>
                                         </p:tav>
                                         <p:tav tm="100000">
@@ -4988,7 +4936,7 @@
                               <p:par>
                                 <p:cTn id="17" presetID="10" presetClass="entr" presetSubtype="0" fill="hold" grpId="0" nodeType="withEffect">
                                   <p:stCondLst>
-                                    <p:cond delay="480"/>
+                                    <p:cond delay="570"/>
                                   </p:stCondLst>
                                   <p:childTnLst>
                                     <p:set>
@@ -5011,7 +4959,7 @@
                                     </p:set>
                                     <p:animEffect transition="in" filter="fade">
                                       <p:cBhvr>
-                                        <p:cTn id="19" dur="450"/>
+                                        <p:cTn id="19" dur="650"/>
                                         <p:tgtEl>
                                           <p:spTgt spid="7"/>
                                         </p:tgtEl>
@@ -5019,7 +4967,7 @@
                                     </p:animEffect>
                                     <p:anim calcmode="lin" valueType="num">
                                       <p:cBhvr additive="base">
-                                        <p:cTn id="20" dur="450" fill="hold"/>
+                                        <p:cTn id="20" dur="650" fill="hold"/>
                                         <p:tgtEl>
                                           <p:spTgt spid="7"/>
                                         </p:tgtEl>
@@ -5030,7 +4978,7 @@
                                       <p:tavLst>
                                         <p:tav tm="0">
                                           <p:val>
-                                            <p:strVal val="#ppt_y+0.025"/>
+                                            <p:strVal val="#ppt_y+0.02"/>
                                           </p:val>
                                         </p:tav>
                                         <p:tav tm="100000">
@@ -5046,7 +4994,7 @@
                               <p:par>
                                 <p:cTn id="21" presetID="10" presetClass="entr" presetSubtype="0" fill="hold" grpId="0" nodeType="withEffect">
                                   <p:stCondLst>
-                                    <p:cond delay="640"/>
+                                    <p:cond delay="760"/>
                                   </p:stCondLst>
                                   <p:childTnLst>
                                     <p:set>
@@ -5069,7 +5017,7 @@
                                     </p:set>
                                     <p:animEffect transition="in" filter="fade">
                                       <p:cBhvr>
-                                        <p:cTn id="23" dur="450"/>
+                                        <p:cTn id="23" dur="650"/>
                                         <p:tgtEl>
                                           <p:spTgt spid="4"/>
                                         </p:tgtEl>
@@ -5077,7 +5025,7 @@
                                     </p:animEffect>
                                     <p:anim calcmode="lin" valueType="num">
                                       <p:cBhvr additive="base">
-                                        <p:cTn id="24" dur="450" fill="hold"/>
+                                        <p:cTn id="24" dur="650" fill="hold"/>
                                         <p:tgtEl>
                                           <p:spTgt spid="4"/>
                                         </p:tgtEl>
@@ -5088,7 +5036,7 @@
                                       <p:tavLst>
                                         <p:tav tm="0">
                                           <p:val>
-                                            <p:strVal val="#ppt_y+0.025"/>
+                                            <p:strVal val="#ppt_y+0.02"/>
                                           </p:val>
                                         </p:tav>
                                         <p:tav tm="100000">
@@ -5104,7 +5052,7 @@
                               <p:par>
                                 <p:cTn id="25" presetID="10" presetClass="entr" presetSubtype="0" fill="hold" grpId="0" nodeType="withEffect">
                                   <p:stCondLst>
-                                    <p:cond delay="800"/>
+                                    <p:cond delay="950"/>
                                   </p:stCondLst>
                                   <p:childTnLst>
                                     <p:set>
@@ -5127,7 +5075,7 @@
                                     </p:set>
                                     <p:animEffect transition="in" filter="fade">
                                       <p:cBhvr>
-                                        <p:cTn id="27" dur="450"/>
+                                        <p:cTn id="27" dur="650"/>
                                         <p:tgtEl>
                                           <p:spTgt spid="6"/>
                                         </p:tgtEl>
@@ -5135,7 +5083,7 @@
                                     </p:animEffect>
                                     <p:anim calcmode="lin" valueType="num">
                                       <p:cBhvr additive="base">
-                                        <p:cTn id="28" dur="450" fill="hold"/>
+                                        <p:cTn id="28" dur="650" fill="hold"/>
                                         <p:tgtEl>
                                           <p:spTgt spid="6"/>
                                         </p:tgtEl>
@@ -5146,7 +5094,7 @@
                                       <p:tavLst>
                                         <p:tav tm="0">
                                           <p:val>
-                                            <p:strVal val="#ppt_y+0.025"/>
+                                            <p:strVal val="#ppt_y+0.02"/>
                                           </p:val>
                                         </p:tav>
                                         <p:tav tm="100000">
@@ -5162,7 +5110,7 @@
                               <p:par>
                                 <p:cTn id="29" presetID="10" presetClass="entr" presetSubtype="0" fill="hold" grpId="0" nodeType="withEffect">
                                   <p:stCondLst>
-                                    <p:cond delay="960"/>
+                                    <p:cond delay="1140"/>
                                   </p:stCondLst>
                                   <p:childTnLst>
                                     <p:set>
@@ -5185,7 +5133,7 @@
                                     </p:set>
                                     <p:animEffect transition="in" filter="fade">
                                       <p:cBhvr>
-                                        <p:cTn id="31" dur="450"/>
+                                        <p:cTn id="31" dur="650"/>
                                         <p:tgtEl>
                                           <p:spTgt spid="8"/>
                                         </p:tgtEl>
@@ -5193,7 +5141,7 @@
                                     </p:animEffect>
                                     <p:anim calcmode="lin" valueType="num">
                                       <p:cBhvr additive="base">
-                                        <p:cTn id="32" dur="450" fill="hold"/>
+                                        <p:cTn id="32" dur="650" fill="hold"/>
                                         <p:tgtEl>
                                           <p:spTgt spid="8"/>
                                         </p:tgtEl>
@@ -5204,7 +5152,7 @@
                                       <p:tavLst>
                                         <p:tav tm="0">
                                           <p:val>
-                                            <p:strVal val="#ppt_y+0.025"/>
+                                            <p:strVal val="#ppt_y+0.02"/>
                                           </p:val>
                                         </p:tav>
                                         <p:tav tm="100000">
@@ -5484,7 +5432,7 @@
   <p:clrMapOvr>
     <a:masterClrMapping/>
   </p:clrMapOvr>
-  <p:transition xmlns:p14="http://schemas.microsoft.com/office/powerpoint/2010/main" spd="slow" p14:dur="700">
+  <p:transition xmlns:p14="http://schemas.microsoft.com/office/powerpoint/2010/main" spd="slow" p14:dur="720">
     <p:fade/>
   </p:transition>
   <p:timing xmlns:p="http://schemas.openxmlformats.org/presentationml/2006/main">
@@ -5536,7 +5484,7 @@
                                     </p:set>
                                     <p:animEffect transition="in" filter="fade">
                                       <p:cBhvr>
-                                        <p:cTn id="7" dur="450"/>
+                                        <p:cTn id="7" dur="650"/>
                                         <p:tgtEl>
                                           <p:spTgt spid="2"/>
                                         </p:tgtEl>
@@ -5544,7 +5492,7 @@
                                     </p:animEffect>
                                     <p:anim calcmode="lin" valueType="num">
                                       <p:cBhvr additive="base">
-                                        <p:cTn id="8" dur="450" fill="hold"/>
+                                        <p:cTn id="8" dur="650" fill="hold"/>
                                         <p:tgtEl>
                                           <p:spTgt spid="2"/>
                                         </p:tgtEl>
@@ -5555,7 +5503,7 @@
                                       <p:tavLst>
                                         <p:tav tm="0">
                                           <p:val>
-                                            <p:strVal val="#ppt_y+0.025"/>
+                                            <p:strVal val="#ppt_y+0.02"/>
                                           </p:val>
                                         </p:tav>
                                         <p:tav tm="100000">
@@ -5571,7 +5519,7 @@
                               <p:par>
                                 <p:cTn id="9" presetID="10" presetClass="entr" presetSubtype="0" fill="hold" grpId="0" nodeType="withEffect">
                                   <p:stCondLst>
-                                    <p:cond delay="160"/>
+                                    <p:cond delay="190"/>
                                   </p:stCondLst>
                                   <p:childTnLst>
                                     <p:set>
@@ -5594,42 +5542,29 @@
                                     </p:set>
                                     <p:animEffect transition="in" filter="fade">
                                       <p:cBhvr>
-                                        <p:cTn id="11" dur="450"/>
+                                        <p:cTn id="11" dur="650"/>
                                         <p:tgtEl>
                                           <p:spTgt spid="3"/>
                                         </p:tgtEl>
                                       </p:cBhvr>
                                     </p:animEffect>
-                                    <p:anim calcmode="lin" valueType="num">
-                                      <p:cBhvr additive="base">
-                                        <p:cTn id="12" dur="450" fill="hold"/>
+                                    <p:animScale>
+                                      <p:cBhvr>
+                                        <p:cTn id="12" dur="650" fill="hold"/>
                                         <p:tgtEl>
                                           <p:spTgt spid="3"/>
                                         </p:tgtEl>
-                                        <p:attrNameLst>
-                                          <p:attrName>ppt_y</p:attrName>
-                                        </p:attrNameLst>
-                                      </p:cBhvr>
-                                      <p:tavLst>
-                                        <p:tav tm="0">
-                                          <p:val>
-                                            <p:strVal val="#ppt_y+0.025"/>
-                                          </p:val>
-                                        </p:tav>
-                                        <p:tav tm="100000">
-                                          <p:val>
-                                            <p:strVal val="#ppt_y"/>
-                                          </p:val>
-                                        </p:tav>
-                                      </p:tavLst>
-                                    </p:anim>
+                                      </p:cBhvr>
+                                      <p:from x="104000" y="104000"/>
+                                      <p:to x="100000" y="100000"/>
+                                    </p:animScale>
                                   </p:childTnLst>
                                 </p:cTn>
                               </p:par>
                               <p:par>
                                 <p:cTn id="13" presetID="10" presetClass="entr" presetSubtype="0" fill="hold" grpId="0" nodeType="withEffect">
                                   <p:stCondLst>
-                                    <p:cond delay="320"/>
+                                    <p:cond delay="380"/>
                                   </p:stCondLst>
                                   <p:childTnLst>
                                     <p:set>
@@ -5652,7 +5587,7 @@
                                     </p:set>
                                     <p:animEffect transition="in" filter="fade">
                                       <p:cBhvr>
-                                        <p:cTn id="15" dur="450"/>
+                                        <p:cTn id="15" dur="650"/>
                                         <p:tgtEl>
                                           <p:spTgt spid="4"/>
                                         </p:tgtEl>
@@ -5660,7 +5595,7 @@
                                     </p:animEffect>
                                     <p:anim calcmode="lin" valueType="num">
                                       <p:cBhvr additive="base">
-                                        <p:cTn id="16" dur="450" fill="hold"/>
+                                        <p:cTn id="16" dur="650" fill="hold"/>
                                         <p:tgtEl>
                                           <p:spTgt spid="4"/>
                                         </p:tgtEl>
@@ -5671,7 +5606,7 @@
                                       <p:tavLst>
                                         <p:tav tm="0">
                                           <p:val>
-                                            <p:strVal val="#ppt_y+0.025"/>
+                                            <p:strVal val="#ppt_y+0.02"/>
                                           </p:val>
                                         </p:tav>
                                         <p:tav tm="100000">
@@ -5687,7 +5622,7 @@
                               <p:par>
                                 <p:cTn id="17" presetID="10" presetClass="entr" presetSubtype="0" fill="hold" grpId="0" nodeType="withEffect">
                                   <p:stCondLst>
-                                    <p:cond delay="480"/>
+                                    <p:cond delay="570"/>
                                   </p:stCondLst>
                                   <p:childTnLst>
                                     <p:set>
@@ -5710,7 +5645,7 @@
                                     </p:set>
                                     <p:animEffect transition="in" filter="fade">
                                       <p:cBhvr>
-                                        <p:cTn id="19" dur="450"/>
+                                        <p:cTn id="19" dur="650"/>
                                         <p:tgtEl>
                                           <p:spTgt spid="5"/>
                                         </p:tgtEl>
@@ -5718,7 +5653,7 @@
                                     </p:animEffect>
                                     <p:anim calcmode="lin" valueType="num">
                                       <p:cBhvr additive="base">
-                                        <p:cTn id="20" dur="450" fill="hold"/>
+                                        <p:cTn id="20" dur="650" fill="hold"/>
                                         <p:tgtEl>
                                           <p:spTgt spid="5"/>
                                         </p:tgtEl>
@@ -5729,7 +5664,7 @@
                                       <p:tavLst>
                                         <p:tav tm="0">
                                           <p:val>
-                                            <p:strVal val="#ppt_y+0.025"/>
+                                            <p:strVal val="#ppt_y+0.02"/>
                                           </p:val>
                                         </p:tav>
                                         <p:tav tm="100000">
@@ -6125,7 +6060,7 @@
       </p:sp>
       <p:sp>
         <p:nvSpPr>
-          <p:cNvPr id="8" name="Shape 6"/>
+          <p:cNvPr id="8" name="anim:wipe"/>
           <p:cNvSpPr/>
           <p:nvPr/>
         </p:nvSpPr>
@@ -6148,7 +6083,7 @@
   <p:clrMapOvr>
     <a:masterClrMapping/>
   </p:clrMapOvr>
-  <p:transition xmlns:p14="http://schemas.microsoft.com/office/powerpoint/2010/main" spd="slow" p14:dur="700">
+  <p:transition xmlns:p14="http://schemas.microsoft.com/office/powerpoint/2010/main" spd="slow" p14:dur="720">
     <p:fade/>
   </p:transition>
   <p:timing xmlns:p="http://schemas.openxmlformats.org/presentationml/2006/main">
@@ -6200,7 +6135,7 @@
                                     </p:set>
                                     <p:animEffect transition="in" filter="fade">
                                       <p:cBhvr>
-                                        <p:cTn id="7" dur="450"/>
+                                        <p:cTn id="7" dur="650"/>
                                         <p:tgtEl>
                                           <p:spTgt spid="2"/>
                                         </p:tgtEl>
@@ -6208,7 +6143,7 @@
                                     </p:animEffect>
                                     <p:anim calcmode="lin" valueType="num">
                                       <p:cBhvr additive="base">
-                                        <p:cTn id="8" dur="450" fill="hold"/>
+                                        <p:cTn id="8" dur="650" fill="hold"/>
                                         <p:tgtEl>
                                           <p:spTgt spid="2"/>
                                         </p:tgtEl>
@@ -6219,7 +6154,7 @@
                                       <p:tavLst>
                                         <p:tav tm="0">
                                           <p:val>
-                                            <p:strVal val="#ppt_y+0.025"/>
+                                            <p:strVal val="#ppt_y+0.02"/>
                                           </p:val>
                                         </p:tav>
                                         <p:tav tm="100000">
@@ -6235,7 +6170,7 @@
                               <p:par>
                                 <p:cTn id="9" presetID="10" presetClass="entr" presetSubtype="0" fill="hold" grpId="0" nodeType="withEffect">
                                   <p:stCondLst>
-                                    <p:cond delay="160"/>
+                                    <p:cond delay="190"/>
                                   </p:stCondLst>
                                   <p:childTnLst>
                                     <p:set>
@@ -6258,7 +6193,7 @@
                                     </p:set>
                                     <p:animEffect transition="in" filter="fade">
                                       <p:cBhvr>
-                                        <p:cTn id="11" dur="450"/>
+                                        <p:cTn id="11" dur="650"/>
                                         <p:tgtEl>
                                           <p:spTgt spid="3"/>
                                         </p:tgtEl>
@@ -6266,7 +6201,7 @@
                                     </p:animEffect>
                                     <p:anim calcmode="lin" valueType="num">
                                       <p:cBhvr additive="base">
-                                        <p:cTn id="12" dur="450" fill="hold"/>
+                                        <p:cTn id="12" dur="650" fill="hold"/>
                                         <p:tgtEl>
                                           <p:spTgt spid="3"/>
                                         </p:tgtEl>
@@ -6277,7 +6212,7 @@
                                       <p:tavLst>
                                         <p:tav tm="0">
                                           <p:val>
-                                            <p:strVal val="#ppt_y+0.025"/>
+                                            <p:strVal val="#ppt_y+0.02"/>
                                           </p:val>
                                         </p:tav>
                                         <p:tav tm="100000">
@@ -6293,7 +6228,7 @@
                               <p:par>
                                 <p:cTn id="13" presetID="10" presetClass="entr" presetSubtype="0" fill="hold" grpId="0" nodeType="withEffect">
                                   <p:stCondLst>
-                                    <p:cond delay="320"/>
+                                    <p:cond delay="380"/>
                                   </p:stCondLst>
                                   <p:childTnLst>
                                     <p:set>
@@ -6314,19 +6249,54 @@
                                         <p:strVal val="visible"/>
                                       </p:to>
                                     </p:set>
+                                    <p:animEffect transition="in" filter="wipe(left)">
+                                      <p:cBhvr>
+                                        <p:cTn id="15" dur="650"/>
+                                        <p:tgtEl>
+                                          <p:spTgt spid="8"/>
+                                        </p:tgtEl>
+                                      </p:cBhvr>
+                                    </p:animEffect>
+                                  </p:childTnLst>
+                                </p:cTn>
+                              </p:par>
+                              <p:par>
+                                <p:cTn id="16" presetID="10" presetClass="entr" presetSubtype="0" fill="hold" grpId="0" nodeType="withEffect">
+                                  <p:stCondLst>
+                                    <p:cond delay="570"/>
+                                  </p:stCondLst>
+                                  <p:childTnLst>
+                                    <p:set>
+                                      <p:cBhvr>
+                                        <p:cTn id="17" dur="1" fill="hold">
+                                          <p:stCondLst>
+                                            <p:cond delay="0"/>
+                                          </p:stCondLst>
+                                        </p:cTn>
+                                        <p:tgtEl>
+                                          <p:spTgt spid="4"/>
+                                        </p:tgtEl>
+                                        <p:attrNameLst>
+                                          <p:attrName>style.visibility</p:attrName>
+                                        </p:attrNameLst>
+                                      </p:cBhvr>
+                                      <p:to>
+                                        <p:strVal val="visible"/>
+                                      </p:to>
+                                    </p:set>
                                     <p:animEffect transition="in" filter="fade">
                                       <p:cBhvr>
-                                        <p:cTn id="15" dur="450"/>
-                                        <p:tgtEl>
-                                          <p:spTgt spid="8"/>
+                                        <p:cTn id="18" dur="650"/>
+                                        <p:tgtEl>
+                                          <p:spTgt spid="4"/>
                                         </p:tgtEl>
                                       </p:cBhvr>
                                     </p:animEffect>
                                     <p:anim calcmode="lin" valueType="num">
                                       <p:cBhvr additive="base">
-                                        <p:cTn id="16" dur="450" fill="hold"/>
-                                        <p:tgtEl>
-                                          <p:spTgt spid="8"/>
+                                        <p:cTn id="19" dur="650" fill="hold"/>
+                                        <p:tgtEl>
+                                          <p:spTgt spid="4"/>
                                         </p:tgtEl>
                                         <p:attrNameLst>
                                           <p:attrName>ppt_y</p:attrName>
@@ -6335,7 +6305,7 @@
                                       <p:tavLst>
                                         <p:tav tm="0">
                                           <p:val>
-                                            <p:strVal val="#ppt_y+0.025"/>
+                                            <p:strVal val="#ppt_y+0.02"/>
                                           </p:val>
                                         </p:tav>
                                         <p:tav tm="100000">
@@ -6349,20 +6319,20 @@
                                 </p:cTn>
                               </p:par>
                               <p:par>
-                                <p:cTn id="17" presetID="10" presetClass="entr" presetSubtype="0" fill="hold" grpId="0" nodeType="withEffect">
+                                <p:cTn id="20" presetID="10" presetClass="entr" presetSubtype="0" fill="hold" grpId="0" nodeType="withEffect">
                                   <p:stCondLst>
-                                    <p:cond delay="480"/>
+                                    <p:cond delay="760"/>
                                   </p:stCondLst>
                                   <p:childTnLst>
                                     <p:set>
                                       <p:cBhvr>
-                                        <p:cTn id="18" dur="1" fill="hold">
+                                        <p:cTn id="21" dur="1" fill="hold">
                                           <p:stCondLst>
                                             <p:cond delay="0"/>
                                           </p:stCondLst>
                                         </p:cTn>
                                         <p:tgtEl>
-                                          <p:spTgt spid="4"/>
+                                          <p:spTgt spid="5"/>
                                         </p:tgtEl>
                                         <p:attrNameLst>
                                           <p:attrName>style.visibility</p:attrName>
@@ -6374,17 +6344,17 @@
                                     </p:set>
                                     <p:animEffect transition="in" filter="fade">
                                       <p:cBhvr>
-                                        <p:cTn id="19" dur="450"/>
-                                        <p:tgtEl>
-                                          <p:spTgt spid="4"/>
+                                        <p:cTn id="22" dur="650"/>
+                                        <p:tgtEl>
+                                          <p:spTgt spid="5"/>
                                         </p:tgtEl>
                                       </p:cBhvr>
                                     </p:animEffect>
                                     <p:anim calcmode="lin" valueType="num">
                                       <p:cBhvr additive="base">
-                                        <p:cTn id="20" dur="450" fill="hold"/>
-                                        <p:tgtEl>
-                                          <p:spTgt spid="4"/>
+                                        <p:cTn id="23" dur="650" fill="hold"/>
+                                        <p:tgtEl>
+                                          <p:spTgt spid="5"/>
                                         </p:tgtEl>
                                         <p:attrNameLst>
                                           <p:attrName>ppt_y</p:attrName>
@@ -6393,7 +6363,7 @@
                                       <p:tavLst>
                                         <p:tav tm="0">
                                           <p:val>
-                                            <p:strVal val="#ppt_y+0.025"/>
+                                            <p:strVal val="#ppt_y+0.02"/>
                                           </p:val>
                                         </p:tav>
                                         <p:tav tm="100000">
@@ -6407,20 +6377,20 @@
                                 </p:cTn>
                               </p:par>
                               <p:par>
-                                <p:cTn id="21" presetID="10" presetClass="entr" presetSubtype="0" fill="hold" grpId="0" nodeType="withEffect">
+                                <p:cTn id="24" presetID="10" presetClass="entr" presetSubtype="0" fill="hold" grpId="0" nodeType="withEffect">
                                   <p:stCondLst>
-                                    <p:cond delay="640"/>
+                                    <p:cond delay="950"/>
                                   </p:stCondLst>
                                   <p:childTnLst>
                                     <p:set>
                                       <p:cBhvr>
-                                        <p:cTn id="22" dur="1" fill="hold">
+                                        <p:cTn id="25" dur="1" fill="hold">
                                           <p:stCondLst>
                                             <p:cond delay="0"/>
                                           </p:stCondLst>
                                         </p:cTn>
                                         <p:tgtEl>
-                                          <p:spTgt spid="5"/>
+                                          <p:spTgt spid="6"/>
                                         </p:tgtEl>
                                         <p:attrNameLst>
                                           <p:attrName>style.visibility</p:attrName>
@@ -6432,17 +6402,17 @@
                                     </p:set>
                                     <p:animEffect transition="in" filter="fade">
                                       <p:cBhvr>
-                                        <p:cTn id="23" dur="450"/>
-                                        <p:tgtEl>
-                                          <p:spTgt spid="5"/>
+                                        <p:cTn id="26" dur="650"/>
+                                        <p:tgtEl>
+                                          <p:spTgt spid="6"/>
                                         </p:tgtEl>
                                       </p:cBhvr>
                                     </p:animEffect>
                                     <p:anim calcmode="lin" valueType="num">
                                       <p:cBhvr additive="base">
-                                        <p:cTn id="24" dur="450" fill="hold"/>
-                                        <p:tgtEl>
-                                          <p:spTgt spid="5"/>
+                                        <p:cTn id="27" dur="650" fill="hold"/>
+                                        <p:tgtEl>
+                                          <p:spTgt spid="6"/>
                                         </p:tgtEl>
                                         <p:attrNameLst>
                                           <p:attrName>ppt_y</p:attrName>
@@ -6451,7 +6421,7 @@
                                       <p:tavLst>
                                         <p:tav tm="0">
                                           <p:val>
-                                            <p:strVal val="#ppt_y+0.025"/>
+                                            <p:strVal val="#ppt_y+0.02"/>
                                           </p:val>
                                         </p:tav>
                                         <p:tav tm="100000">
@@ -6465,20 +6435,20 @@
                                 </p:cTn>
                               </p:par>
                               <p:par>
-                                <p:cTn id="25" presetID="10" presetClass="entr" presetSubtype="0" fill="hold" grpId="0" nodeType="withEffect">
+                                <p:cTn id="28" presetID="10" presetClass="entr" presetSubtype="0" fill="hold" grpId="0" nodeType="withEffect">
                                   <p:stCondLst>
-                                    <p:cond delay="800"/>
+                                    <p:cond delay="1140"/>
                                   </p:stCondLst>
                                   <p:childTnLst>
                                     <p:set>
                                       <p:cBhvr>
-                                        <p:cTn id="26" dur="1" fill="hold">
+                                        <p:cTn id="29" dur="1" fill="hold">
                                           <p:stCondLst>
                                             <p:cond delay="0"/>
                                           </p:stCondLst>
                                         </p:cTn>
                                         <p:tgtEl>
-                                          <p:spTgt spid="6"/>
+                                          <p:spTgt spid="7"/>
                                         </p:tgtEl>
                                         <p:attrNameLst>
                                           <p:attrName>style.visibility</p:attrName>
@@ -6490,17 +6460,17 @@
                                     </p:set>
                                     <p:animEffect transition="in" filter="fade">
                                       <p:cBhvr>
-                                        <p:cTn id="27" dur="450"/>
-                                        <p:tgtEl>
-                                          <p:spTgt spid="6"/>
+                                        <p:cTn id="30" dur="650"/>
+                                        <p:tgtEl>
+                                          <p:spTgt spid="7"/>
                                         </p:tgtEl>
                                       </p:cBhvr>
                                     </p:animEffect>
                                     <p:anim calcmode="lin" valueType="num">
                                       <p:cBhvr additive="base">
-                                        <p:cTn id="28" dur="450" fill="hold"/>
-                                        <p:tgtEl>
-                                          <p:spTgt spid="6"/>
+                                        <p:cTn id="31" dur="650" fill="hold"/>
+                                        <p:tgtEl>
+                                          <p:spTgt spid="7"/>
                                         </p:tgtEl>
                                         <p:attrNameLst>
                                           <p:attrName>ppt_y</p:attrName>
@@ -6509,65 +6479,7 @@
                                       <p:tavLst>
                                         <p:tav tm="0">
                                           <p:val>
-                                            <p:strVal val="#ppt_y+0.025"/>
-                                          </p:val>
-                                        </p:tav>
-                                        <p:tav tm="100000">
-                                          <p:val>
-                                            <p:strVal val="#ppt_y"/>
-                                          </p:val>
-                                        </p:tav>
-                                      </p:tavLst>
-                                    </p:anim>
-                                  </p:childTnLst>
-                                </p:cTn>
-                              </p:par>
-                              <p:par>
-                                <p:cTn id="29" presetID="10" presetClass="entr" presetSubtype="0" fill="hold" grpId="0" nodeType="withEffect">
-                                  <p:stCondLst>
-                                    <p:cond delay="960"/>
-                                  </p:stCondLst>
-                                  <p:childTnLst>
-                                    <p:set>
-                                      <p:cBhvr>
-                                        <p:cTn id="30" dur="1" fill="hold">
-                                          <p:stCondLst>
-                                            <p:cond delay="0"/>
-                                          </p:stCondLst>
-                                        </p:cTn>
-                                        <p:tgtEl>
-                                          <p:spTgt spid="7"/>
-                                        </p:tgtEl>
-                                        <p:attrNameLst>
-                                          <p:attrName>style.visibility</p:attrName>
-                                        </p:attrNameLst>
-                                      </p:cBhvr>
-                                      <p:to>
-                                        <p:strVal val="visible"/>
-                                      </p:to>
-                                    </p:set>
-                                    <p:animEffect transition="in" filter="fade">
-                                      <p:cBhvr>
-                                        <p:cTn id="31" dur="450"/>
-                                        <p:tgtEl>
-                                          <p:spTgt spid="7"/>
-                                        </p:tgtEl>
-                                      </p:cBhvr>
-                                    </p:animEffect>
-                                    <p:anim calcmode="lin" valueType="num">
-                                      <p:cBhvr additive="base">
-                                        <p:cTn id="32" dur="450" fill="hold"/>
-                                        <p:tgtEl>
-                                          <p:spTgt spid="7"/>
-                                        </p:tgtEl>
-                                        <p:attrNameLst>
-                                          <p:attrName>ppt_y</p:attrName>
-                                        </p:attrNameLst>
-                                      </p:cBhvr>
-                                      <p:tavLst>
-                                        <p:tav tm="0">
-                                          <p:val>
-                                            <p:strVal val="#ppt_y+0.025"/>
+                                            <p:strVal val="#ppt_y+0.02"/>
                                           </p:val>
                                         </p:tav>
                                         <p:tav tm="100000">
@@ -7087,7 +6999,7 @@
   <p:clrMapOvr>
     <a:masterClrMapping/>
   </p:clrMapOvr>
-  <p:transition xmlns:p14="http://schemas.microsoft.com/office/powerpoint/2010/main" spd="slow" p14:dur="700">
+  <p:transition xmlns:p14="http://schemas.microsoft.com/office/powerpoint/2010/main" spd="slow" p14:dur="720">
     <p:fade/>
   </p:transition>
   <p:timing xmlns:p="http://schemas.openxmlformats.org/presentationml/2006/main">
@@ -7139,7 +7051,7 @@
                                     </p:set>
                                     <p:animEffect transition="in" filter="fade">
                                       <p:cBhvr>
-                                        <p:cTn id="7" dur="450"/>
+                                        <p:cTn id="7" dur="650"/>
                                         <p:tgtEl>
                                           <p:spTgt spid="2"/>
                                         </p:tgtEl>
@@ -7147,7 +7059,7 @@
                                     </p:animEffect>
                                     <p:anim calcmode="lin" valueType="num">
                                       <p:cBhvr additive="base">
-                                        <p:cTn id="8" dur="450" fill="hold"/>
+                                        <p:cTn id="8" dur="650" fill="hold"/>
                                         <p:tgtEl>
                                           <p:spTgt spid="2"/>
                                         </p:tgtEl>
@@ -7158,7 +7070,7 @@
                                       <p:tavLst>
                                         <p:tav tm="0">
                                           <p:val>
-                                            <p:strVal val="#ppt_y+0.025"/>
+                                            <p:strVal val="#ppt_y+0.02"/>
                                           </p:val>
                                         </p:tav>
                                         <p:tav tm="100000">
@@ -7174,7 +7086,7 @@
                               <p:par>
                                 <p:cTn id="9" presetID="10" presetClass="entr" presetSubtype="0" fill="hold" grpId="0" nodeType="withEffect">
                                   <p:stCondLst>
-                                    <p:cond delay="91"/>
+                                    <p:cond delay="100"/>
                                   </p:stCondLst>
                                   <p:childTnLst>
                                     <p:set>
@@ -7197,42 +7109,29 @@
                                     </p:set>
                                     <p:animEffect transition="in" filter="fade">
                                       <p:cBhvr>
-                                        <p:cTn id="11" dur="450"/>
+                                        <p:cTn id="11" dur="650"/>
                                         <p:tgtEl>
                                           <p:spTgt spid="3"/>
                                         </p:tgtEl>
                                       </p:cBhvr>
                                     </p:animEffect>
-                                    <p:anim calcmode="lin" valueType="num">
-                                      <p:cBhvr additive="base">
-                                        <p:cTn id="12" dur="450" fill="hold"/>
+                                    <p:animScale>
+                                      <p:cBhvr>
+                                        <p:cTn id="12" dur="650" fill="hold"/>
                                         <p:tgtEl>
                                           <p:spTgt spid="3"/>
                                         </p:tgtEl>
-                                        <p:attrNameLst>
-                                          <p:attrName>ppt_y</p:attrName>
-                                        </p:attrNameLst>
-                                      </p:cBhvr>
-                                      <p:tavLst>
-                                        <p:tav tm="0">
-                                          <p:val>
-                                            <p:strVal val="#ppt_y+0.025"/>
-                                          </p:val>
-                                        </p:tav>
-                                        <p:tav tm="100000">
-                                          <p:val>
-                                            <p:strVal val="#ppt_y"/>
-                                          </p:val>
-                                        </p:tav>
-                                      </p:tavLst>
-                                    </p:anim>
+                                      </p:cBhvr>
+                                      <p:from x="94000" y="94000"/>
+                                      <p:to x="100000" y="100000"/>
+                                    </p:animScale>
                                   </p:childTnLst>
                                 </p:cTn>
                               </p:par>
                               <p:par>
                                 <p:cTn id="13" presetID="10" presetClass="entr" presetSubtype="0" fill="hold" grpId="0" nodeType="withEffect">
                                   <p:stCondLst>
-                                    <p:cond delay="182"/>
+                                    <p:cond delay="200"/>
                                   </p:stCondLst>
                                   <p:childTnLst>
                                     <p:set>
@@ -7255,42 +7154,29 @@
                                     </p:set>
                                     <p:animEffect transition="in" filter="fade">
                                       <p:cBhvr>
-                                        <p:cTn id="15" dur="450"/>
+                                        <p:cTn id="15" dur="650"/>
                                         <p:tgtEl>
                                           <p:spTgt spid="6"/>
                                         </p:tgtEl>
                                       </p:cBhvr>
                                     </p:animEffect>
-                                    <p:anim calcmode="lin" valueType="num">
-                                      <p:cBhvr additive="base">
-                                        <p:cTn id="16" dur="450" fill="hold"/>
+                                    <p:animScale>
+                                      <p:cBhvr>
+                                        <p:cTn id="16" dur="650" fill="hold"/>
                                         <p:tgtEl>
                                           <p:spTgt spid="6"/>
                                         </p:tgtEl>
-                                        <p:attrNameLst>
-                                          <p:attrName>ppt_y</p:attrName>
-                                        </p:attrNameLst>
-                                      </p:cBhvr>
-                                      <p:tavLst>
-                                        <p:tav tm="0">
-                                          <p:val>
-                                            <p:strVal val="#ppt_y+0.025"/>
-                                          </p:val>
-                                        </p:tav>
-                                        <p:tav tm="100000">
-                                          <p:val>
-                                            <p:strVal val="#ppt_y"/>
-                                          </p:val>
-                                        </p:tav>
-                                      </p:tavLst>
-                                    </p:anim>
+                                      </p:cBhvr>
+                                      <p:from x="94000" y="94000"/>
+                                      <p:to x="100000" y="100000"/>
+                                    </p:animScale>
                                   </p:childTnLst>
                                 </p:cTn>
                               </p:par>
                               <p:par>
                                 <p:cTn id="17" presetID="10" presetClass="entr" presetSubtype="0" fill="hold" grpId="0" nodeType="withEffect">
                                   <p:stCondLst>
-                                    <p:cond delay="273"/>
+                                    <p:cond delay="300"/>
                                   </p:stCondLst>
                                   <p:childTnLst>
                                     <p:set>
@@ -7313,42 +7199,29 @@
                                     </p:set>
                                     <p:animEffect transition="in" filter="fade">
                                       <p:cBhvr>
-                                        <p:cTn id="19" dur="450"/>
+                                        <p:cTn id="19" dur="650"/>
                                         <p:tgtEl>
                                           <p:spTgt spid="9"/>
                                         </p:tgtEl>
                                       </p:cBhvr>
                                     </p:animEffect>
-                                    <p:anim calcmode="lin" valueType="num">
-                                      <p:cBhvr additive="base">
-                                        <p:cTn id="20" dur="450" fill="hold"/>
+                                    <p:animScale>
+                                      <p:cBhvr>
+                                        <p:cTn id="20" dur="650" fill="hold"/>
                                         <p:tgtEl>
                                           <p:spTgt spid="9"/>
                                         </p:tgtEl>
-                                        <p:attrNameLst>
-                                          <p:attrName>ppt_y</p:attrName>
-                                        </p:attrNameLst>
-                                      </p:cBhvr>
-                                      <p:tavLst>
-                                        <p:tav tm="0">
-                                          <p:val>
-                                            <p:strVal val="#ppt_y+0.025"/>
-                                          </p:val>
-                                        </p:tav>
-                                        <p:tav tm="100000">
-                                          <p:val>
-                                            <p:strVal val="#ppt_y"/>
-                                          </p:val>
-                                        </p:tav>
-                                      </p:tavLst>
-                                    </p:anim>
+                                      </p:cBhvr>
+                                      <p:from x="94000" y="94000"/>
+                                      <p:to x="100000" y="100000"/>
+                                    </p:animScale>
                                   </p:childTnLst>
                                 </p:cTn>
                               </p:par>
                               <p:par>
                                 <p:cTn id="21" presetID="10" presetClass="entr" presetSubtype="0" fill="hold" grpId="0" nodeType="withEffect">
                                   <p:stCondLst>
-                                    <p:cond delay="364"/>
+                                    <p:cond delay="400"/>
                                   </p:stCondLst>
                                   <p:childTnLst>
                                     <p:set>
@@ -7371,42 +7244,29 @@
                                     </p:set>
                                     <p:animEffect transition="in" filter="fade">
                                       <p:cBhvr>
-                                        <p:cTn id="23" dur="450"/>
+                                        <p:cTn id="23" dur="650"/>
                                         <p:tgtEl>
                                           <p:spTgt spid="12"/>
                                         </p:tgtEl>
                                       </p:cBhvr>
                                     </p:animEffect>
-                                    <p:anim calcmode="lin" valueType="num">
-                                      <p:cBhvr additive="base">
-                                        <p:cTn id="24" dur="450" fill="hold"/>
+                                    <p:animScale>
+                                      <p:cBhvr>
+                                        <p:cTn id="24" dur="650" fill="hold"/>
                                         <p:tgtEl>
                                           <p:spTgt spid="12"/>
                                         </p:tgtEl>
-                                        <p:attrNameLst>
-                                          <p:attrName>ppt_y</p:attrName>
-                                        </p:attrNameLst>
-                                      </p:cBhvr>
-                                      <p:tavLst>
-                                        <p:tav tm="0">
-                                          <p:val>
-                                            <p:strVal val="#ppt_y+0.025"/>
-                                          </p:val>
-                                        </p:tav>
-                                        <p:tav tm="100000">
-                                          <p:val>
-                                            <p:strVal val="#ppt_y"/>
-                                          </p:val>
-                                        </p:tav>
-                                      </p:tavLst>
-                                    </p:anim>
+                                      </p:cBhvr>
+                                      <p:from x="94000" y="94000"/>
+                                      <p:to x="100000" y="100000"/>
+                                    </p:animScale>
                                   </p:childTnLst>
                                 </p:cTn>
                               </p:par>
                               <p:par>
                                 <p:cTn id="25" presetID="10" presetClass="entr" presetSubtype="0" fill="hold" grpId="0" nodeType="withEffect">
                                   <p:stCondLst>
-                                    <p:cond delay="455"/>
+                                    <p:cond delay="500"/>
                                   </p:stCondLst>
                                   <p:childTnLst>
                                     <p:set>
@@ -7429,7 +7289,7 @@
                                     </p:set>
                                     <p:animEffect transition="in" filter="fade">
                                       <p:cBhvr>
-                                        <p:cTn id="27" dur="450"/>
+                                        <p:cTn id="27" dur="650"/>
                                         <p:tgtEl>
                                           <p:spTgt spid="4"/>
                                         </p:tgtEl>
@@ -7437,7 +7297,7 @@
                                     </p:animEffect>
                                     <p:anim calcmode="lin" valueType="num">
                                       <p:cBhvr additive="base">
-                                        <p:cTn id="28" dur="450" fill="hold"/>
+                                        <p:cTn id="28" dur="650" fill="hold"/>
                                         <p:tgtEl>
                                           <p:spTgt spid="4"/>
                                         </p:tgtEl>
@@ -7448,7 +7308,7 @@
                                       <p:tavLst>
                                         <p:tav tm="0">
                                           <p:val>
-                                            <p:strVal val="#ppt_y+0.025"/>
+                                            <p:strVal val="#ppt_y+0.02"/>
                                           </p:val>
                                         </p:tav>
                                         <p:tav tm="100000">
@@ -7464,7 +7324,7 @@
                               <p:par>
                                 <p:cTn id="29" presetID="10" presetClass="entr" presetSubtype="0" fill="hold" grpId="0" nodeType="withEffect">
                                   <p:stCondLst>
-                                    <p:cond delay="546"/>
+                                    <p:cond delay="600"/>
                                   </p:stCondLst>
                                   <p:childTnLst>
                                     <p:set>
@@ -7487,7 +7347,7 @@
                                     </p:set>
                                     <p:animEffect transition="in" filter="fade">
                                       <p:cBhvr>
-                                        <p:cTn id="31" dur="450"/>
+                                        <p:cTn id="31" dur="650"/>
                                         <p:tgtEl>
                                           <p:spTgt spid="7"/>
                                         </p:tgtEl>
@@ -7495,7 +7355,7 @@
                                     </p:animEffect>
                                     <p:anim calcmode="lin" valueType="num">
                                       <p:cBhvr additive="base">
-                                        <p:cTn id="32" dur="450" fill="hold"/>
+                                        <p:cTn id="32" dur="650" fill="hold"/>
                                         <p:tgtEl>
                                           <p:spTgt spid="7"/>
                                         </p:tgtEl>
@@ -7506,7 +7366,7 @@
                                       <p:tavLst>
                                         <p:tav tm="0">
                                           <p:val>
-                                            <p:strVal val="#ppt_y+0.025"/>
+                                            <p:strVal val="#ppt_y+0.02"/>
                                           </p:val>
                                         </p:tav>
                                         <p:tav tm="100000">
@@ -7522,7 +7382,7 @@
                               <p:par>
                                 <p:cTn id="33" presetID="10" presetClass="entr" presetSubtype="0" fill="hold" grpId="0" nodeType="withEffect">
                                   <p:stCondLst>
-                                    <p:cond delay="637"/>
+                                    <p:cond delay="700"/>
                                   </p:stCondLst>
                                   <p:childTnLst>
                                     <p:set>
@@ -7545,7 +7405,7 @@
                                     </p:set>
                                     <p:animEffect transition="in" filter="fade">
                                       <p:cBhvr>
-                                        <p:cTn id="35" dur="450"/>
+                                        <p:cTn id="35" dur="650"/>
                                         <p:tgtEl>
                                           <p:spTgt spid="10"/>
                                         </p:tgtEl>
@@ -7553,7 +7413,7 @@
                                     </p:animEffect>
                                     <p:anim calcmode="lin" valueType="num">
                                       <p:cBhvr additive="base">
-                                        <p:cTn id="36" dur="450" fill="hold"/>
+                                        <p:cTn id="36" dur="650" fill="hold"/>
                                         <p:tgtEl>
                                           <p:spTgt spid="10"/>
                                         </p:tgtEl>
@@ -7564,7 +7424,7 @@
                                       <p:tavLst>
                                         <p:tav tm="0">
                                           <p:val>
-                                            <p:strVal val="#ppt_y+0.025"/>
+                                            <p:strVal val="#ppt_y+0.02"/>
                                           </p:val>
                                         </p:tav>
                                         <p:tav tm="100000">
@@ -7580,7 +7440,7 @@
                               <p:par>
                                 <p:cTn id="37" presetID="10" presetClass="entr" presetSubtype="0" fill="hold" grpId="0" nodeType="withEffect">
                                   <p:stCondLst>
-                                    <p:cond delay="728"/>
+                                    <p:cond delay="800"/>
                                   </p:stCondLst>
                                   <p:childTnLst>
                                     <p:set>
@@ -7603,7 +7463,7 @@
                                     </p:set>
                                     <p:animEffect transition="in" filter="fade">
                                       <p:cBhvr>
-                                        <p:cTn id="39" dur="450"/>
+                                        <p:cTn id="39" dur="650"/>
                                         <p:tgtEl>
                                           <p:spTgt spid="13"/>
                                         </p:tgtEl>
@@ -7611,7 +7471,7 @@
                                     </p:animEffect>
                                     <p:anim calcmode="lin" valueType="num">
                                       <p:cBhvr additive="base">
-                                        <p:cTn id="40" dur="450" fill="hold"/>
+                                        <p:cTn id="40" dur="650" fill="hold"/>
                                         <p:tgtEl>
                                           <p:spTgt spid="13"/>
                                         </p:tgtEl>
@@ -7622,7 +7482,7 @@
                                       <p:tavLst>
                                         <p:tav tm="0">
                                           <p:val>
-                                            <p:strVal val="#ppt_y+0.025"/>
+                                            <p:strVal val="#ppt_y+0.02"/>
                                           </p:val>
                                         </p:tav>
                                         <p:tav tm="100000">
@@ -7638,7 +7498,7 @@
                               <p:par>
                                 <p:cTn id="41" presetID="10" presetClass="entr" presetSubtype="0" fill="hold" grpId="0" nodeType="withEffect">
                                   <p:stCondLst>
-                                    <p:cond delay="819"/>
+                                    <p:cond delay="900"/>
                                   </p:stCondLst>
                                   <p:childTnLst>
                                     <p:set>
@@ -7661,7 +7521,7 @@
                                     </p:set>
                                     <p:animEffect transition="in" filter="fade">
                                       <p:cBhvr>
-                                        <p:cTn id="43" dur="450"/>
+                                        <p:cTn id="43" dur="650"/>
                                         <p:tgtEl>
                                           <p:spTgt spid="5"/>
                                         </p:tgtEl>
@@ -7669,7 +7529,7 @@
                                     </p:animEffect>
                                     <p:anim calcmode="lin" valueType="num">
                                       <p:cBhvr additive="base">
-                                        <p:cTn id="44" dur="450" fill="hold"/>
+                                        <p:cTn id="44" dur="650" fill="hold"/>
                                         <p:tgtEl>
                                           <p:spTgt spid="5"/>
                                         </p:tgtEl>
@@ -7680,7 +7540,7 @@
                                       <p:tavLst>
                                         <p:tav tm="0">
                                           <p:val>
-                                            <p:strVal val="#ppt_y+0.025"/>
+                                            <p:strVal val="#ppt_y+0.02"/>
                                           </p:val>
                                         </p:tav>
                                         <p:tav tm="100000">
@@ -7696,7 +7556,7 @@
                               <p:par>
                                 <p:cTn id="45" presetID="10" presetClass="entr" presetSubtype="0" fill="hold" grpId="0" nodeType="withEffect">
                                   <p:stCondLst>
-                                    <p:cond delay="910"/>
+                                    <p:cond delay="1000"/>
                                   </p:stCondLst>
                                   <p:childTnLst>
                                     <p:set>
@@ -7719,7 +7579,7 @@
                                     </p:set>
                                     <p:animEffect transition="in" filter="fade">
                                       <p:cBhvr>
-                                        <p:cTn id="47" dur="450"/>
+                                        <p:cTn id="47" dur="650"/>
                                         <p:tgtEl>
                                           <p:spTgt spid="8"/>
                                         </p:tgtEl>
@@ -7727,7 +7587,7 @@
                                     </p:animEffect>
                                     <p:anim calcmode="lin" valueType="num">
                                       <p:cBhvr additive="base">
-                                        <p:cTn id="48" dur="450" fill="hold"/>
+                                        <p:cTn id="48" dur="650" fill="hold"/>
                                         <p:tgtEl>
                                           <p:spTgt spid="8"/>
                                         </p:tgtEl>
@@ -7738,7 +7598,7 @@
                                       <p:tavLst>
                                         <p:tav tm="0">
                                           <p:val>
-                                            <p:strVal val="#ppt_y+0.025"/>
+                                            <p:strVal val="#ppt_y+0.02"/>
                                           </p:val>
                                         </p:tav>
                                         <p:tav tm="100000">
@@ -7754,7 +7614,7 @@
                               <p:par>
                                 <p:cTn id="49" presetID="10" presetClass="entr" presetSubtype="0" fill="hold" grpId="0" nodeType="withEffect">
                                   <p:stCondLst>
-                                    <p:cond delay="1001"/>
+                                    <p:cond delay="1100"/>
                                   </p:stCondLst>
                                   <p:childTnLst>
                                     <p:set>
@@ -7777,7 +7637,7 @@
                                     </p:set>
                                     <p:animEffect transition="in" filter="fade">
                                       <p:cBhvr>
-                                        <p:cTn id="51" dur="450"/>
+                                        <p:cTn id="51" dur="650"/>
                                         <p:tgtEl>
                                           <p:spTgt spid="11"/>
                                         </p:tgtEl>
@@ -7785,7 +7645,7 @@
                                     </p:animEffect>
                                     <p:anim calcmode="lin" valueType="num">
                                       <p:cBhvr additive="base">
-                                        <p:cTn id="52" dur="450" fill="hold"/>
+                                        <p:cTn id="52" dur="650" fill="hold"/>
                                         <p:tgtEl>
                                           <p:spTgt spid="11"/>
                                         </p:tgtEl>
@@ -7796,7 +7656,7 @@
                                       <p:tavLst>
                                         <p:tav tm="0">
                                           <p:val>
-                                            <p:strVal val="#ppt_y+0.025"/>
+                                            <p:strVal val="#ppt_y+0.02"/>
                                           </p:val>
                                         </p:tav>
                                         <p:tav tm="100000">
@@ -7812,7 +7672,7 @@
                               <p:par>
                                 <p:cTn id="53" presetID="10" presetClass="entr" presetSubtype="0" fill="hold" grpId="0" nodeType="withEffect">
                                   <p:stCondLst>
-                                    <p:cond delay="1092"/>
+                                    <p:cond delay="1200"/>
                                   </p:stCondLst>
                                   <p:childTnLst>
                                     <p:set>
@@ -7835,7 +7695,7 @@
                                     </p:set>
                                     <p:animEffect transition="in" filter="fade">
                                       <p:cBhvr>
-                                        <p:cTn id="55" dur="450"/>
+                                        <p:cTn id="55" dur="650"/>
                                         <p:tgtEl>
                                           <p:spTgt spid="14"/>
                                         </p:tgtEl>
@@ -7843,7 +7703,7 @@
                                     </p:animEffect>
                                     <p:anim calcmode="lin" valueType="num">
                                       <p:cBhvr additive="base">
-                                        <p:cTn id="56" dur="450" fill="hold"/>
+                                        <p:cTn id="56" dur="650" fill="hold"/>
                                         <p:tgtEl>
                                           <p:spTgt spid="14"/>
                                         </p:tgtEl>
@@ -7854,7 +7714,7 @@
                                       <p:tavLst>
                                         <p:tav tm="0">
                                           <p:val>
-                                            <p:strVal val="#ppt_y+0.025"/>
+                                            <p:strVal val="#ppt_y+0.02"/>
                                           </p:val>
                                         </p:tav>
                                         <p:tav tm="100000">

--- a/assets/showcase/inkpod-light/InkPod.pptx
+++ b/assets/showcase/inkpod-light/InkPod.pptx
@@ -1992,7 +1992,7 @@
                                     </p:set>
                                     <p:animEffect transition="in" filter="fade">
                                       <p:cBhvr>
-                                        <p:cTn id="7" dur="650"/>
+                                        <p:cTn id="7" dur="594"/>
                                         <p:tgtEl>
                                           <p:spTgt spid="2"/>
                                         </p:tgtEl>
@@ -2000,7 +2000,7 @@
                                     </p:animEffect>
                                     <p:anim calcmode="lin" valueType="num">
                                       <p:cBhvr additive="base">
-                                        <p:cTn id="8" dur="650" fill="hold"/>
+                                        <p:cTn id="8" dur="594" fill="hold" decel="80000"/>
                                         <p:tgtEl>
                                           <p:spTgt spid="2"/>
                                         </p:tgtEl>
@@ -2050,7 +2050,7 @@
                                     </p:set>
                                     <p:animEffect transition="in" filter="fade">
                                       <p:cBhvr>
-                                        <p:cTn id="11" dur="650"/>
+                                        <p:cTn id="11" dur="750"/>
                                         <p:tgtEl>
                                           <p:spTgt spid="3"/>
                                         </p:tgtEl>
@@ -2058,7 +2058,7 @@
                                     </p:animEffect>
                                     <p:animScale>
                                       <p:cBhvr>
-                                        <p:cTn id="12" dur="650" fill="hold"/>
+                                        <p:cTn id="12" dur="750" fill="hold" decel="60000"/>
                                         <p:tgtEl>
                                           <p:spTgt spid="3"/>
                                         </p:tgtEl>
@@ -2095,7 +2095,7 @@
                                     </p:set>
                                     <p:animEffect transition="in" filter="fade">
                                       <p:cBhvr>
-                                        <p:cTn id="15" dur="650"/>
+                                        <p:cTn id="15" dur="614"/>
                                         <p:tgtEl>
                                           <p:spTgt spid="4"/>
                                         </p:tgtEl>
@@ -2103,7 +2103,7 @@
                                     </p:animEffect>
                                     <p:anim calcmode="lin" valueType="num">
                                       <p:cBhvr additive="base">
-                                        <p:cTn id="16" dur="650" fill="hold"/>
+                                        <p:cTn id="16" dur="614" fill="hold" decel="80000"/>
                                         <p:tgtEl>
                                           <p:spTgt spid="4"/>
                                         </p:tgtEl>
@@ -2153,7 +2153,7 @@
                                     </p:set>
                                     <p:animEffect transition="in" filter="fade">
                                       <p:cBhvr>
-                                        <p:cTn id="19" dur="650"/>
+                                        <p:cTn id="19" dur="594"/>
                                         <p:tgtEl>
                                           <p:spTgt spid="5"/>
                                         </p:tgtEl>
@@ -2161,7 +2161,7 @@
                                     </p:animEffect>
                                     <p:anim calcmode="lin" valueType="num">
                                       <p:cBhvr additive="base">
-                                        <p:cTn id="20" dur="650" fill="hold"/>
+                                        <p:cTn id="20" dur="594" fill="hold" decel="80000"/>
                                         <p:tgtEl>
                                           <p:spTgt spid="5"/>
                                         </p:tgtEl>
@@ -2473,7 +2473,7 @@
                                     </p:set>
                                     <p:animEffect transition="in" filter="fade">
                                       <p:cBhvr>
-                                        <p:cTn id="7" dur="650"/>
+                                        <p:cTn id="7" dur="760"/>
                                         <p:tgtEl>
                                           <p:spTgt spid="2"/>
                                         </p:tgtEl>
@@ -2481,7 +2481,7 @@
                                     </p:animEffect>
                                     <p:animScale>
                                       <p:cBhvr>
-                                        <p:cTn id="8" dur="650" fill="hold"/>
+                                        <p:cTn id="8" dur="760" fill="hold" decel="60000"/>
                                         <p:tgtEl>
                                           <p:spTgt spid="2"/>
                                         </p:tgtEl>
@@ -2518,7 +2518,7 @@
                                     </p:set>
                                     <p:animEffect transition="in" filter="fade">
                                       <p:cBhvr>
-                                        <p:cTn id="11" dur="650"/>
+                                        <p:cTn id="11" dur="614"/>
                                         <p:tgtEl>
                                           <p:spTgt spid="3"/>
                                         </p:tgtEl>
@@ -2526,7 +2526,7 @@
                                     </p:animEffect>
                                     <p:anim calcmode="lin" valueType="num">
                                       <p:cBhvr additive="base">
-                                        <p:cTn id="12" dur="650" fill="hold"/>
+                                        <p:cTn id="12" dur="614" fill="hold" decel="80000"/>
                                         <p:tgtEl>
                                           <p:spTgt spid="3"/>
                                         </p:tgtEl>
@@ -2576,7 +2576,7 @@
                                     </p:set>
                                     <p:animEffect transition="in" filter="fade">
                                       <p:cBhvr>
-                                        <p:cTn id="15" dur="650"/>
+                                        <p:cTn id="15" dur="614"/>
                                         <p:tgtEl>
                                           <p:spTgt spid="4"/>
                                         </p:tgtEl>
@@ -2584,7 +2584,7 @@
                                     </p:animEffect>
                                     <p:anim calcmode="lin" valueType="num">
                                       <p:cBhvr additive="base">
-                                        <p:cTn id="16" dur="650" fill="hold"/>
+                                        <p:cTn id="16" dur="614" fill="hold" decel="80000"/>
                                         <p:tgtEl>
                                           <p:spTgt spid="4"/>
                                         </p:tgtEl>
@@ -2634,7 +2634,7 @@
                                     </p:set>
                                     <p:animEffect transition="in" filter="fade">
                                       <p:cBhvr>
-                                        <p:cTn id="19" dur="650"/>
+                                        <p:cTn id="19" dur="594"/>
                                         <p:tgtEl>
                                           <p:spTgt spid="5"/>
                                         </p:tgtEl>
@@ -2642,7 +2642,7 @@
                                     </p:animEffect>
                                     <p:anim calcmode="lin" valueType="num">
                                       <p:cBhvr additive="base">
-                                        <p:cTn id="20" dur="650" fill="hold"/>
+                                        <p:cTn id="20" dur="594" fill="hold" decel="80000"/>
                                         <p:tgtEl>
                                           <p:spTgt spid="5"/>
                                         </p:tgtEl>
@@ -2915,7 +2915,7 @@
                                     </p:set>
                                     <p:animEffect transition="in" filter="fade">
                                       <p:cBhvr>
-                                        <p:cTn id="7" dur="650"/>
+                                        <p:cTn id="7" dur="708"/>
                                         <p:tgtEl>
                                           <p:spTgt spid="2"/>
                                         </p:tgtEl>
@@ -2923,7 +2923,7 @@
                                     </p:animEffect>
                                     <p:anim calcmode="lin" valueType="num">
                                       <p:cBhvr additive="base">
-                                        <p:cTn id="8" dur="650" fill="hold"/>
+                                        <p:cTn id="8" dur="708" fill="hold" decel="80000"/>
                                         <p:tgtEl>
                                           <p:spTgt spid="2"/>
                                         </p:tgtEl>
@@ -2973,7 +2973,7 @@
                                     </p:set>
                                     <p:animEffect transition="in" filter="fade">
                                       <p:cBhvr>
-                                        <p:cTn id="11" dur="650"/>
+                                        <p:cTn id="11" dur="614"/>
                                         <p:tgtEl>
                                           <p:spTgt spid="3"/>
                                         </p:tgtEl>
@@ -2981,7 +2981,7 @@
                                     </p:animEffect>
                                     <p:anim calcmode="lin" valueType="num">
                                       <p:cBhvr additive="base">
-                                        <p:cTn id="12" dur="650" fill="hold"/>
+                                        <p:cTn id="12" dur="614" fill="hold" decel="80000"/>
                                         <p:tgtEl>
                                           <p:spTgt spid="3"/>
                                         </p:tgtEl>
@@ -3031,7 +3031,7 @@
                                     </p:set>
                                     <p:animEffect transition="in" filter="fade">
                                       <p:cBhvr>
-                                        <p:cTn id="15" dur="650"/>
+                                        <p:cTn id="15" dur="594"/>
                                         <p:tgtEl>
                                           <p:spTgt spid="4"/>
                                         </p:tgtEl>
@@ -3039,7 +3039,7 @@
                                     </p:animEffect>
                                     <p:anim calcmode="lin" valueType="num">
                                       <p:cBhvr additive="base">
-                                        <p:cTn id="16" dur="650" fill="hold"/>
+                                        <p:cTn id="16" dur="594" fill="hold" decel="80000"/>
                                         <p:tgtEl>
                                           <p:spTgt spid="4"/>
                                         </p:tgtEl>
@@ -3222,7 +3222,7 @@
                                     </p:set>
                                     <p:animEffect transition="in" filter="fade">
                                       <p:cBhvr>
-                                        <p:cTn id="7" dur="650"/>
+                                        <p:cTn id="7" dur="1228"/>
                                         <p:tgtEl>
                                           <p:spTgt spid="2"/>
                                         </p:tgtEl>
@@ -3230,7 +3230,7 @@
                                     </p:animEffect>
                                     <p:anim calcmode="lin" valueType="num">
                                       <p:cBhvr additive="base">
-                                        <p:cTn id="8" dur="650" fill="hold"/>
+                                        <p:cTn id="8" dur="1228" fill="hold" decel="80000"/>
                                         <p:tgtEl>
                                           <p:spTgt spid="2"/>
                                         </p:tgtEl>
@@ -3486,7 +3486,7 @@
                                     </p:set>
                                     <p:animEffect transition="in" filter="fade">
                                       <p:cBhvr>
-                                        <p:cTn id="7" dur="650"/>
+                                        <p:cTn id="7" dur="729"/>
                                         <p:tgtEl>
                                           <p:spTgt spid="2"/>
                                         </p:tgtEl>
@@ -3494,7 +3494,7 @@
                                     </p:animEffect>
                                     <p:animScale>
                                       <p:cBhvr>
-                                        <p:cTn id="8" dur="650" fill="hold"/>
+                                        <p:cTn id="8" dur="729" fill="hold" decel="60000"/>
                                         <p:tgtEl>
                                           <p:spTgt spid="2"/>
                                         </p:tgtEl>
@@ -3531,7 +3531,7 @@
                                     </p:set>
                                     <p:animEffect transition="in" filter="fade">
                                       <p:cBhvr>
-                                        <p:cTn id="11" dur="650"/>
+                                        <p:cTn id="11" dur="687"/>
                                         <p:tgtEl>
                                           <p:spTgt spid="3"/>
                                         </p:tgtEl>
@@ -3539,7 +3539,7 @@
                                     </p:animEffect>
                                     <p:anim calcmode="lin" valueType="num">
                                       <p:cBhvr additive="base">
-                                        <p:cTn id="12" dur="650" fill="hold"/>
+                                        <p:cTn id="12" dur="687" fill="hold" decel="80000"/>
                                         <p:tgtEl>
                                           <p:spTgt spid="3"/>
                                         </p:tgtEl>
@@ -3589,7 +3589,7 @@
                                     </p:set>
                                     <p:animEffect transition="in" filter="fade">
                                       <p:cBhvr>
-                                        <p:cTn id="15" dur="650"/>
+                                        <p:cTn id="15" dur="614"/>
                                         <p:tgtEl>
                                           <p:spTgt spid="4"/>
                                         </p:tgtEl>
@@ -3597,7 +3597,7 @@
                                     </p:animEffect>
                                     <p:anim calcmode="lin" valueType="num">
                                       <p:cBhvr additive="base">
-                                        <p:cTn id="16" dur="650" fill="hold"/>
+                                        <p:cTn id="16" dur="614" fill="hold" decel="80000"/>
                                         <p:tgtEl>
                                           <p:spTgt spid="4"/>
                                         </p:tgtEl>
@@ -3816,7 +3816,7 @@
                                     </p:set>
                                     <p:animEffect transition="in" filter="fade">
                                       <p:cBhvr>
-                                        <p:cTn id="7" dur="650"/>
+                                        <p:cTn id="7" dur="1006"/>
                                         <p:tgtEl>
                                           <p:spTgt spid="2"/>
                                         </p:tgtEl>
@@ -3824,7 +3824,7 @@
                                     </p:animEffect>
                                     <p:anim calcmode="lin" valueType="num">
                                       <p:cBhvr additive="base">
-                                        <p:cTn id="8" dur="650" fill="hold"/>
+                                        <p:cTn id="8" dur="1006" fill="hold" decel="80000"/>
                                         <p:tgtEl>
                                           <p:spTgt spid="2"/>
                                         </p:tgtEl>
@@ -3874,7 +3874,7 @@
                                     </p:set>
                                     <p:animEffect transition="in" filter="fade">
                                       <p:cBhvr>
-                                        <p:cTn id="11" dur="650"/>
+                                        <p:cTn id="11" dur="860"/>
                                         <p:tgtEl>
                                           <p:spTgt spid="3"/>
                                         </p:tgtEl>
@@ -3882,7 +3882,7 @@
                                     </p:animEffect>
                                     <p:anim calcmode="lin" valueType="num">
                                       <p:cBhvr additive="base">
-                                        <p:cTn id="12" dur="650" fill="hold"/>
+                                        <p:cTn id="12" dur="860" fill="hold" decel="80000"/>
                                         <p:tgtEl>
                                           <p:spTgt spid="3"/>
                                         </p:tgtEl>
@@ -4192,7 +4192,7 @@
                                     </p:set>
                                     <p:animEffect transition="in" filter="fade">
                                       <p:cBhvr>
-                                        <p:cTn id="7" dur="650"/>
+                                        <p:cTn id="7" dur="594"/>
                                         <p:tgtEl>
                                           <p:spTgt spid="2"/>
                                         </p:tgtEl>
@@ -4200,7 +4200,7 @@
                                     </p:animEffect>
                                     <p:anim calcmode="lin" valueType="num">
                                       <p:cBhvr additive="base">
-                                        <p:cTn id="8" dur="650" fill="hold"/>
+                                        <p:cTn id="8" dur="594" fill="hold" decel="80000"/>
                                         <p:tgtEl>
                                           <p:spTgt spid="2"/>
                                         </p:tgtEl>
@@ -4250,7 +4250,7 @@
                                     </p:set>
                                     <p:animEffect transition="in" filter="fade">
                                       <p:cBhvr>
-                                        <p:cTn id="11" dur="650"/>
+                                        <p:cTn id="11" dur="791"/>
                                         <p:tgtEl>
                                           <p:spTgt spid="3"/>
                                         </p:tgtEl>
@@ -4258,7 +4258,7 @@
                                     </p:animEffect>
                                     <p:animScale>
                                       <p:cBhvr>
-                                        <p:cTn id="12" dur="650" fill="hold"/>
+                                        <p:cTn id="12" dur="791" fill="hold" decel="60000"/>
                                         <p:tgtEl>
                                           <p:spTgt spid="3"/>
                                         </p:tgtEl>
@@ -4295,7 +4295,7 @@
                                     </p:set>
                                     <p:animEffect transition="in" filter="fade">
                                       <p:cBhvr>
-                                        <p:cTn id="15" dur="650"/>
+                                        <p:cTn id="15" dur="625"/>
                                         <p:tgtEl>
                                           <p:spTgt spid="4"/>
                                         </p:tgtEl>
@@ -4303,7 +4303,7 @@
                                     </p:animEffect>
                                     <p:anim calcmode="lin" valueType="num">
                                       <p:cBhvr additive="base">
-                                        <p:cTn id="16" dur="650" fill="hold"/>
+                                        <p:cTn id="16" dur="625" fill="hold" decel="80000"/>
                                         <p:tgtEl>
                                           <p:spTgt spid="4"/>
                                         </p:tgtEl>
@@ -4353,7 +4353,7 @@
                                     </p:set>
                                     <p:animEffect transition="in" filter="fade">
                                       <p:cBhvr>
-                                        <p:cTn id="19" dur="650"/>
+                                        <p:cTn id="19" dur="646"/>
                                         <p:tgtEl>
                                           <p:spTgt spid="5"/>
                                         </p:tgtEl>
@@ -4361,7 +4361,7 @@
                                     </p:animEffect>
                                     <p:anim calcmode="lin" valueType="num">
                                       <p:cBhvr additive="base">
-                                        <p:cTn id="20" dur="650" fill="hold"/>
+                                        <p:cTn id="20" dur="646" fill="hold" decel="80000"/>
                                         <p:tgtEl>
                                           <p:spTgt spid="5"/>
                                         </p:tgtEl>
@@ -4785,7 +4785,7 @@
                                     </p:set>
                                     <p:animEffect transition="in" filter="fade">
                                       <p:cBhvr>
-                                        <p:cTn id="7" dur="650"/>
+                                        <p:cTn id="7" dur="635"/>
                                         <p:tgtEl>
                                           <p:spTgt spid="2"/>
                                         </p:tgtEl>
@@ -4793,7 +4793,7 @@
                                     </p:animEffect>
                                     <p:anim calcmode="lin" valueType="num">
                                       <p:cBhvr additive="base">
-                                        <p:cTn id="8" dur="650" fill="hold"/>
+                                        <p:cTn id="8" dur="635" fill="hold" decel="80000"/>
                                         <p:tgtEl>
                                           <p:spTgt spid="2"/>
                                         </p:tgtEl>
@@ -4843,7 +4843,7 @@
                                     </p:set>
                                     <p:animEffect transition="in" filter="fade">
                                       <p:cBhvr>
-                                        <p:cTn id="11" dur="650"/>
+                                        <p:cTn id="11" dur="614"/>
                                         <p:tgtEl>
                                           <p:spTgt spid="3"/>
                                         </p:tgtEl>
@@ -4851,7 +4851,7 @@
                                     </p:animEffect>
                                     <p:anim calcmode="lin" valueType="num">
                                       <p:cBhvr additive="base">
-                                        <p:cTn id="12" dur="650" fill="hold"/>
+                                        <p:cTn id="12" dur="614" fill="hold" decel="80000"/>
                                         <p:tgtEl>
                                           <p:spTgt spid="3"/>
                                         </p:tgtEl>
@@ -4878,7 +4878,7 @@
                               <p:par>
                                 <p:cTn id="13" presetID="10" presetClass="entr" presetSubtype="0" fill="hold" grpId="0" nodeType="withEffect">
                                   <p:stCondLst>
-                                    <p:cond delay="380"/>
+                                    <p:cond delay="230"/>
                                   </p:stCondLst>
                                   <p:childTnLst>
                                     <p:set>
@@ -4901,7 +4901,7 @@
                                     </p:set>
                                     <p:animEffect transition="in" filter="fade">
                                       <p:cBhvr>
-                                        <p:cTn id="15" dur="650"/>
+                                        <p:cTn id="15" dur="614"/>
                                         <p:tgtEl>
                                           <p:spTgt spid="5"/>
                                         </p:tgtEl>
@@ -4909,7 +4909,7 @@
                                     </p:animEffect>
                                     <p:anim calcmode="lin" valueType="num">
                                       <p:cBhvr additive="base">
-                                        <p:cTn id="16" dur="650" fill="hold"/>
+                                        <p:cTn id="16" dur="614" fill="hold" decel="80000"/>
                                         <p:tgtEl>
                                           <p:spTgt spid="5"/>
                                         </p:tgtEl>
@@ -4936,7 +4936,7 @@
                               <p:par>
                                 <p:cTn id="17" presetID="10" presetClass="entr" presetSubtype="0" fill="hold" grpId="0" nodeType="withEffect">
                                   <p:stCondLst>
-                                    <p:cond delay="570"/>
+                                    <p:cond delay="270"/>
                                   </p:stCondLst>
                                   <p:childTnLst>
                                     <p:set>
@@ -4959,7 +4959,7 @@
                                     </p:set>
                                     <p:animEffect transition="in" filter="fade">
                                       <p:cBhvr>
-                                        <p:cTn id="19" dur="650"/>
+                                        <p:cTn id="19" dur="614"/>
                                         <p:tgtEl>
                                           <p:spTgt spid="7"/>
                                         </p:tgtEl>
@@ -4967,7 +4967,7 @@
                                     </p:animEffect>
                                     <p:anim calcmode="lin" valueType="num">
                                       <p:cBhvr additive="base">
-                                        <p:cTn id="20" dur="650" fill="hold"/>
+                                        <p:cTn id="20" dur="614" fill="hold" decel="80000"/>
                                         <p:tgtEl>
                                           <p:spTgt spid="7"/>
                                         </p:tgtEl>
@@ -4994,7 +4994,7 @@
                               <p:par>
                                 <p:cTn id="21" presetID="10" presetClass="entr" presetSubtype="0" fill="hold" grpId="0" nodeType="withEffect">
                                   <p:stCondLst>
-                                    <p:cond delay="760"/>
+                                    <p:cond delay="380"/>
                                   </p:stCondLst>
                                   <p:childTnLst>
                                     <p:set>
@@ -5017,7 +5017,7 @@
                                     </p:set>
                                     <p:animEffect transition="in" filter="fade">
                                       <p:cBhvr>
-                                        <p:cTn id="23" dur="650"/>
+                                        <p:cTn id="23" dur="802"/>
                                         <p:tgtEl>
                                           <p:spTgt spid="4"/>
                                         </p:tgtEl>
@@ -5025,7 +5025,7 @@
                                     </p:animEffect>
                                     <p:anim calcmode="lin" valueType="num">
                                       <p:cBhvr additive="base">
-                                        <p:cTn id="24" dur="650" fill="hold"/>
+                                        <p:cTn id="24" dur="802" fill="hold" decel="80000"/>
                                         <p:tgtEl>
                                           <p:spTgt spid="4"/>
                                         </p:tgtEl>
@@ -5052,7 +5052,7 @@
                               <p:par>
                                 <p:cTn id="25" presetID="10" presetClass="entr" presetSubtype="0" fill="hold" grpId="0" nodeType="withEffect">
                                   <p:stCondLst>
-                                    <p:cond delay="950"/>
+                                    <p:cond delay="420"/>
                                   </p:stCondLst>
                                   <p:childTnLst>
                                     <p:set>
@@ -5075,7 +5075,7 @@
                                     </p:set>
                                     <p:animEffect transition="in" filter="fade">
                                       <p:cBhvr>
-                                        <p:cTn id="27" dur="650"/>
+                                        <p:cTn id="27" dur="802"/>
                                         <p:tgtEl>
                                           <p:spTgt spid="6"/>
                                         </p:tgtEl>
@@ -5083,7 +5083,7 @@
                                     </p:animEffect>
                                     <p:anim calcmode="lin" valueType="num">
                                       <p:cBhvr additive="base">
-                                        <p:cTn id="28" dur="650" fill="hold"/>
+                                        <p:cTn id="28" dur="802" fill="hold" decel="80000"/>
                                         <p:tgtEl>
                                           <p:spTgt spid="6"/>
                                         </p:tgtEl>
@@ -5110,7 +5110,7 @@
                               <p:par>
                                 <p:cTn id="29" presetID="10" presetClass="entr" presetSubtype="0" fill="hold" grpId="0" nodeType="withEffect">
                                   <p:stCondLst>
-                                    <p:cond delay="1140"/>
+                                    <p:cond delay="460"/>
                                   </p:stCondLst>
                                   <p:childTnLst>
                                     <p:set>
@@ -5133,7 +5133,7 @@
                                     </p:set>
                                     <p:animEffect transition="in" filter="fade">
                                       <p:cBhvr>
-                                        <p:cTn id="31" dur="650"/>
+                                        <p:cTn id="31" dur="802"/>
                                         <p:tgtEl>
                                           <p:spTgt spid="8"/>
                                         </p:tgtEl>
@@ -5141,7 +5141,7 @@
                                     </p:animEffect>
                                     <p:anim calcmode="lin" valueType="num">
                                       <p:cBhvr additive="base">
-                                        <p:cTn id="32" dur="650" fill="hold"/>
+                                        <p:cTn id="32" dur="802" fill="hold" decel="80000"/>
                                         <p:tgtEl>
                                           <p:spTgt spid="8"/>
                                         </p:tgtEl>
@@ -5484,7 +5484,7 @@
                                     </p:set>
                                     <p:animEffect transition="in" filter="fade">
                                       <p:cBhvr>
-                                        <p:cTn id="7" dur="650"/>
+                                        <p:cTn id="7" dur="594"/>
                                         <p:tgtEl>
                                           <p:spTgt spid="2"/>
                                         </p:tgtEl>
@@ -5492,7 +5492,7 @@
                                     </p:animEffect>
                                     <p:anim calcmode="lin" valueType="num">
                                       <p:cBhvr additive="base">
-                                        <p:cTn id="8" dur="650" fill="hold"/>
+                                        <p:cTn id="8" dur="594" fill="hold" decel="80000"/>
                                         <p:tgtEl>
                                           <p:spTgt spid="2"/>
                                         </p:tgtEl>
@@ -5542,7 +5542,7 @@
                                     </p:set>
                                     <p:animEffect transition="in" filter="fade">
                                       <p:cBhvr>
-                                        <p:cTn id="11" dur="650"/>
+                                        <p:cTn id="11" dur="791"/>
                                         <p:tgtEl>
                                           <p:spTgt spid="3"/>
                                         </p:tgtEl>
@@ -5550,7 +5550,7 @@
                                     </p:animEffect>
                                     <p:animScale>
                                       <p:cBhvr>
-                                        <p:cTn id="12" dur="650" fill="hold"/>
+                                        <p:cTn id="12" dur="791" fill="hold" decel="60000"/>
                                         <p:tgtEl>
                                           <p:spTgt spid="3"/>
                                         </p:tgtEl>
@@ -5587,7 +5587,7 @@
                                     </p:set>
                                     <p:animEffect transition="in" filter="fade">
                                       <p:cBhvr>
-                                        <p:cTn id="15" dur="650"/>
+                                        <p:cTn id="15" dur="625"/>
                                         <p:tgtEl>
                                           <p:spTgt spid="4"/>
                                         </p:tgtEl>
@@ -5595,7 +5595,7 @@
                                     </p:animEffect>
                                     <p:anim calcmode="lin" valueType="num">
                                       <p:cBhvr additive="base">
-                                        <p:cTn id="16" dur="650" fill="hold"/>
+                                        <p:cTn id="16" dur="625" fill="hold" decel="80000"/>
                                         <p:tgtEl>
                                           <p:spTgt spid="4"/>
                                         </p:tgtEl>
@@ -5645,7 +5645,7 @@
                                     </p:set>
                                     <p:animEffect transition="in" filter="fade">
                                       <p:cBhvr>
-                                        <p:cTn id="19" dur="650"/>
+                                        <p:cTn id="19" dur="646"/>
                                         <p:tgtEl>
                                           <p:spTgt spid="5"/>
                                         </p:tgtEl>
@@ -5653,7 +5653,7 @@
                                     </p:animEffect>
                                     <p:anim calcmode="lin" valueType="num">
                                       <p:cBhvr additive="base">
-                                        <p:cTn id="20" dur="650" fill="hold"/>
+                                        <p:cTn id="20" dur="646" fill="hold" decel="80000"/>
                                         <p:tgtEl>
                                           <p:spTgt spid="5"/>
                                         </p:tgtEl>
@@ -6135,7 +6135,7 @@
                                     </p:set>
                                     <p:animEffect transition="in" filter="fade">
                                       <p:cBhvr>
-                                        <p:cTn id="7" dur="650"/>
+                                        <p:cTn id="7" dur="594"/>
                                         <p:tgtEl>
                                           <p:spTgt spid="2"/>
                                         </p:tgtEl>
@@ -6143,7 +6143,7 @@
                                     </p:animEffect>
                                     <p:anim calcmode="lin" valueType="num">
                                       <p:cBhvr additive="base">
-                                        <p:cTn id="8" dur="650" fill="hold"/>
+                                        <p:cTn id="8" dur="594" fill="hold" decel="80000"/>
                                         <p:tgtEl>
                                           <p:spTgt spid="2"/>
                                         </p:tgtEl>
@@ -6170,7 +6170,7 @@
                               <p:par>
                                 <p:cTn id="9" presetID="10" presetClass="entr" presetSubtype="0" fill="hold" grpId="0" nodeType="withEffect">
                                   <p:stCondLst>
-                                    <p:cond delay="190"/>
+                                    <p:cond delay="40"/>
                                   </p:stCondLst>
                                   <p:childTnLst>
                                     <p:set>
@@ -6193,7 +6193,7 @@
                                     </p:set>
                                     <p:animEffect transition="in" filter="fade">
                                       <p:cBhvr>
-                                        <p:cTn id="11" dur="650"/>
+                                        <p:cTn id="11" dur="594"/>
                                         <p:tgtEl>
                                           <p:spTgt spid="3"/>
                                         </p:tgtEl>
@@ -6201,7 +6201,7 @@
                                     </p:animEffect>
                                     <p:anim calcmode="lin" valueType="num">
                                       <p:cBhvr additive="base">
-                                        <p:cTn id="12" dur="650" fill="hold"/>
+                                        <p:cTn id="12" dur="594" fill="hold" decel="80000"/>
                                         <p:tgtEl>
                                           <p:spTgt spid="3"/>
                                         </p:tgtEl>
@@ -6228,7 +6228,7 @@
                               <p:par>
                                 <p:cTn id="13" presetID="10" presetClass="entr" presetSubtype="0" fill="hold" grpId="0" nodeType="withEffect">
                                   <p:stCondLst>
-                                    <p:cond delay="380"/>
+                                    <p:cond delay="190"/>
                                   </p:stCondLst>
                                   <p:childTnLst>
                                     <p:set>
@@ -6251,7 +6251,7 @@
                                     </p:set>
                                     <p:animEffect transition="in" filter="wipe(left)">
                                       <p:cBhvr>
-                                        <p:cTn id="15" dur="650"/>
+                                        <p:cTn id="15" dur="877"/>
                                         <p:tgtEl>
                                           <p:spTgt spid="8"/>
                                         </p:tgtEl>
@@ -6263,7 +6263,7 @@
                               <p:par>
                                 <p:cTn id="16" presetID="10" presetClass="entr" presetSubtype="0" fill="hold" grpId="0" nodeType="withEffect">
                                   <p:stCondLst>
-                                    <p:cond delay="570"/>
+                                    <p:cond delay="230"/>
                                   </p:stCondLst>
                                   <p:childTnLst>
                                     <p:set>
@@ -6286,7 +6286,7 @@
                                     </p:set>
                                     <p:animEffect transition="in" filter="fade">
                                       <p:cBhvr>
-                                        <p:cTn id="18" dur="650"/>
+                                        <p:cTn id="18" dur="666"/>
                                         <p:tgtEl>
                                           <p:spTgt spid="4"/>
                                         </p:tgtEl>
@@ -6294,7 +6294,7 @@
                                     </p:animEffect>
                                     <p:anim calcmode="lin" valueType="num">
                                       <p:cBhvr additive="base">
-                                        <p:cTn id="19" dur="650" fill="hold"/>
+                                        <p:cTn id="19" dur="666" fill="hold" decel="80000"/>
                                         <p:tgtEl>
                                           <p:spTgt spid="4"/>
                                         </p:tgtEl>
@@ -6321,7 +6321,7 @@
                               <p:par>
                                 <p:cTn id="20" presetID="10" presetClass="entr" presetSubtype="0" fill="hold" grpId="0" nodeType="withEffect">
                                   <p:stCondLst>
-                                    <p:cond delay="760"/>
+                                    <p:cond delay="270"/>
                                   </p:stCondLst>
                                   <p:childTnLst>
                                     <p:set>
@@ -6344,7 +6344,7 @@
                                     </p:set>
                                     <p:animEffect transition="in" filter="fade">
                                       <p:cBhvr>
-                                        <p:cTn id="22" dur="650"/>
+                                        <p:cTn id="22" dur="666"/>
                                         <p:tgtEl>
                                           <p:spTgt spid="5"/>
                                         </p:tgtEl>
@@ -6352,7 +6352,7 @@
                                     </p:animEffect>
                                     <p:anim calcmode="lin" valueType="num">
                                       <p:cBhvr additive="base">
-                                        <p:cTn id="23" dur="650" fill="hold"/>
+                                        <p:cTn id="23" dur="666" fill="hold" decel="80000"/>
                                         <p:tgtEl>
                                           <p:spTgt spid="5"/>
                                         </p:tgtEl>
@@ -6379,7 +6379,7 @@
                               <p:par>
                                 <p:cTn id="24" presetID="10" presetClass="entr" presetSubtype="0" fill="hold" grpId="0" nodeType="withEffect">
                                   <p:stCondLst>
-                                    <p:cond delay="950"/>
+                                    <p:cond delay="310"/>
                                   </p:stCondLst>
                                   <p:childTnLst>
                                     <p:set>
@@ -6402,7 +6402,7 @@
                                     </p:set>
                                     <p:animEffect transition="in" filter="fade">
                                       <p:cBhvr>
-                                        <p:cTn id="26" dur="650"/>
+                                        <p:cTn id="26" dur="877"/>
                                         <p:tgtEl>
                                           <p:spTgt spid="6"/>
                                         </p:tgtEl>
@@ -6410,7 +6410,7 @@
                                     </p:animEffect>
                                     <p:anim calcmode="lin" valueType="num">
                                       <p:cBhvr additive="base">
-                                        <p:cTn id="27" dur="650" fill="hold"/>
+                                        <p:cTn id="27" dur="877" fill="hold" decel="80000"/>
                                         <p:tgtEl>
                                           <p:spTgt spid="6"/>
                                         </p:tgtEl>
@@ -6437,7 +6437,7 @@
                               <p:par>
                                 <p:cTn id="28" presetID="10" presetClass="entr" presetSubtype="0" fill="hold" grpId="0" nodeType="withEffect">
                                   <p:stCondLst>
-                                    <p:cond delay="1140"/>
+                                    <p:cond delay="350"/>
                                   </p:stCondLst>
                                   <p:childTnLst>
                                     <p:set>
@@ -6460,7 +6460,7 @@
                                     </p:set>
                                     <p:animEffect transition="in" filter="fade">
                                       <p:cBhvr>
-                                        <p:cTn id="30" dur="650"/>
+                                        <p:cTn id="30" dur="877"/>
                                         <p:tgtEl>
                                           <p:spTgt spid="7"/>
                                         </p:tgtEl>
@@ -6468,7 +6468,7 @@
                                     </p:animEffect>
                                     <p:anim calcmode="lin" valueType="num">
                                       <p:cBhvr additive="base">
-                                        <p:cTn id="31" dur="650" fill="hold"/>
+                                        <p:cTn id="31" dur="877" fill="hold" decel="80000"/>
                                         <p:tgtEl>
                                           <p:spTgt spid="7"/>
                                         </p:tgtEl>
@@ -7051,7 +7051,7 @@
                                     </p:set>
                                     <p:animEffect transition="in" filter="fade">
                                       <p:cBhvr>
-                                        <p:cTn id="7" dur="650"/>
+                                        <p:cTn id="7" dur="625"/>
                                         <p:tgtEl>
                                           <p:spTgt spid="2"/>
                                         </p:tgtEl>
@@ -7059,7 +7059,7 @@
                                     </p:animEffect>
                                     <p:anim calcmode="lin" valueType="num">
                                       <p:cBhvr additive="base">
-                                        <p:cTn id="8" dur="650" fill="hold"/>
+                                        <p:cTn id="8" dur="625" fill="hold" decel="80000"/>
                                         <p:tgtEl>
                                           <p:spTgt spid="2"/>
                                         </p:tgtEl>
@@ -7086,7 +7086,7 @@
                               <p:par>
                                 <p:cTn id="9" presetID="10" presetClass="entr" presetSubtype="0" fill="hold" grpId="0" nodeType="withEffect">
                                   <p:stCondLst>
-                                    <p:cond delay="100"/>
+                                    <p:cond delay="190"/>
                                   </p:stCondLst>
                                   <p:childTnLst>
                                     <p:set>
@@ -7109,7 +7109,7 @@
                                     </p:set>
                                     <p:animEffect transition="in" filter="fade">
                                       <p:cBhvr>
-                                        <p:cTn id="11" dur="650"/>
+                                        <p:cTn id="11" dur="822"/>
                                         <p:tgtEl>
                                           <p:spTgt spid="3"/>
                                         </p:tgtEl>
@@ -7117,7 +7117,7 @@
                                     </p:animEffect>
                                     <p:animScale>
                                       <p:cBhvr>
-                                        <p:cTn id="12" dur="650" fill="hold"/>
+                                        <p:cTn id="12" dur="822" fill="hold" decel="60000"/>
                                         <p:tgtEl>
                                           <p:spTgt spid="3"/>
                                         </p:tgtEl>
@@ -7131,7 +7131,7 @@
                               <p:par>
                                 <p:cTn id="13" presetID="10" presetClass="entr" presetSubtype="0" fill="hold" grpId="0" nodeType="withEffect">
                                   <p:stCondLst>
-                                    <p:cond delay="200"/>
+                                    <p:cond delay="230"/>
                                   </p:stCondLst>
                                   <p:childTnLst>
                                     <p:set>
@@ -7154,7 +7154,7 @@
                                     </p:set>
                                     <p:animEffect transition="in" filter="fade">
                                       <p:cBhvr>
-                                        <p:cTn id="15" dur="650"/>
+                                        <p:cTn id="15" dur="822"/>
                                         <p:tgtEl>
                                           <p:spTgt spid="6"/>
                                         </p:tgtEl>
@@ -7162,7 +7162,7 @@
                                     </p:animEffect>
                                     <p:animScale>
                                       <p:cBhvr>
-                                        <p:cTn id="16" dur="650" fill="hold"/>
+                                        <p:cTn id="16" dur="822" fill="hold" decel="60000"/>
                                         <p:tgtEl>
                                           <p:spTgt spid="6"/>
                                         </p:tgtEl>
@@ -7176,7 +7176,7 @@
                               <p:par>
                                 <p:cTn id="17" presetID="10" presetClass="entr" presetSubtype="0" fill="hold" grpId="0" nodeType="withEffect">
                                   <p:stCondLst>
-                                    <p:cond delay="300"/>
+                                    <p:cond delay="270"/>
                                   </p:stCondLst>
                                   <p:childTnLst>
                                     <p:set>
@@ -7199,7 +7199,7 @@
                                     </p:set>
                                     <p:animEffect transition="in" filter="fade">
                                       <p:cBhvr>
-                                        <p:cTn id="19" dur="650"/>
+                                        <p:cTn id="19" dur="822"/>
                                         <p:tgtEl>
                                           <p:spTgt spid="9"/>
                                         </p:tgtEl>
@@ -7207,7 +7207,7 @@
                                     </p:animEffect>
                                     <p:animScale>
                                       <p:cBhvr>
-                                        <p:cTn id="20" dur="650" fill="hold"/>
+                                        <p:cTn id="20" dur="822" fill="hold" decel="60000"/>
                                         <p:tgtEl>
                                           <p:spTgt spid="9"/>
                                         </p:tgtEl>
@@ -7221,7 +7221,7 @@
                               <p:par>
                                 <p:cTn id="21" presetID="10" presetClass="entr" presetSubtype="0" fill="hold" grpId="0" nodeType="withEffect">
                                   <p:stCondLst>
-                                    <p:cond delay="400"/>
+                                    <p:cond delay="310"/>
                                   </p:stCondLst>
                                   <p:childTnLst>
                                     <p:set>
@@ -7244,7 +7244,7 @@
                                     </p:set>
                                     <p:animEffect transition="in" filter="fade">
                                       <p:cBhvr>
-                                        <p:cTn id="23" dur="650"/>
+                                        <p:cTn id="23" dur="822"/>
                                         <p:tgtEl>
                                           <p:spTgt spid="12"/>
                                         </p:tgtEl>
@@ -7252,7 +7252,7 @@
                                     </p:animEffect>
                                     <p:animScale>
                                       <p:cBhvr>
-                                        <p:cTn id="24" dur="650" fill="hold"/>
+                                        <p:cTn id="24" dur="822" fill="hold" decel="60000"/>
                                         <p:tgtEl>
                                           <p:spTgt spid="12"/>
                                         </p:tgtEl>
@@ -7266,7 +7266,7 @@
                               <p:par>
                                 <p:cTn id="25" presetID="10" presetClass="entr" presetSubtype="0" fill="hold" grpId="0" nodeType="withEffect">
                                   <p:stCondLst>
-                                    <p:cond delay="500"/>
+                                    <p:cond delay="380"/>
                                   </p:stCondLst>
                                   <p:childTnLst>
                                     <p:set>
@@ -7289,7 +7289,7 @@
                                     </p:set>
                                     <p:animEffect transition="in" filter="fade">
                                       <p:cBhvr>
-                                        <p:cTn id="27" dur="650"/>
+                                        <p:cTn id="27" dur="604"/>
                                         <p:tgtEl>
                                           <p:spTgt spid="4"/>
                                         </p:tgtEl>
@@ -7297,7 +7297,7 @@
                                     </p:animEffect>
                                     <p:anim calcmode="lin" valueType="num">
                                       <p:cBhvr additive="base">
-                                        <p:cTn id="28" dur="650" fill="hold"/>
+                                        <p:cTn id="28" dur="604" fill="hold" decel="80000"/>
                                         <p:tgtEl>
                                           <p:spTgt spid="4"/>
                                         </p:tgtEl>
@@ -7324,7 +7324,7 @@
                               <p:par>
                                 <p:cTn id="29" presetID="10" presetClass="entr" presetSubtype="0" fill="hold" grpId="0" nodeType="withEffect">
                                   <p:stCondLst>
-                                    <p:cond delay="600"/>
+                                    <p:cond delay="420"/>
                                   </p:stCondLst>
                                   <p:childTnLst>
                                     <p:set>
@@ -7347,7 +7347,7 @@
                                     </p:set>
                                     <p:animEffect transition="in" filter="fade">
                                       <p:cBhvr>
-                                        <p:cTn id="31" dur="650"/>
+                                        <p:cTn id="31" dur="604"/>
                                         <p:tgtEl>
                                           <p:spTgt spid="7"/>
                                         </p:tgtEl>
@@ -7355,7 +7355,7 @@
                                     </p:animEffect>
                                     <p:anim calcmode="lin" valueType="num">
                                       <p:cBhvr additive="base">
-                                        <p:cTn id="32" dur="650" fill="hold"/>
+                                        <p:cTn id="32" dur="604" fill="hold" decel="80000"/>
                                         <p:tgtEl>
                                           <p:spTgt spid="7"/>
                                         </p:tgtEl>
@@ -7382,7 +7382,7 @@
                               <p:par>
                                 <p:cTn id="33" presetID="10" presetClass="entr" presetSubtype="0" fill="hold" grpId="0" nodeType="withEffect">
                                   <p:stCondLst>
-                                    <p:cond delay="700"/>
+                                    <p:cond delay="460"/>
                                   </p:stCondLst>
                                   <p:childTnLst>
                                     <p:set>
@@ -7405,7 +7405,7 @@
                                     </p:set>
                                     <p:animEffect transition="in" filter="fade">
                                       <p:cBhvr>
-                                        <p:cTn id="35" dur="650"/>
+                                        <p:cTn id="35" dur="604"/>
                                         <p:tgtEl>
                                           <p:spTgt spid="10"/>
                                         </p:tgtEl>
@@ -7413,7 +7413,7 @@
                                     </p:animEffect>
                                     <p:anim calcmode="lin" valueType="num">
                                       <p:cBhvr additive="base">
-                                        <p:cTn id="36" dur="650" fill="hold"/>
+                                        <p:cTn id="36" dur="604" fill="hold" decel="80000"/>
                                         <p:tgtEl>
                                           <p:spTgt spid="10"/>
                                         </p:tgtEl>
@@ -7440,7 +7440,7 @@
                               <p:par>
                                 <p:cTn id="37" presetID="10" presetClass="entr" presetSubtype="0" fill="hold" grpId="0" nodeType="withEffect">
                                   <p:stCondLst>
-                                    <p:cond delay="800"/>
+                                    <p:cond delay="500"/>
                                   </p:stCondLst>
                                   <p:childTnLst>
                                     <p:set>
@@ -7463,7 +7463,7 @@
                                     </p:set>
                                     <p:animEffect transition="in" filter="fade">
                                       <p:cBhvr>
-                                        <p:cTn id="39" dur="650"/>
+                                        <p:cTn id="39" dur="604"/>
                                         <p:tgtEl>
                                           <p:spTgt spid="13"/>
                                         </p:tgtEl>
@@ -7471,7 +7471,7 @@
                                     </p:animEffect>
                                     <p:anim calcmode="lin" valueType="num">
                                       <p:cBhvr additive="base">
-                                        <p:cTn id="40" dur="650" fill="hold"/>
+                                        <p:cTn id="40" dur="604" fill="hold" decel="80000"/>
                                         <p:tgtEl>
                                           <p:spTgt spid="13"/>
                                         </p:tgtEl>
@@ -7498,7 +7498,7 @@
                               <p:par>
                                 <p:cTn id="41" presetID="10" presetClass="entr" presetSubtype="0" fill="hold" grpId="0" nodeType="withEffect">
                                   <p:stCondLst>
-                                    <p:cond delay="900"/>
+                                    <p:cond delay="570"/>
                                   </p:stCondLst>
                                   <p:childTnLst>
                                     <p:set>
@@ -7521,7 +7521,7 @@
                                     </p:set>
                                     <p:animEffect transition="in" filter="fade">
                                       <p:cBhvr>
-                                        <p:cTn id="43" dur="650"/>
+                                        <p:cTn id="43" dur="635"/>
                                         <p:tgtEl>
                                           <p:spTgt spid="5"/>
                                         </p:tgtEl>
@@ -7529,7 +7529,7 @@
                                     </p:animEffect>
                                     <p:anim calcmode="lin" valueType="num">
                                       <p:cBhvr additive="base">
-                                        <p:cTn id="44" dur="650" fill="hold"/>
+                                        <p:cTn id="44" dur="635" fill="hold" decel="80000"/>
                                         <p:tgtEl>
                                           <p:spTgt spid="5"/>
                                         </p:tgtEl>
@@ -7556,7 +7556,7 @@
                               <p:par>
                                 <p:cTn id="45" presetID="10" presetClass="entr" presetSubtype="0" fill="hold" grpId="0" nodeType="withEffect">
                                   <p:stCondLst>
-                                    <p:cond delay="1000"/>
+                                    <p:cond delay="610"/>
                                   </p:stCondLst>
                                   <p:childTnLst>
                                     <p:set>
@@ -7579,7 +7579,7 @@
                                     </p:set>
                                     <p:animEffect transition="in" filter="fade">
                                       <p:cBhvr>
-                                        <p:cTn id="47" dur="650"/>
+                                        <p:cTn id="47" dur="635"/>
                                         <p:tgtEl>
                                           <p:spTgt spid="8"/>
                                         </p:tgtEl>
@@ -7587,7 +7587,7 @@
                                     </p:animEffect>
                                     <p:anim calcmode="lin" valueType="num">
                                       <p:cBhvr additive="base">
-                                        <p:cTn id="48" dur="650" fill="hold"/>
+                                        <p:cTn id="48" dur="635" fill="hold" decel="80000"/>
                                         <p:tgtEl>
                                           <p:spTgt spid="8"/>
                                         </p:tgtEl>
@@ -7614,7 +7614,7 @@
                               <p:par>
                                 <p:cTn id="49" presetID="10" presetClass="entr" presetSubtype="0" fill="hold" grpId="0" nodeType="withEffect">
                                   <p:stCondLst>
-                                    <p:cond delay="1100"/>
+                                    <p:cond delay="650"/>
                                   </p:stCondLst>
                                   <p:childTnLst>
                                     <p:set>
@@ -7637,7 +7637,7 @@
                                     </p:set>
                                     <p:animEffect transition="in" filter="fade">
                                       <p:cBhvr>
-                                        <p:cTn id="51" dur="650"/>
+                                        <p:cTn id="51" dur="635"/>
                                         <p:tgtEl>
                                           <p:spTgt spid="11"/>
                                         </p:tgtEl>
@@ -7645,7 +7645,7 @@
                                     </p:animEffect>
                                     <p:anim calcmode="lin" valueType="num">
                                       <p:cBhvr additive="base">
-                                        <p:cTn id="52" dur="650" fill="hold"/>
+                                        <p:cTn id="52" dur="635" fill="hold" decel="80000"/>
                                         <p:tgtEl>
                                           <p:spTgt spid="11"/>
                                         </p:tgtEl>
@@ -7672,7 +7672,7 @@
                               <p:par>
                                 <p:cTn id="53" presetID="10" presetClass="entr" presetSubtype="0" fill="hold" grpId="0" nodeType="withEffect">
                                   <p:stCondLst>
-                                    <p:cond delay="1200"/>
+                                    <p:cond delay="690"/>
                                   </p:stCondLst>
                                   <p:childTnLst>
                                     <p:set>
@@ -7695,7 +7695,7 @@
                                     </p:set>
                                     <p:animEffect transition="in" filter="fade">
                                       <p:cBhvr>
-                                        <p:cTn id="55" dur="650"/>
+                                        <p:cTn id="55" dur="635"/>
                                         <p:tgtEl>
                                           <p:spTgt spid="14"/>
                                         </p:tgtEl>
@@ -7703,7 +7703,7 @@
                                     </p:animEffect>
                                     <p:anim calcmode="lin" valueType="num">
                                       <p:cBhvr additive="base">
-                                        <p:cTn id="56" dur="650" fill="hold"/>
+                                        <p:cTn id="56" dur="635" fill="hold" decel="80000"/>
                                         <p:tgtEl>
                                           <p:spTgt spid="14"/>
                                         </p:tgtEl>
